--- a/ENGO645_Final_Presentation.pptx
+++ b/ENGO645_Final_Presentation.pptx
@@ -151,7 +151,7 @@
 <file path=ppt/revisionInfo.xml><?xml version="1.0" encoding="utf-8"?>
 <p1510:revInfo xmlns:a="http://schemas.openxmlformats.org/drawingml/2006/main" xmlns:r="http://schemas.openxmlformats.org/officeDocument/2006/relationships" xmlns:p1510="http://schemas.microsoft.com/office/powerpoint/2015/10/main">
   <p1510:revLst>
-    <p1510:client id="{9C5334D5-24DC-4818-9687-FAD21332B9BE}" v="3" dt="2026-04-05T07:24:41.799"/>
+    <p1510:client id="{9C5334D5-24DC-4818-9687-FAD21332B9BE}" v="26" dt="2026-04-07T03:09:20.126"/>
   </p1510:revLst>
 </p1510:revInfo>
 </file>
@@ -161,7 +161,7 @@
   <pc:docChgLst>
     <pc:chgData name="Jiageng Mi" userId="9ef2361a-baea-4751-b5dd-7ec30bf627a6" providerId="ADAL" clId="{ED3BAF67-0068-4BB9-A018-EE2B64C0FCCC}"/>
     <pc:docChg chg="undo custSel addSld delSld modSld">
-      <pc:chgData name="Jiageng Mi" userId="9ef2361a-baea-4751-b5dd-7ec30bf627a6" providerId="ADAL" clId="{ED3BAF67-0068-4BB9-A018-EE2B64C0FCCC}" dt="2026-04-05T07:25:00.430" v="11" actId="478"/>
+      <pc:chgData name="Jiageng Mi" userId="9ef2361a-baea-4751-b5dd-7ec30bf627a6" providerId="ADAL" clId="{ED3BAF67-0068-4BB9-A018-EE2B64C0FCCC}" dt="2026-04-07T03:09:40.853" v="674" actId="14734"/>
       <pc:docMkLst>
         <pc:docMk/>
       </pc:docMkLst>
@@ -171,22 +171,6 @@
           <pc:docMk/>
           <pc:sldMk cId="0" sldId="256"/>
         </pc:sldMkLst>
-        <pc:spChg chg="del">
-          <ac:chgData name="Jiageng Mi" userId="9ef2361a-baea-4751-b5dd-7ec30bf627a6" providerId="ADAL" clId="{ED3BAF67-0068-4BB9-A018-EE2B64C0FCCC}" dt="2026-04-05T07:25:00.430" v="11" actId="478"/>
-          <ac:spMkLst>
-            <pc:docMk/>
-            <pc:sldMk cId="0" sldId="256"/>
-            <ac:spMk id="4" creationId="{00000000-0000-0000-0000-000000000000}"/>
-          </ac:spMkLst>
-        </pc:spChg>
-        <pc:picChg chg="del">
-          <ac:chgData name="Jiageng Mi" userId="9ef2361a-baea-4751-b5dd-7ec30bf627a6" providerId="ADAL" clId="{ED3BAF67-0068-4BB9-A018-EE2B64C0FCCC}" dt="2026-04-05T07:23:48.641" v="5" actId="478"/>
-          <ac:picMkLst>
-            <pc:docMk/>
-            <pc:sldMk cId="0" sldId="256"/>
-            <ac:picMk id="2" creationId="{00000000-0000-0000-0000-000000000000}"/>
-          </ac:picMkLst>
-        </pc:picChg>
       </pc:sldChg>
       <pc:sldChg chg="delSp add mod setBg modClrScheme chgLayout">
         <pc:chgData name="Jiageng Mi" userId="9ef2361a-baea-4751-b5dd-7ec30bf627a6" providerId="ADAL" clId="{ED3BAF67-0068-4BB9-A018-EE2B64C0FCCC}" dt="2026-04-05T07:24:57.162" v="10" actId="478"/>
@@ -194,22 +178,977 @@
           <pc:docMk/>
           <pc:sldMk cId="0" sldId="257"/>
         </pc:sldMkLst>
-        <pc:spChg chg="del">
-          <ac:chgData name="Jiageng Mi" userId="9ef2361a-baea-4751-b5dd-7ec30bf627a6" providerId="ADAL" clId="{ED3BAF67-0068-4BB9-A018-EE2B64C0FCCC}" dt="2026-04-05T07:24:57.162" v="10" actId="478"/>
+      </pc:sldChg>
+      <pc:sldChg chg="modSp mod">
+        <pc:chgData name="Jiageng Mi" userId="9ef2361a-baea-4751-b5dd-7ec30bf627a6" providerId="ADAL" clId="{ED3BAF67-0068-4BB9-A018-EE2B64C0FCCC}" dt="2026-04-06T00:46:06.569" v="57" actId="14100"/>
+        <pc:sldMkLst>
+          <pc:docMk/>
+          <pc:sldMk cId="0" sldId="258"/>
+        </pc:sldMkLst>
+        <pc:spChg chg="mod">
+          <ac:chgData name="Jiageng Mi" userId="9ef2361a-baea-4751-b5dd-7ec30bf627a6" providerId="ADAL" clId="{ED3BAF67-0068-4BB9-A018-EE2B64C0FCCC}" dt="2026-04-06T00:46:06.569" v="57" actId="14100"/>
           <ac:spMkLst>
             <pc:docMk/>
-            <pc:sldMk cId="0" sldId="257"/>
-            <ac:spMk id="4" creationId="{00000000-0000-0000-0000-000000000000}"/>
+            <pc:sldMk cId="0" sldId="258"/>
+            <ac:spMk id="6" creationId="{00000000-0000-0000-0000-000000000000}"/>
           </ac:spMkLst>
         </pc:spChg>
-        <pc:picChg chg="del">
-          <ac:chgData name="Jiageng Mi" userId="9ef2361a-baea-4751-b5dd-7ec30bf627a6" providerId="ADAL" clId="{ED3BAF67-0068-4BB9-A018-EE2B64C0FCCC}" dt="2026-04-05T07:24:15.382" v="9" actId="478"/>
+      </pc:sldChg>
+      <pc:sldChg chg="addSp delSp modSp mod">
+        <pc:chgData name="Jiageng Mi" userId="9ef2361a-baea-4751-b5dd-7ec30bf627a6" providerId="ADAL" clId="{ED3BAF67-0068-4BB9-A018-EE2B64C0FCCC}" dt="2026-04-06T23:49:14.085" v="232" actId="1076"/>
+        <pc:sldMkLst>
+          <pc:docMk/>
+          <pc:sldMk cId="0" sldId="259"/>
+        </pc:sldMkLst>
+        <pc:spChg chg="mod">
+          <ac:chgData name="Jiageng Mi" userId="9ef2361a-baea-4751-b5dd-7ec30bf627a6" providerId="ADAL" clId="{ED3BAF67-0068-4BB9-A018-EE2B64C0FCCC}" dt="2026-04-06T23:35:53.175" v="98"/>
+          <ac:spMkLst>
+            <pc:docMk/>
+            <pc:sldMk cId="0" sldId="259"/>
+            <ac:spMk id="3" creationId="{00000000-0000-0000-0000-000000000000}"/>
+          </ac:spMkLst>
+        </pc:spChg>
+        <pc:spChg chg="add mod">
+          <ac:chgData name="Jiageng Mi" userId="9ef2361a-baea-4751-b5dd-7ec30bf627a6" providerId="ADAL" clId="{ED3BAF67-0068-4BB9-A018-EE2B64C0FCCC}" dt="2026-04-06T23:41:36.183" v="156" actId="164"/>
+          <ac:spMkLst>
+            <pc:docMk/>
+            <pc:sldMk cId="0" sldId="259"/>
+            <ac:spMk id="4" creationId="{00358996-F12C-7A6B-362C-03553E3E4C8E}"/>
+          </ac:spMkLst>
+        </pc:spChg>
+        <pc:spChg chg="del mod">
+          <ac:chgData name="Jiageng Mi" userId="9ef2361a-baea-4751-b5dd-7ec30bf627a6" providerId="ADAL" clId="{ED3BAF67-0068-4BB9-A018-EE2B64C0FCCC}" dt="2026-04-06T23:23:02.379" v="97" actId="478"/>
+          <ac:spMkLst>
+            <pc:docMk/>
+            <pc:sldMk cId="0" sldId="259"/>
+            <ac:spMk id="5" creationId="{00000000-0000-0000-0000-000000000000}"/>
+          </ac:spMkLst>
+        </pc:spChg>
+        <pc:spChg chg="mod ord">
+          <ac:chgData name="Jiageng Mi" userId="9ef2361a-baea-4751-b5dd-7ec30bf627a6" providerId="ADAL" clId="{ED3BAF67-0068-4BB9-A018-EE2B64C0FCCC}" dt="2026-04-06T23:41:36.183" v="156" actId="164"/>
+          <ac:spMkLst>
+            <pc:docMk/>
+            <pc:sldMk cId="0" sldId="259"/>
+            <ac:spMk id="6" creationId="{00000000-0000-0000-0000-000000000000}"/>
+          </ac:spMkLst>
+        </pc:spChg>
+        <pc:spChg chg="mod ord">
+          <ac:chgData name="Jiageng Mi" userId="9ef2361a-baea-4751-b5dd-7ec30bf627a6" providerId="ADAL" clId="{ED3BAF67-0068-4BB9-A018-EE2B64C0FCCC}" dt="2026-04-06T23:41:36.183" v="156" actId="164"/>
+          <ac:spMkLst>
+            <pc:docMk/>
+            <pc:sldMk cId="0" sldId="259"/>
+            <ac:spMk id="7" creationId="{00000000-0000-0000-0000-000000000000}"/>
+          </ac:spMkLst>
+        </pc:spChg>
+        <pc:spChg chg="mod ord">
+          <ac:chgData name="Jiageng Mi" userId="9ef2361a-baea-4751-b5dd-7ec30bf627a6" providerId="ADAL" clId="{ED3BAF67-0068-4BB9-A018-EE2B64C0FCCC}" dt="2026-04-06T23:41:36.183" v="156" actId="164"/>
+          <ac:spMkLst>
+            <pc:docMk/>
+            <pc:sldMk cId="0" sldId="259"/>
+            <ac:spMk id="8" creationId="{00000000-0000-0000-0000-000000000000}"/>
+          </ac:spMkLst>
+        </pc:spChg>
+        <pc:spChg chg="mod">
+          <ac:chgData name="Jiageng Mi" userId="9ef2361a-baea-4751-b5dd-7ec30bf627a6" providerId="ADAL" clId="{ED3BAF67-0068-4BB9-A018-EE2B64C0FCCC}" dt="2026-04-06T23:49:13.403" v="231" actId="1076"/>
+          <ac:spMkLst>
+            <pc:docMk/>
+            <pc:sldMk cId="0" sldId="259"/>
+            <ac:spMk id="9" creationId="{00000000-0000-0000-0000-000000000000}"/>
+          </ac:spMkLst>
+        </pc:spChg>
+        <pc:spChg chg="mod">
+          <ac:chgData name="Jiageng Mi" userId="9ef2361a-baea-4751-b5dd-7ec30bf627a6" providerId="ADAL" clId="{ED3BAF67-0068-4BB9-A018-EE2B64C0FCCC}" dt="2026-04-06T23:49:13.403" v="231" actId="1076"/>
+          <ac:spMkLst>
+            <pc:docMk/>
+            <pc:sldMk cId="0" sldId="259"/>
+            <ac:spMk id="11" creationId="{00000000-0000-0000-0000-000000000000}"/>
+          </ac:spMkLst>
+        </pc:spChg>
+        <pc:spChg chg="mod">
+          <ac:chgData name="Jiageng Mi" userId="9ef2361a-baea-4751-b5dd-7ec30bf627a6" providerId="ADAL" clId="{ED3BAF67-0068-4BB9-A018-EE2B64C0FCCC}" dt="2026-04-06T23:49:13.403" v="231" actId="1076"/>
+          <ac:spMkLst>
+            <pc:docMk/>
+            <pc:sldMk cId="0" sldId="259"/>
+            <ac:spMk id="12" creationId="{00000000-0000-0000-0000-000000000000}"/>
+          </ac:spMkLst>
+        </pc:spChg>
+        <pc:spChg chg="mod">
+          <ac:chgData name="Jiageng Mi" userId="9ef2361a-baea-4751-b5dd-7ec30bf627a6" providerId="ADAL" clId="{ED3BAF67-0068-4BB9-A018-EE2B64C0FCCC}" dt="2026-04-06T23:49:13.403" v="231" actId="1076"/>
+          <ac:spMkLst>
+            <pc:docMk/>
+            <pc:sldMk cId="0" sldId="259"/>
+            <ac:spMk id="13" creationId="{00000000-0000-0000-0000-000000000000}"/>
+          </ac:spMkLst>
+        </pc:spChg>
+        <pc:spChg chg="mod">
+          <ac:chgData name="Jiageng Mi" userId="9ef2361a-baea-4751-b5dd-7ec30bf627a6" providerId="ADAL" clId="{ED3BAF67-0068-4BB9-A018-EE2B64C0FCCC}" dt="2026-04-06T23:49:13.403" v="231" actId="1076"/>
+          <ac:spMkLst>
+            <pc:docMk/>
+            <pc:sldMk cId="0" sldId="259"/>
+            <ac:spMk id="15" creationId="{00000000-0000-0000-0000-000000000000}"/>
+          </ac:spMkLst>
+        </pc:spChg>
+        <pc:spChg chg="mod">
+          <ac:chgData name="Jiageng Mi" userId="9ef2361a-baea-4751-b5dd-7ec30bf627a6" providerId="ADAL" clId="{ED3BAF67-0068-4BB9-A018-EE2B64C0FCCC}" dt="2026-04-06T23:49:13.403" v="231" actId="1076"/>
+          <ac:spMkLst>
+            <pc:docMk/>
+            <pc:sldMk cId="0" sldId="259"/>
+            <ac:spMk id="16" creationId="{00000000-0000-0000-0000-000000000000}"/>
+          </ac:spMkLst>
+        </pc:spChg>
+        <pc:spChg chg="mod">
+          <ac:chgData name="Jiageng Mi" userId="9ef2361a-baea-4751-b5dd-7ec30bf627a6" providerId="ADAL" clId="{ED3BAF67-0068-4BB9-A018-EE2B64C0FCCC}" dt="2026-04-06T23:49:13.403" v="231" actId="1076"/>
+          <ac:spMkLst>
+            <pc:docMk/>
+            <pc:sldMk cId="0" sldId="259"/>
+            <ac:spMk id="17" creationId="{00000000-0000-0000-0000-000000000000}"/>
+          </ac:spMkLst>
+        </pc:spChg>
+        <pc:spChg chg="mod">
+          <ac:chgData name="Jiageng Mi" userId="9ef2361a-baea-4751-b5dd-7ec30bf627a6" providerId="ADAL" clId="{ED3BAF67-0068-4BB9-A018-EE2B64C0FCCC}" dt="2026-04-06T23:49:13.403" v="231" actId="1076"/>
+          <ac:spMkLst>
+            <pc:docMk/>
+            <pc:sldMk cId="0" sldId="259"/>
+            <ac:spMk id="19" creationId="{00000000-0000-0000-0000-000000000000}"/>
+          </ac:spMkLst>
+        </pc:spChg>
+        <pc:spChg chg="mod">
+          <ac:chgData name="Jiageng Mi" userId="9ef2361a-baea-4751-b5dd-7ec30bf627a6" providerId="ADAL" clId="{ED3BAF67-0068-4BB9-A018-EE2B64C0FCCC}" dt="2026-04-06T23:49:13.403" v="231" actId="1076"/>
+          <ac:spMkLst>
+            <pc:docMk/>
+            <pc:sldMk cId="0" sldId="259"/>
+            <ac:spMk id="20" creationId="{00000000-0000-0000-0000-000000000000}"/>
+          </ac:spMkLst>
+        </pc:spChg>
+        <pc:spChg chg="add del mod ord">
+          <ac:chgData name="Jiageng Mi" userId="9ef2361a-baea-4751-b5dd-7ec30bf627a6" providerId="ADAL" clId="{ED3BAF67-0068-4BB9-A018-EE2B64C0FCCC}" dt="2026-04-06T23:39:18.306" v="125" actId="478"/>
+          <ac:spMkLst>
+            <pc:docMk/>
+            <pc:sldMk cId="0" sldId="259"/>
+            <ac:spMk id="21" creationId="{00000000-0000-0000-0000-000000000000}"/>
+          </ac:spMkLst>
+        </pc:spChg>
+        <pc:spChg chg="del mod ord">
+          <ac:chgData name="Jiageng Mi" userId="9ef2361a-baea-4751-b5dd-7ec30bf627a6" providerId="ADAL" clId="{ED3BAF67-0068-4BB9-A018-EE2B64C0FCCC}" dt="2026-04-06T23:36:44.182" v="107" actId="478"/>
+          <ac:spMkLst>
+            <pc:docMk/>
+            <pc:sldMk cId="0" sldId="259"/>
+            <ac:spMk id="22" creationId="{00000000-0000-0000-0000-000000000000}"/>
+          </ac:spMkLst>
+        </pc:spChg>
+        <pc:spChg chg="add del mod ord">
+          <ac:chgData name="Jiageng Mi" userId="9ef2361a-baea-4751-b5dd-7ec30bf627a6" providerId="ADAL" clId="{ED3BAF67-0068-4BB9-A018-EE2B64C0FCCC}" dt="2026-04-06T23:49:14.085" v="232" actId="1076"/>
+          <ac:spMkLst>
+            <pc:docMk/>
+            <pc:sldMk cId="0" sldId="259"/>
+            <ac:spMk id="23" creationId="{00000000-0000-0000-0000-000000000000}"/>
+          </ac:spMkLst>
+        </pc:spChg>
+        <pc:spChg chg="add del mod">
+          <ac:chgData name="Jiageng Mi" userId="9ef2361a-baea-4751-b5dd-7ec30bf627a6" providerId="ADAL" clId="{ED3BAF67-0068-4BB9-A018-EE2B64C0FCCC}" dt="2026-04-06T23:49:11.209" v="225" actId="22"/>
+          <ac:spMkLst>
+            <pc:docMk/>
+            <pc:sldMk cId="0" sldId="259"/>
+            <ac:spMk id="27" creationId="{E9718937-6186-6C53-F828-5926D9EA1C01}"/>
+          </ac:spMkLst>
+        </pc:spChg>
+        <pc:grpChg chg="add mod">
+          <ac:chgData name="Jiageng Mi" userId="9ef2361a-baea-4751-b5dd-7ec30bf627a6" providerId="ADAL" clId="{ED3BAF67-0068-4BB9-A018-EE2B64C0FCCC}" dt="2026-04-06T23:49:08.844" v="217" actId="1076"/>
+          <ac:grpSpMkLst>
+            <pc:docMk/>
+            <pc:sldMk cId="0" sldId="259"/>
+            <ac:grpSpMk id="24" creationId="{FD602332-B8F3-9F1E-0D73-442176C5FE9D}"/>
+          </ac:grpSpMkLst>
+        </pc:grpChg>
+        <pc:picChg chg="add mod modCrop">
+          <ac:chgData name="Jiageng Mi" userId="9ef2361a-baea-4751-b5dd-7ec30bf627a6" providerId="ADAL" clId="{ED3BAF67-0068-4BB9-A018-EE2B64C0FCCC}" dt="2026-04-06T23:41:36.183" v="156" actId="164"/>
           <ac:picMkLst>
             <pc:docMk/>
-            <pc:sldMk cId="0" sldId="257"/>
+            <pc:sldMk cId="0" sldId="259"/>
+            <ac:picMk id="2" creationId="{975B6621-DEDA-5301-BF21-7440F16BF2CE}"/>
+          </ac:picMkLst>
+        </pc:picChg>
+        <pc:picChg chg="mod">
+          <ac:chgData name="Jiageng Mi" userId="9ef2361a-baea-4751-b5dd-7ec30bf627a6" providerId="ADAL" clId="{ED3BAF67-0068-4BB9-A018-EE2B64C0FCCC}" dt="2026-04-06T23:49:13.403" v="231" actId="1076"/>
+          <ac:picMkLst>
+            <pc:docMk/>
+            <pc:sldMk cId="0" sldId="259"/>
+            <ac:picMk id="18" creationId="{00000000-0000-0000-0000-000000000000}"/>
+          </ac:picMkLst>
+        </pc:picChg>
+      </pc:sldChg>
+      <pc:sldChg chg="addSp delSp modSp mod">
+        <pc:chgData name="Jiageng Mi" userId="9ef2361a-baea-4751-b5dd-7ec30bf627a6" providerId="ADAL" clId="{ED3BAF67-0068-4BB9-A018-EE2B64C0FCCC}" dt="2026-04-07T02:37:09.947" v="452" actId="1076"/>
+        <pc:sldMkLst>
+          <pc:docMk/>
+          <pc:sldMk cId="0" sldId="260"/>
+        </pc:sldMkLst>
+        <pc:spChg chg="add mod">
+          <ac:chgData name="Jiageng Mi" userId="9ef2361a-baea-4751-b5dd-7ec30bf627a6" providerId="ADAL" clId="{ED3BAF67-0068-4BB9-A018-EE2B64C0FCCC}" dt="2026-04-06T23:49:51.878" v="233" actId="1076"/>
+          <ac:spMkLst>
+            <pc:docMk/>
+            <pc:sldMk cId="0" sldId="260"/>
+            <ac:spMk id="2" creationId="{34E111ED-4AED-7E95-0D6B-49B2DB2C30FE}"/>
+          </ac:spMkLst>
+        </pc:spChg>
+        <pc:spChg chg="add del mod">
+          <ac:chgData name="Jiageng Mi" userId="9ef2361a-baea-4751-b5dd-7ec30bf627a6" providerId="ADAL" clId="{ED3BAF67-0068-4BB9-A018-EE2B64C0FCCC}" dt="2026-04-06T23:46:01.135" v="186" actId="478"/>
+          <ac:spMkLst>
+            <pc:docMk/>
+            <pc:sldMk cId="0" sldId="260"/>
+            <ac:spMk id="4" creationId="{DCDF4867-39E1-5B98-AE02-A958B4A5D8D6}"/>
+          </ac:spMkLst>
+        </pc:spChg>
+        <pc:spChg chg="mod">
+          <ac:chgData name="Jiageng Mi" userId="9ef2361a-baea-4751-b5dd-7ec30bf627a6" providerId="ADAL" clId="{ED3BAF67-0068-4BB9-A018-EE2B64C0FCCC}" dt="2026-04-07T02:26:45.292" v="402" actId="255"/>
+          <ac:spMkLst>
+            <pc:docMk/>
+            <pc:sldMk cId="0" sldId="260"/>
+            <ac:spMk id="8" creationId="{00000000-0000-0000-0000-000000000000}"/>
+          </ac:spMkLst>
+        </pc:spChg>
+        <pc:spChg chg="mod">
+          <ac:chgData name="Jiageng Mi" userId="9ef2361a-baea-4751-b5dd-7ec30bf627a6" providerId="ADAL" clId="{ED3BAF67-0068-4BB9-A018-EE2B64C0FCCC}" dt="2026-04-07T02:26:15.337" v="396" actId="20577"/>
+          <ac:spMkLst>
+            <pc:docMk/>
+            <pc:sldMk cId="0" sldId="260"/>
+            <ac:spMk id="12" creationId="{00000000-0000-0000-0000-000000000000}"/>
+          </ac:spMkLst>
+        </pc:spChg>
+        <pc:spChg chg="mod">
+          <ac:chgData name="Jiageng Mi" userId="9ef2361a-baea-4751-b5dd-7ec30bf627a6" providerId="ADAL" clId="{ED3BAF67-0068-4BB9-A018-EE2B64C0FCCC}" dt="2026-04-07T02:26:45.292" v="402" actId="255"/>
+          <ac:spMkLst>
+            <pc:docMk/>
+            <pc:sldMk cId="0" sldId="260"/>
+            <ac:spMk id="13" creationId="{00000000-0000-0000-0000-000000000000}"/>
+          </ac:spMkLst>
+        </pc:spChg>
+        <pc:spChg chg="mod">
+          <ac:chgData name="Jiageng Mi" userId="9ef2361a-baea-4751-b5dd-7ec30bf627a6" providerId="ADAL" clId="{ED3BAF67-0068-4BB9-A018-EE2B64C0FCCC}" dt="2026-04-07T02:26:56.466" v="403"/>
+          <ac:spMkLst>
+            <pc:docMk/>
+            <pc:sldMk cId="0" sldId="260"/>
+            <ac:spMk id="17" creationId="{00000000-0000-0000-0000-000000000000}"/>
+          </ac:spMkLst>
+        </pc:spChg>
+        <pc:spChg chg="mod">
+          <ac:chgData name="Jiageng Mi" userId="9ef2361a-baea-4751-b5dd-7ec30bf627a6" providerId="ADAL" clId="{ED3BAF67-0068-4BB9-A018-EE2B64C0FCCC}" dt="2026-04-07T02:27:08.241" v="404"/>
+          <ac:spMkLst>
+            <pc:docMk/>
+            <pc:sldMk cId="0" sldId="260"/>
+            <ac:spMk id="18" creationId="{00000000-0000-0000-0000-000000000000}"/>
+          </ac:spMkLst>
+        </pc:spChg>
+        <pc:spChg chg="mod">
+          <ac:chgData name="Jiageng Mi" userId="9ef2361a-baea-4751-b5dd-7ec30bf627a6" providerId="ADAL" clId="{ED3BAF67-0068-4BB9-A018-EE2B64C0FCCC}" dt="2026-04-07T02:28:49.918" v="415" actId="1076"/>
+          <ac:spMkLst>
+            <pc:docMk/>
+            <pc:sldMk cId="0" sldId="260"/>
+            <ac:spMk id="20" creationId="{00000000-0000-0000-0000-000000000000}"/>
+          </ac:spMkLst>
+        </pc:spChg>
+        <pc:spChg chg="mod">
+          <ac:chgData name="Jiageng Mi" userId="9ef2361a-baea-4751-b5dd-7ec30bf627a6" providerId="ADAL" clId="{ED3BAF67-0068-4BB9-A018-EE2B64C0FCCC}" dt="2026-04-07T02:26:45.292" v="402" actId="255"/>
+          <ac:spMkLst>
+            <pc:docMk/>
+            <pc:sldMk cId="0" sldId="260"/>
+            <ac:spMk id="23" creationId="{00000000-0000-0000-0000-000000000000}"/>
+          </ac:spMkLst>
+        </pc:spChg>
+        <pc:spChg chg="mod">
+          <ac:chgData name="Jiageng Mi" userId="9ef2361a-baea-4751-b5dd-7ec30bf627a6" providerId="ADAL" clId="{ED3BAF67-0068-4BB9-A018-EE2B64C0FCCC}" dt="2026-04-07T02:27:56.485" v="405"/>
+          <ac:spMkLst>
+            <pc:docMk/>
+            <pc:sldMk cId="0" sldId="260"/>
+            <ac:spMk id="24" creationId="{00000000-0000-0000-0000-000000000000}"/>
+          </ac:spMkLst>
+        </pc:spChg>
+        <pc:spChg chg="mod">
+          <ac:chgData name="Jiageng Mi" userId="9ef2361a-baea-4751-b5dd-7ec30bf627a6" providerId="ADAL" clId="{ED3BAF67-0068-4BB9-A018-EE2B64C0FCCC}" dt="2026-04-07T02:28:05.238" v="406"/>
+          <ac:spMkLst>
+            <pc:docMk/>
+            <pc:sldMk cId="0" sldId="260"/>
+            <ac:spMk id="25" creationId="{00000000-0000-0000-0000-000000000000}"/>
+          </ac:spMkLst>
+        </pc:spChg>
+        <pc:spChg chg="mod">
+          <ac:chgData name="Jiageng Mi" userId="9ef2361a-baea-4751-b5dd-7ec30bf627a6" providerId="ADAL" clId="{ED3BAF67-0068-4BB9-A018-EE2B64C0FCCC}" dt="2026-04-07T02:28:35.757" v="411" actId="1076"/>
+          <ac:spMkLst>
+            <pc:docMk/>
+            <pc:sldMk cId="0" sldId="260"/>
+            <ac:spMk id="26" creationId="{00000000-0000-0000-0000-000000000000}"/>
+          </ac:spMkLst>
+        </pc:spChg>
+        <pc:spChg chg="mod">
+          <ac:chgData name="Jiageng Mi" userId="9ef2361a-baea-4751-b5dd-7ec30bf627a6" providerId="ADAL" clId="{ED3BAF67-0068-4BB9-A018-EE2B64C0FCCC}" dt="2026-04-07T02:28:53.504" v="416" actId="1076"/>
+          <ac:spMkLst>
+            <pc:docMk/>
+            <pc:sldMk cId="0" sldId="260"/>
+            <ac:spMk id="27" creationId="{00000000-0000-0000-0000-000000000000}"/>
+          </ac:spMkLst>
+        </pc:spChg>
+        <pc:spChg chg="mod">
+          <ac:chgData name="Jiageng Mi" userId="9ef2361a-baea-4751-b5dd-7ec30bf627a6" providerId="ADAL" clId="{ED3BAF67-0068-4BB9-A018-EE2B64C0FCCC}" dt="2026-04-06T23:47:03.815" v="196" actId="1076"/>
+          <ac:spMkLst>
+            <pc:docMk/>
+            <pc:sldMk cId="0" sldId="260"/>
+            <ac:spMk id="28" creationId="{00000000-0000-0000-0000-000000000000}"/>
+          </ac:spMkLst>
+        </pc:spChg>
+        <pc:spChg chg="del mod">
+          <ac:chgData name="Jiageng Mi" userId="9ef2361a-baea-4751-b5dd-7ec30bf627a6" providerId="ADAL" clId="{ED3BAF67-0068-4BB9-A018-EE2B64C0FCCC}" dt="2026-04-07T02:37:06.532" v="451" actId="478"/>
+          <ac:spMkLst>
+            <pc:docMk/>
+            <pc:sldMk cId="0" sldId="260"/>
+            <ac:spMk id="29" creationId="{00000000-0000-0000-0000-000000000000}"/>
+          </ac:spMkLst>
+        </pc:spChg>
+        <pc:spChg chg="add mod">
+          <ac:chgData name="Jiageng Mi" userId="9ef2361a-baea-4751-b5dd-7ec30bf627a6" providerId="ADAL" clId="{ED3BAF67-0068-4BB9-A018-EE2B64C0FCCC}" dt="2026-04-07T02:37:09.947" v="452" actId="1076"/>
+          <ac:spMkLst>
+            <pc:docMk/>
+            <pc:sldMk cId="0" sldId="260"/>
+            <ac:spMk id="30" creationId="{F89018CC-8CE3-161C-393A-8E66B242FB8C}"/>
+          </ac:spMkLst>
+        </pc:spChg>
+      </pc:sldChg>
+      <pc:sldChg chg="addSp delSp modSp mod">
+        <pc:chgData name="Jiageng Mi" userId="9ef2361a-baea-4751-b5dd-7ec30bf627a6" providerId="ADAL" clId="{ED3BAF67-0068-4BB9-A018-EE2B64C0FCCC}" dt="2026-04-07T02:35:58.120" v="449" actId="20577"/>
+        <pc:sldMkLst>
+          <pc:docMk/>
+          <pc:sldMk cId="0" sldId="261"/>
+        </pc:sldMkLst>
+        <pc:spChg chg="mod">
+          <ac:chgData name="Jiageng Mi" userId="9ef2361a-baea-4751-b5dd-7ec30bf627a6" providerId="ADAL" clId="{ED3BAF67-0068-4BB9-A018-EE2B64C0FCCC}" dt="2026-04-07T02:29:03.971" v="417" actId="1076"/>
+          <ac:spMkLst>
+            <pc:docMk/>
+            <pc:sldMk cId="0" sldId="261"/>
+            <ac:spMk id="6" creationId="{00000000-0000-0000-0000-000000000000}"/>
+          </ac:spMkLst>
+        </pc:spChg>
+        <pc:spChg chg="mod">
+          <ac:chgData name="Jiageng Mi" userId="9ef2361a-baea-4751-b5dd-7ec30bf627a6" providerId="ADAL" clId="{ED3BAF67-0068-4BB9-A018-EE2B64C0FCCC}" dt="2026-04-07T02:35:58.120" v="449" actId="20577"/>
+          <ac:spMkLst>
+            <pc:docMk/>
+            <pc:sldMk cId="0" sldId="261"/>
+            <ac:spMk id="7" creationId="{00000000-0000-0000-0000-000000000000}"/>
+          </ac:spMkLst>
+        </pc:spChg>
+        <pc:spChg chg="mod">
+          <ac:chgData name="Jiageng Mi" userId="9ef2361a-baea-4751-b5dd-7ec30bf627a6" providerId="ADAL" clId="{ED3BAF67-0068-4BB9-A018-EE2B64C0FCCC}" dt="2026-04-06T23:50:37.602" v="234" actId="1076"/>
+          <ac:spMkLst>
+            <pc:docMk/>
+            <pc:sldMk cId="0" sldId="261"/>
+            <ac:spMk id="8" creationId="{00000000-0000-0000-0000-000000000000}"/>
+          </ac:spMkLst>
+        </pc:spChg>
+        <pc:graphicFrameChg chg="mod modGraphic">
+          <ac:chgData name="Jiageng Mi" userId="9ef2361a-baea-4751-b5dd-7ec30bf627a6" providerId="ADAL" clId="{ED3BAF67-0068-4BB9-A018-EE2B64C0FCCC}" dt="2026-04-07T02:29:09.188" v="418" actId="14100"/>
+          <ac:graphicFrameMkLst>
+            <pc:docMk/>
+            <pc:sldMk cId="0" sldId="261"/>
+            <ac:graphicFrameMk id="5" creationId="{00000000-0000-0000-0000-000000000000}"/>
+          </ac:graphicFrameMkLst>
+        </pc:graphicFrameChg>
+        <pc:graphicFrameChg chg="mod">
+          <ac:chgData name="Jiageng Mi" userId="9ef2361a-baea-4751-b5dd-7ec30bf627a6" providerId="ADAL" clId="{ED3BAF67-0068-4BB9-A018-EE2B64C0FCCC}" dt="2026-04-06T23:50:37.602" v="234" actId="1076"/>
+          <ac:graphicFrameMkLst>
+            <pc:docMk/>
+            <pc:sldMk cId="0" sldId="261"/>
+            <ac:graphicFrameMk id="9" creationId="{00000000-0000-0000-0000-000000000000}"/>
+          </ac:graphicFrameMkLst>
+        </pc:graphicFrameChg>
+        <pc:picChg chg="add del">
+          <ac:chgData name="Jiageng Mi" userId="9ef2361a-baea-4751-b5dd-7ec30bf627a6" providerId="ADAL" clId="{ED3BAF67-0068-4BB9-A018-EE2B64C0FCCC}" dt="2026-04-06T23:51:41.539" v="241" actId="478"/>
+          <ac:picMkLst>
+            <pc:docMk/>
+            <pc:sldMk cId="0" sldId="261"/>
+            <ac:picMk id="4" creationId="{E9744513-83D6-6E45-6C54-CCDF9A348223}"/>
+          </ac:picMkLst>
+        </pc:picChg>
+        <pc:picChg chg="add del mod">
+          <ac:chgData name="Jiageng Mi" userId="9ef2361a-baea-4751-b5dd-7ec30bf627a6" providerId="ADAL" clId="{ED3BAF67-0068-4BB9-A018-EE2B64C0FCCC}" dt="2026-04-06T23:52:24.178" v="248" actId="478"/>
+          <ac:picMkLst>
+            <pc:docMk/>
+            <pc:sldMk cId="0" sldId="261"/>
+            <ac:picMk id="11" creationId="{A80331C1-5FBC-1991-8F84-16D0CD46C77D}"/>
+          </ac:picMkLst>
+        </pc:picChg>
+        <pc:picChg chg="add del mod">
+          <ac:chgData name="Jiageng Mi" userId="9ef2361a-baea-4751-b5dd-7ec30bf627a6" providerId="ADAL" clId="{ED3BAF67-0068-4BB9-A018-EE2B64C0FCCC}" dt="2026-04-06T23:53:22.227" v="252" actId="478"/>
+          <ac:picMkLst>
+            <pc:docMk/>
+            <pc:sldMk cId="0" sldId="261"/>
+            <ac:picMk id="14" creationId="{B9770AFE-08C8-436C-14DC-81C569F3912C}"/>
+          </ac:picMkLst>
+        </pc:picChg>
+      </pc:sldChg>
+      <pc:sldChg chg="addSp modSp mod">
+        <pc:chgData name="Jiageng Mi" userId="9ef2361a-baea-4751-b5dd-7ec30bf627a6" providerId="ADAL" clId="{ED3BAF67-0068-4BB9-A018-EE2B64C0FCCC}" dt="2026-04-07T02:45:26.147" v="597" actId="207"/>
+        <pc:sldMkLst>
+          <pc:docMk/>
+          <pc:sldMk cId="0" sldId="262"/>
+        </pc:sldMkLst>
+        <pc:spChg chg="add mod">
+          <ac:chgData name="Jiageng Mi" userId="9ef2361a-baea-4751-b5dd-7ec30bf627a6" providerId="ADAL" clId="{ED3BAF67-0068-4BB9-A018-EE2B64C0FCCC}" dt="2026-04-07T02:42:28.797" v="510" actId="20577"/>
+          <ac:spMkLst>
+            <pc:docMk/>
+            <pc:sldMk cId="0" sldId="262"/>
+            <ac:spMk id="2" creationId="{529D37C1-9CC2-1E84-B4F4-8D0FA4DA580F}"/>
+          </ac:spMkLst>
+        </pc:spChg>
+        <pc:spChg chg="add mod">
+          <ac:chgData name="Jiageng Mi" userId="9ef2361a-baea-4751-b5dd-7ec30bf627a6" providerId="ADAL" clId="{ED3BAF67-0068-4BB9-A018-EE2B64C0FCCC}" dt="2026-04-07T02:45:26.147" v="597" actId="207"/>
+          <ac:spMkLst>
+            <pc:docMk/>
+            <pc:sldMk cId="0" sldId="262"/>
+            <ac:spMk id="4" creationId="{22B9EF45-C253-3409-1711-9735F88B371B}"/>
+          </ac:spMkLst>
+        </pc:spChg>
+        <pc:spChg chg="mod">
+          <ac:chgData name="Jiageng Mi" userId="9ef2361a-baea-4751-b5dd-7ec30bf627a6" providerId="ADAL" clId="{ED3BAF67-0068-4BB9-A018-EE2B64C0FCCC}" dt="2026-04-07T02:42:03.395" v="486" actId="1076"/>
+          <ac:spMkLst>
+            <pc:docMk/>
+            <pc:sldMk cId="0" sldId="262"/>
+            <ac:spMk id="5" creationId="{00000000-0000-0000-0000-000000000000}"/>
+          </ac:spMkLst>
+        </pc:spChg>
+        <pc:spChg chg="mod">
+          <ac:chgData name="Jiageng Mi" userId="9ef2361a-baea-4751-b5dd-7ec30bf627a6" providerId="ADAL" clId="{ED3BAF67-0068-4BB9-A018-EE2B64C0FCCC}" dt="2026-04-07T02:45:01.086" v="577" actId="20577"/>
+          <ac:spMkLst>
+            <pc:docMk/>
+            <pc:sldMk cId="0" sldId="262"/>
+            <ac:spMk id="6" creationId="{00000000-0000-0000-0000-000000000000}"/>
+          </ac:spMkLst>
+        </pc:spChg>
+        <pc:spChg chg="mod">
+          <ac:chgData name="Jiageng Mi" userId="9ef2361a-baea-4751-b5dd-7ec30bf627a6" providerId="ADAL" clId="{ED3BAF67-0068-4BB9-A018-EE2B64C0FCCC}" dt="2026-04-07T02:42:12.004" v="487" actId="1076"/>
+          <ac:spMkLst>
+            <pc:docMk/>
+            <pc:sldMk cId="0" sldId="262"/>
+            <ac:spMk id="7" creationId="{00000000-0000-0000-0000-000000000000}"/>
+          </ac:spMkLst>
+        </pc:spChg>
+        <pc:spChg chg="mod">
+          <ac:chgData name="Jiageng Mi" userId="9ef2361a-baea-4751-b5dd-7ec30bf627a6" providerId="ADAL" clId="{ED3BAF67-0068-4BB9-A018-EE2B64C0FCCC}" dt="2026-04-07T02:42:12.004" v="487" actId="1076"/>
+          <ac:spMkLst>
+            <pc:docMk/>
+            <pc:sldMk cId="0" sldId="262"/>
+            <ac:spMk id="8" creationId="{00000000-0000-0000-0000-000000000000}"/>
+          </ac:spMkLst>
+        </pc:spChg>
+        <pc:spChg chg="mod">
+          <ac:chgData name="Jiageng Mi" userId="9ef2361a-baea-4751-b5dd-7ec30bf627a6" providerId="ADAL" clId="{ED3BAF67-0068-4BB9-A018-EE2B64C0FCCC}" dt="2026-04-07T02:42:49.738" v="530" actId="1035"/>
+          <ac:spMkLst>
+            <pc:docMk/>
+            <pc:sldMk cId="0" sldId="262"/>
+            <ac:spMk id="9" creationId="{00000000-0000-0000-0000-000000000000}"/>
+          </ac:spMkLst>
+        </pc:spChg>
+        <pc:spChg chg="mod">
+          <ac:chgData name="Jiageng Mi" userId="9ef2361a-baea-4751-b5dd-7ec30bf627a6" providerId="ADAL" clId="{ED3BAF67-0068-4BB9-A018-EE2B64C0FCCC}" dt="2026-04-07T02:42:49.738" v="530" actId="1035"/>
+          <ac:spMkLst>
+            <pc:docMk/>
+            <pc:sldMk cId="0" sldId="262"/>
+            <ac:spMk id="10" creationId="{00000000-0000-0000-0000-000000000000}"/>
+          </ac:spMkLst>
+        </pc:spChg>
+        <pc:spChg chg="mod">
+          <ac:chgData name="Jiageng Mi" userId="9ef2361a-baea-4751-b5dd-7ec30bf627a6" providerId="ADAL" clId="{ED3BAF67-0068-4BB9-A018-EE2B64C0FCCC}" dt="2026-04-07T02:42:49.738" v="530" actId="1035"/>
+          <ac:spMkLst>
+            <pc:docMk/>
+            <pc:sldMk cId="0" sldId="262"/>
+            <ac:spMk id="11" creationId="{00000000-0000-0000-0000-000000000000}"/>
+          </ac:spMkLst>
+        </pc:spChg>
+        <pc:spChg chg="mod">
+          <ac:chgData name="Jiageng Mi" userId="9ef2361a-baea-4751-b5dd-7ec30bf627a6" providerId="ADAL" clId="{ED3BAF67-0068-4BB9-A018-EE2B64C0FCCC}" dt="2026-04-07T02:42:49.738" v="530" actId="1035"/>
+          <ac:spMkLst>
+            <pc:docMk/>
+            <pc:sldMk cId="0" sldId="262"/>
+            <ac:spMk id="12" creationId="{00000000-0000-0000-0000-000000000000}"/>
+          </ac:spMkLst>
+        </pc:spChg>
+        <pc:spChg chg="mod">
+          <ac:chgData name="Jiageng Mi" userId="9ef2361a-baea-4751-b5dd-7ec30bf627a6" providerId="ADAL" clId="{ED3BAF67-0068-4BB9-A018-EE2B64C0FCCC}" dt="2026-04-07T02:42:49.738" v="530" actId="1035"/>
+          <ac:spMkLst>
+            <pc:docMk/>
+            <pc:sldMk cId="0" sldId="262"/>
+            <ac:spMk id="13" creationId="{00000000-0000-0000-0000-000000000000}"/>
+          </ac:spMkLst>
+        </pc:spChg>
+        <pc:spChg chg="mod">
+          <ac:chgData name="Jiageng Mi" userId="9ef2361a-baea-4751-b5dd-7ec30bf627a6" providerId="ADAL" clId="{ED3BAF67-0068-4BB9-A018-EE2B64C0FCCC}" dt="2026-04-07T02:42:49.738" v="530" actId="1035"/>
+          <ac:spMkLst>
+            <pc:docMk/>
+            <pc:sldMk cId="0" sldId="262"/>
+            <ac:spMk id="14" creationId="{00000000-0000-0000-0000-000000000000}"/>
+          </ac:spMkLst>
+        </pc:spChg>
+        <pc:spChg chg="mod">
+          <ac:chgData name="Jiageng Mi" userId="9ef2361a-baea-4751-b5dd-7ec30bf627a6" providerId="ADAL" clId="{ED3BAF67-0068-4BB9-A018-EE2B64C0FCCC}" dt="2026-04-07T02:34:18.280" v="438" actId="14100"/>
+          <ac:spMkLst>
+            <pc:docMk/>
+            <pc:sldMk cId="0" sldId="262"/>
+            <ac:spMk id="15" creationId="{00000000-0000-0000-0000-000000000000}"/>
+          </ac:spMkLst>
+        </pc:spChg>
+        <pc:spChg chg="mod">
+          <ac:chgData name="Jiageng Mi" userId="9ef2361a-baea-4751-b5dd-7ec30bf627a6" providerId="ADAL" clId="{ED3BAF67-0068-4BB9-A018-EE2B64C0FCCC}" dt="2026-04-07T02:34:13.288" v="437" actId="1076"/>
+          <ac:spMkLst>
+            <pc:docMk/>
+            <pc:sldMk cId="0" sldId="262"/>
+            <ac:spMk id="16" creationId="{00000000-0000-0000-0000-000000000000}"/>
+          </ac:spMkLst>
+        </pc:spChg>
+        <pc:spChg chg="mod">
+          <ac:chgData name="Jiageng Mi" userId="9ef2361a-baea-4751-b5dd-7ec30bf627a6" providerId="ADAL" clId="{ED3BAF67-0068-4BB9-A018-EE2B64C0FCCC}" dt="2026-04-07T02:44:39.309" v="568" actId="20577"/>
+          <ac:spMkLst>
+            <pc:docMk/>
+            <pc:sldMk cId="0" sldId="262"/>
+            <ac:spMk id="17" creationId="{00000000-0000-0000-0000-000000000000}"/>
+          </ac:spMkLst>
+        </pc:spChg>
+        <pc:graphicFrameChg chg="mod modGraphic">
+          <ac:chgData name="Jiageng Mi" userId="9ef2361a-baea-4751-b5dd-7ec30bf627a6" providerId="ADAL" clId="{ED3BAF67-0068-4BB9-A018-EE2B64C0FCCC}" dt="2026-04-07T02:34:32.872" v="441" actId="2062"/>
+          <ac:graphicFrameMkLst>
+            <pc:docMk/>
+            <pc:sldMk cId="0" sldId="262"/>
+            <ac:graphicFrameMk id="18" creationId="{00000000-0000-0000-0000-000000000000}"/>
+          </ac:graphicFrameMkLst>
+        </pc:graphicFrameChg>
+      </pc:sldChg>
+      <pc:sldChg chg="addSp modSp mod">
+        <pc:chgData name="Jiageng Mi" userId="9ef2361a-baea-4751-b5dd-7ec30bf627a6" providerId="ADAL" clId="{ED3BAF67-0068-4BB9-A018-EE2B64C0FCCC}" dt="2026-04-07T02:38:18.771" v="453"/>
+        <pc:sldMkLst>
+          <pc:docMk/>
+          <pc:sldMk cId="0" sldId="263"/>
+        </pc:sldMkLst>
+        <pc:spChg chg="add mod">
+          <ac:chgData name="Jiageng Mi" userId="9ef2361a-baea-4751-b5dd-7ec30bf627a6" providerId="ADAL" clId="{ED3BAF67-0068-4BB9-A018-EE2B64C0FCCC}" dt="2026-04-07T02:35:02.479" v="445" actId="14100"/>
+          <ac:spMkLst>
+            <pc:docMk/>
+            <pc:sldMk cId="0" sldId="263"/>
+            <ac:spMk id="2" creationId="{3A3E6EDD-B728-B095-E030-D878017CA54D}"/>
+          </ac:spMkLst>
+        </pc:spChg>
+        <pc:spChg chg="mod">
+          <ac:chgData name="Jiageng Mi" userId="9ef2361a-baea-4751-b5dd-7ec30bf627a6" providerId="ADAL" clId="{ED3BAF67-0068-4BB9-A018-EE2B64C0FCCC}" dt="2026-04-07T02:38:18.771" v="453"/>
+          <ac:spMkLst>
+            <pc:docMk/>
+            <pc:sldMk cId="0" sldId="263"/>
+            <ac:spMk id="20" creationId="{00000000-0000-0000-0000-000000000000}"/>
+          </ac:spMkLst>
+        </pc:spChg>
+      </pc:sldChg>
+      <pc:sldChg chg="modSp mod">
+        <pc:chgData name="Jiageng Mi" userId="9ef2361a-baea-4751-b5dd-7ec30bf627a6" providerId="ADAL" clId="{ED3BAF67-0068-4BB9-A018-EE2B64C0FCCC}" dt="2026-04-07T02:39:23.243" v="461" actId="20577"/>
+        <pc:sldMkLst>
+          <pc:docMk/>
+          <pc:sldMk cId="0" sldId="264"/>
+        </pc:sldMkLst>
+        <pc:spChg chg="mod">
+          <ac:chgData name="Jiageng Mi" userId="9ef2361a-baea-4751-b5dd-7ec30bf627a6" providerId="ADAL" clId="{ED3BAF67-0068-4BB9-A018-EE2B64C0FCCC}" dt="2026-04-07T02:39:23.243" v="461" actId="20577"/>
+          <ac:spMkLst>
+            <pc:docMk/>
+            <pc:sldMk cId="0" sldId="264"/>
+            <ac:spMk id="16" creationId="{00000000-0000-0000-0000-000000000000}"/>
+          </ac:spMkLst>
+        </pc:spChg>
+      </pc:sldChg>
+      <pc:sldChg chg="addSp delSp modSp mod">
+        <pc:chgData name="Jiageng Mi" userId="9ef2361a-baea-4751-b5dd-7ec30bf627a6" providerId="ADAL" clId="{ED3BAF67-0068-4BB9-A018-EE2B64C0FCCC}" dt="2026-04-07T02:47:28.147" v="610" actId="1076"/>
+        <pc:sldMkLst>
+          <pc:docMk/>
+          <pc:sldMk cId="0" sldId="265"/>
+        </pc:sldMkLst>
+        <pc:spChg chg="mod">
+          <ac:chgData name="Jiageng Mi" userId="9ef2361a-baea-4751-b5dd-7ec30bf627a6" providerId="ADAL" clId="{ED3BAF67-0068-4BB9-A018-EE2B64C0FCCC}" dt="2026-04-07T02:47:28.147" v="610" actId="1076"/>
+          <ac:spMkLst>
+            <pc:docMk/>
+            <pc:sldMk cId="0" sldId="265"/>
+            <ac:spMk id="21" creationId="{00000000-0000-0000-0000-000000000000}"/>
+          </ac:spMkLst>
+        </pc:spChg>
+        <pc:graphicFrameChg chg="mod modGraphic">
+          <ac:chgData name="Jiageng Mi" userId="9ef2361a-baea-4751-b5dd-7ec30bf627a6" providerId="ADAL" clId="{ED3BAF67-0068-4BB9-A018-EE2B64C0FCCC}" dt="2026-04-07T02:47:12.174" v="609" actId="1076"/>
+          <ac:graphicFrameMkLst>
+            <pc:docMk/>
+            <pc:sldMk cId="0" sldId="265"/>
+            <ac:graphicFrameMk id="22" creationId="{00000000-0000-0000-0000-000000000000}"/>
+          </ac:graphicFrameMkLst>
+        </pc:graphicFrameChg>
+        <pc:picChg chg="add del mod">
+          <ac:chgData name="Jiageng Mi" userId="9ef2361a-baea-4751-b5dd-7ec30bf627a6" providerId="ADAL" clId="{ED3BAF67-0068-4BB9-A018-EE2B64C0FCCC}" dt="2026-04-07T02:46:49.249" v="603" actId="478"/>
+          <ac:picMkLst>
+            <pc:docMk/>
+            <pc:sldMk cId="0" sldId="265"/>
+            <ac:picMk id="4" creationId="{5FE07DA7-5F69-FC47-5712-5735DAEB3B5F}"/>
+          </ac:picMkLst>
+        </pc:picChg>
+        <pc:picChg chg="add mod">
+          <ac:chgData name="Jiageng Mi" userId="9ef2361a-baea-4751-b5dd-7ec30bf627a6" providerId="ADAL" clId="{ED3BAF67-0068-4BB9-A018-EE2B64C0FCCC}" dt="2026-04-07T02:47:05.461" v="607" actId="1076"/>
+          <ac:picMkLst>
+            <pc:docMk/>
+            <pc:sldMk cId="0" sldId="265"/>
+            <ac:picMk id="24" creationId="{0179D3C6-DE99-220A-6980-0138593CCECF}"/>
+          </ac:picMkLst>
+        </pc:picChg>
+      </pc:sldChg>
+      <pc:sldChg chg="modSp mod">
+        <pc:chgData name="Jiageng Mi" userId="9ef2361a-baea-4751-b5dd-7ec30bf627a6" providerId="ADAL" clId="{ED3BAF67-0068-4BB9-A018-EE2B64C0FCCC}" dt="2026-04-07T02:49:16.909" v="622" actId="403"/>
+        <pc:sldMkLst>
+          <pc:docMk/>
+          <pc:sldMk cId="0" sldId="266"/>
+        </pc:sldMkLst>
+        <pc:spChg chg="mod">
+          <ac:chgData name="Jiageng Mi" userId="9ef2361a-baea-4751-b5dd-7ec30bf627a6" providerId="ADAL" clId="{ED3BAF67-0068-4BB9-A018-EE2B64C0FCCC}" dt="2026-04-07T02:49:16.909" v="622" actId="403"/>
+          <ac:spMkLst>
+            <pc:docMk/>
+            <pc:sldMk cId="0" sldId="266"/>
+            <ac:spMk id="9" creationId="{00000000-0000-0000-0000-000000000000}"/>
+          </ac:spMkLst>
+        </pc:spChg>
+        <pc:spChg chg="mod">
+          <ac:chgData name="Jiageng Mi" userId="9ef2361a-baea-4751-b5dd-7ec30bf627a6" providerId="ADAL" clId="{ED3BAF67-0068-4BB9-A018-EE2B64C0FCCC}" dt="2026-04-07T02:49:16.909" v="622" actId="403"/>
+          <ac:spMkLst>
+            <pc:docMk/>
+            <pc:sldMk cId="0" sldId="266"/>
+            <ac:spMk id="10" creationId="{00000000-0000-0000-0000-000000000000}"/>
+          </ac:spMkLst>
+        </pc:spChg>
+        <pc:spChg chg="mod">
+          <ac:chgData name="Jiageng Mi" userId="9ef2361a-baea-4751-b5dd-7ec30bf627a6" providerId="ADAL" clId="{ED3BAF67-0068-4BB9-A018-EE2B64C0FCCC}" dt="2026-04-07T02:49:16.909" v="622" actId="403"/>
+          <ac:spMkLst>
+            <pc:docMk/>
+            <pc:sldMk cId="0" sldId="266"/>
+            <ac:spMk id="11" creationId="{00000000-0000-0000-0000-000000000000}"/>
+          </ac:spMkLst>
+        </pc:spChg>
+        <pc:spChg chg="mod">
+          <ac:chgData name="Jiageng Mi" userId="9ef2361a-baea-4751-b5dd-7ec30bf627a6" providerId="ADAL" clId="{ED3BAF67-0068-4BB9-A018-EE2B64C0FCCC}" dt="2026-04-07T02:49:16.909" v="622" actId="403"/>
+          <ac:spMkLst>
+            <pc:docMk/>
+            <pc:sldMk cId="0" sldId="266"/>
+            <ac:spMk id="16" creationId="{00000000-0000-0000-0000-000000000000}"/>
+          </ac:spMkLst>
+        </pc:spChg>
+        <pc:spChg chg="mod">
+          <ac:chgData name="Jiageng Mi" userId="9ef2361a-baea-4751-b5dd-7ec30bf627a6" providerId="ADAL" clId="{ED3BAF67-0068-4BB9-A018-EE2B64C0FCCC}" dt="2026-04-07T02:49:16.909" v="622" actId="403"/>
+          <ac:spMkLst>
+            <pc:docMk/>
+            <pc:sldMk cId="0" sldId="266"/>
+            <ac:spMk id="17" creationId="{00000000-0000-0000-0000-000000000000}"/>
+          </ac:spMkLst>
+        </pc:spChg>
+        <pc:spChg chg="mod">
+          <ac:chgData name="Jiageng Mi" userId="9ef2361a-baea-4751-b5dd-7ec30bf627a6" providerId="ADAL" clId="{ED3BAF67-0068-4BB9-A018-EE2B64C0FCCC}" dt="2026-04-07T02:49:16.909" v="622" actId="403"/>
+          <ac:spMkLst>
+            <pc:docMk/>
+            <pc:sldMk cId="0" sldId="266"/>
+            <ac:spMk id="18" creationId="{00000000-0000-0000-0000-000000000000}"/>
+          </ac:spMkLst>
+        </pc:spChg>
+        <pc:spChg chg="mod">
+          <ac:chgData name="Jiageng Mi" userId="9ef2361a-baea-4751-b5dd-7ec30bf627a6" providerId="ADAL" clId="{ED3BAF67-0068-4BB9-A018-EE2B64C0FCCC}" dt="2026-04-07T02:49:16.909" v="622" actId="403"/>
+          <ac:spMkLst>
+            <pc:docMk/>
+            <pc:sldMk cId="0" sldId="266"/>
+            <ac:spMk id="23" creationId="{00000000-0000-0000-0000-000000000000}"/>
+          </ac:spMkLst>
+        </pc:spChg>
+        <pc:spChg chg="mod">
+          <ac:chgData name="Jiageng Mi" userId="9ef2361a-baea-4751-b5dd-7ec30bf627a6" providerId="ADAL" clId="{ED3BAF67-0068-4BB9-A018-EE2B64C0FCCC}" dt="2026-04-07T02:49:16.909" v="622" actId="403"/>
+          <ac:spMkLst>
+            <pc:docMk/>
+            <pc:sldMk cId="0" sldId="266"/>
+            <ac:spMk id="24" creationId="{00000000-0000-0000-0000-000000000000}"/>
+          </ac:spMkLst>
+        </pc:spChg>
+        <pc:spChg chg="mod">
+          <ac:chgData name="Jiageng Mi" userId="9ef2361a-baea-4751-b5dd-7ec30bf627a6" providerId="ADAL" clId="{ED3BAF67-0068-4BB9-A018-EE2B64C0FCCC}" dt="2026-04-07T02:49:16.909" v="622" actId="403"/>
+          <ac:spMkLst>
+            <pc:docMk/>
+            <pc:sldMk cId="0" sldId="266"/>
+            <ac:spMk id="25" creationId="{00000000-0000-0000-0000-000000000000}"/>
+          </ac:spMkLst>
+        </pc:spChg>
+        <pc:spChg chg="mod">
+          <ac:chgData name="Jiageng Mi" userId="9ef2361a-baea-4751-b5dd-7ec30bf627a6" providerId="ADAL" clId="{ED3BAF67-0068-4BB9-A018-EE2B64C0FCCC}" dt="2026-04-07T02:48:11.366" v="615" actId="113"/>
+          <ac:spMkLst>
+            <pc:docMk/>
+            <pc:sldMk cId="0" sldId="266"/>
+            <ac:spMk id="27" creationId="{00000000-0000-0000-0000-000000000000}"/>
+          </ac:spMkLst>
+        </pc:spChg>
+      </pc:sldChg>
+      <pc:sldChg chg="delSp modSp mod">
+        <pc:chgData name="Jiageng Mi" userId="9ef2361a-baea-4751-b5dd-7ec30bf627a6" providerId="ADAL" clId="{ED3BAF67-0068-4BB9-A018-EE2B64C0FCCC}" dt="2026-04-07T02:48:50.931" v="621" actId="14100"/>
+        <pc:sldMkLst>
+          <pc:docMk/>
+          <pc:sldMk cId="0" sldId="267"/>
+        </pc:sldMkLst>
+        <pc:spChg chg="mod">
+          <ac:chgData name="Jiageng Mi" userId="9ef2361a-baea-4751-b5dd-7ec30bf627a6" providerId="ADAL" clId="{ED3BAF67-0068-4BB9-A018-EE2B64C0FCCC}" dt="2026-04-07T02:48:41.746" v="620" actId="14100"/>
+          <ac:spMkLst>
+            <pc:docMk/>
+            <pc:sldMk cId="0" sldId="267"/>
+            <ac:spMk id="8" creationId="{00000000-0000-0000-0000-000000000000}"/>
+          </ac:spMkLst>
+        </pc:spChg>
+        <pc:graphicFrameChg chg="mod modGraphic">
+          <ac:chgData name="Jiageng Mi" userId="9ef2361a-baea-4751-b5dd-7ec30bf627a6" providerId="ADAL" clId="{ED3BAF67-0068-4BB9-A018-EE2B64C0FCCC}" dt="2026-04-07T02:48:50.931" v="621" actId="14100"/>
+          <ac:graphicFrameMkLst>
+            <pc:docMk/>
+            <pc:sldMk cId="0" sldId="267"/>
+            <ac:graphicFrameMk id="11" creationId="{00000000-0000-0000-0000-000000000000}"/>
+          </ac:graphicFrameMkLst>
+        </pc:graphicFrameChg>
+        <pc:picChg chg="del">
+          <ac:chgData name="Jiageng Mi" userId="9ef2361a-baea-4751-b5dd-7ec30bf627a6" providerId="ADAL" clId="{ED3BAF67-0068-4BB9-A018-EE2B64C0FCCC}" dt="2026-04-06T05:37:05.320" v="64" actId="478"/>
+          <ac:picMkLst>
+            <pc:docMk/>
+            <pc:sldMk cId="0" sldId="267"/>
             <ac:picMk id="2" creationId="{00000000-0000-0000-0000-000000000000}"/>
           </ac:picMkLst>
         </pc:picChg>
+      </pc:sldChg>
+      <pc:sldChg chg="addSp delSp modSp mod">
+        <pc:chgData name="Jiageng Mi" userId="9ef2361a-baea-4751-b5dd-7ec30bf627a6" providerId="ADAL" clId="{ED3BAF67-0068-4BB9-A018-EE2B64C0FCCC}" dt="2026-04-07T03:09:40.853" v="674" actId="14734"/>
+        <pc:sldMkLst>
+          <pc:docMk/>
+          <pc:sldMk cId="0" sldId="268"/>
+        </pc:sldMkLst>
+        <pc:spChg chg="mod">
+          <ac:chgData name="Jiageng Mi" userId="9ef2361a-baea-4751-b5dd-7ec30bf627a6" providerId="ADAL" clId="{ED3BAF67-0068-4BB9-A018-EE2B64C0FCCC}" dt="2026-04-07T03:07:09.118" v="639"/>
+          <ac:spMkLst>
+            <pc:docMk/>
+            <pc:sldMk cId="0" sldId="268"/>
+            <ac:spMk id="3" creationId="{00000000-0000-0000-0000-000000000000}"/>
+          </ac:spMkLst>
+        </pc:spChg>
+        <pc:spChg chg="del mod">
+          <ac:chgData name="Jiageng Mi" userId="9ef2361a-baea-4751-b5dd-7ec30bf627a6" providerId="ADAL" clId="{ED3BAF67-0068-4BB9-A018-EE2B64C0FCCC}" dt="2026-04-07T03:08:07.224" v="649" actId="478"/>
+          <ac:spMkLst>
+            <pc:docMk/>
+            <pc:sldMk cId="0" sldId="268"/>
+            <ac:spMk id="5" creationId="{00000000-0000-0000-0000-000000000000}"/>
+          </ac:spMkLst>
+        </pc:spChg>
+        <pc:spChg chg="del mod">
+          <ac:chgData name="Jiageng Mi" userId="9ef2361a-baea-4751-b5dd-7ec30bf627a6" providerId="ADAL" clId="{ED3BAF67-0068-4BB9-A018-EE2B64C0FCCC}" dt="2026-04-07T03:08:07.224" v="649" actId="478"/>
+          <ac:spMkLst>
+            <pc:docMk/>
+            <pc:sldMk cId="0" sldId="268"/>
+            <ac:spMk id="6" creationId="{00000000-0000-0000-0000-000000000000}"/>
+          </ac:spMkLst>
+        </pc:spChg>
+        <pc:spChg chg="del mod">
+          <ac:chgData name="Jiageng Mi" userId="9ef2361a-baea-4751-b5dd-7ec30bf627a6" providerId="ADAL" clId="{ED3BAF67-0068-4BB9-A018-EE2B64C0FCCC}" dt="2026-04-07T03:08:07.224" v="649" actId="478"/>
+          <ac:spMkLst>
+            <pc:docMk/>
+            <pc:sldMk cId="0" sldId="268"/>
+            <ac:spMk id="8" creationId="{00000000-0000-0000-0000-000000000000}"/>
+          </ac:spMkLst>
+        </pc:spChg>
+        <pc:spChg chg="del mod">
+          <ac:chgData name="Jiageng Mi" userId="9ef2361a-baea-4751-b5dd-7ec30bf627a6" providerId="ADAL" clId="{ED3BAF67-0068-4BB9-A018-EE2B64C0FCCC}" dt="2026-04-07T03:08:07.224" v="649" actId="478"/>
+          <ac:spMkLst>
+            <pc:docMk/>
+            <pc:sldMk cId="0" sldId="268"/>
+            <ac:spMk id="9" creationId="{00000000-0000-0000-0000-000000000000}"/>
+          </ac:spMkLst>
+        </pc:spChg>
+        <pc:spChg chg="del mod">
+          <ac:chgData name="Jiageng Mi" userId="9ef2361a-baea-4751-b5dd-7ec30bf627a6" providerId="ADAL" clId="{ED3BAF67-0068-4BB9-A018-EE2B64C0FCCC}" dt="2026-04-07T03:08:07.224" v="649" actId="478"/>
+          <ac:spMkLst>
+            <pc:docMk/>
+            <pc:sldMk cId="0" sldId="268"/>
+            <ac:spMk id="11" creationId="{00000000-0000-0000-0000-000000000000}"/>
+          </ac:spMkLst>
+        </pc:spChg>
+        <pc:spChg chg="del mod">
+          <ac:chgData name="Jiageng Mi" userId="9ef2361a-baea-4751-b5dd-7ec30bf627a6" providerId="ADAL" clId="{ED3BAF67-0068-4BB9-A018-EE2B64C0FCCC}" dt="2026-04-07T03:08:07.224" v="649" actId="478"/>
+          <ac:spMkLst>
+            <pc:docMk/>
+            <pc:sldMk cId="0" sldId="268"/>
+            <ac:spMk id="14" creationId="{00000000-0000-0000-0000-000000000000}"/>
+          </ac:spMkLst>
+        </pc:spChg>
+        <pc:spChg chg="del mod">
+          <ac:chgData name="Jiageng Mi" userId="9ef2361a-baea-4751-b5dd-7ec30bf627a6" providerId="ADAL" clId="{ED3BAF67-0068-4BB9-A018-EE2B64C0FCCC}" dt="2026-04-07T03:08:07.224" v="649" actId="478"/>
+          <ac:spMkLst>
+            <pc:docMk/>
+            <pc:sldMk cId="0" sldId="268"/>
+            <ac:spMk id="15" creationId="{00000000-0000-0000-0000-000000000000}"/>
+          </ac:spMkLst>
+        </pc:spChg>
+        <pc:spChg chg="del mod">
+          <ac:chgData name="Jiageng Mi" userId="9ef2361a-baea-4751-b5dd-7ec30bf627a6" providerId="ADAL" clId="{ED3BAF67-0068-4BB9-A018-EE2B64C0FCCC}" dt="2026-04-07T03:08:07.224" v="649" actId="478"/>
+          <ac:spMkLst>
+            <pc:docMk/>
+            <pc:sldMk cId="0" sldId="268"/>
+            <ac:spMk id="17" creationId="{00000000-0000-0000-0000-000000000000}"/>
+          </ac:spMkLst>
+        </pc:spChg>
+        <pc:grpChg chg="add del mod">
+          <ac:chgData name="Jiageng Mi" userId="9ef2361a-baea-4751-b5dd-7ec30bf627a6" providerId="ADAL" clId="{ED3BAF67-0068-4BB9-A018-EE2B64C0FCCC}" dt="2026-04-07T03:09:20.126" v="667" actId="165"/>
+          <ac:grpSpMkLst>
+            <pc:docMk/>
+            <pc:sldMk cId="0" sldId="268"/>
+            <ac:grpSpMk id="19" creationId="{940457DA-AC50-80FA-4959-856C827026EE}"/>
+          </ac:grpSpMkLst>
+        </pc:grpChg>
+        <pc:graphicFrameChg chg="add mod modGraphic">
+          <ac:chgData name="Jiageng Mi" userId="9ef2361a-baea-4751-b5dd-7ec30bf627a6" providerId="ADAL" clId="{ED3BAF67-0068-4BB9-A018-EE2B64C0FCCC}" dt="2026-04-07T03:09:40.853" v="674" actId="14734"/>
+          <ac:graphicFrameMkLst>
+            <pc:docMk/>
+            <pc:sldMk cId="0" sldId="268"/>
+            <ac:graphicFrameMk id="2" creationId="{D12F9249-F7C2-F555-7399-1586B222814D}"/>
+          </ac:graphicFrameMkLst>
+        </pc:graphicFrameChg>
+        <pc:graphicFrameChg chg="del">
+          <ac:chgData name="Jiageng Mi" userId="9ef2361a-baea-4751-b5dd-7ec30bf627a6" providerId="ADAL" clId="{ED3BAF67-0068-4BB9-A018-EE2B64C0FCCC}" dt="2026-04-07T03:07:39.978" v="641" actId="478"/>
+          <ac:graphicFrameMkLst>
+            <pc:docMk/>
+            <pc:sldMk cId="0" sldId="268"/>
+            <ac:graphicFrameMk id="12" creationId="{00000000-0000-0000-0000-000000000000}"/>
+          </ac:graphicFrameMkLst>
+        </pc:graphicFrameChg>
+        <pc:picChg chg="add mod topLvl">
+          <ac:chgData name="Jiageng Mi" userId="9ef2361a-baea-4751-b5dd-7ec30bf627a6" providerId="ADAL" clId="{ED3BAF67-0068-4BB9-A018-EE2B64C0FCCC}" dt="2026-04-07T03:09:20.126" v="667" actId="165"/>
+          <ac:picMkLst>
+            <pc:docMk/>
+            <pc:sldMk cId="0" sldId="268"/>
+            <ac:picMk id="4" creationId="{864B15ED-6D29-5DB9-596A-03FAF335E9F8}"/>
+          </ac:picMkLst>
+        </pc:picChg>
+        <pc:picChg chg="del mod">
+          <ac:chgData name="Jiageng Mi" userId="9ef2361a-baea-4751-b5dd-7ec30bf627a6" providerId="ADAL" clId="{ED3BAF67-0068-4BB9-A018-EE2B64C0FCCC}" dt="2026-04-07T03:08:07.224" v="649" actId="478"/>
+          <ac:picMkLst>
+            <pc:docMk/>
+            <pc:sldMk cId="0" sldId="268"/>
+            <ac:picMk id="7" creationId="{00000000-0000-0000-0000-000000000000}"/>
+          </ac:picMkLst>
+        </pc:picChg>
+        <pc:picChg chg="del mod">
+          <ac:chgData name="Jiageng Mi" userId="9ef2361a-baea-4751-b5dd-7ec30bf627a6" providerId="ADAL" clId="{ED3BAF67-0068-4BB9-A018-EE2B64C0FCCC}" dt="2026-04-07T03:08:07.224" v="649" actId="478"/>
+          <ac:picMkLst>
+            <pc:docMk/>
+            <pc:sldMk cId="0" sldId="268"/>
+            <ac:picMk id="16" creationId="{00000000-0000-0000-0000-000000000000}"/>
+          </ac:picMkLst>
+        </pc:picChg>
+        <pc:picChg chg="add mod topLvl">
+          <ac:chgData name="Jiageng Mi" userId="9ef2361a-baea-4751-b5dd-7ec30bf627a6" providerId="ADAL" clId="{ED3BAF67-0068-4BB9-A018-EE2B64C0FCCC}" dt="2026-04-07T03:09:20.126" v="667" actId="165"/>
+          <ac:picMkLst>
+            <pc:docMk/>
+            <pc:sldMk cId="0" sldId="268"/>
+            <ac:picMk id="18" creationId="{536FB93C-1049-8348-6E1A-E31E3E4916B5}"/>
+          </ac:picMkLst>
+        </pc:picChg>
+      </pc:sldChg>
+      <pc:sldChg chg="addSp delSp modSp mod modShow">
+        <pc:chgData name="Jiageng Mi" userId="9ef2361a-baea-4751-b5dd-7ec30bf627a6" providerId="ADAL" clId="{ED3BAF67-0068-4BB9-A018-EE2B64C0FCCC}" dt="2026-04-07T03:08:50.092" v="666" actId="729"/>
+        <pc:sldMkLst>
+          <pc:docMk/>
+          <pc:sldMk cId="0" sldId="269"/>
+        </pc:sldMkLst>
+        <pc:spChg chg="mod topLvl">
+          <ac:chgData name="Jiageng Mi" userId="9ef2361a-baea-4751-b5dd-7ec30bf627a6" providerId="ADAL" clId="{ED3BAF67-0068-4BB9-A018-EE2B64C0FCCC}" dt="2026-04-07T03:04:33.964" v="635" actId="403"/>
+          <ac:spMkLst>
+            <pc:docMk/>
+            <pc:sldMk cId="0" sldId="269"/>
+            <ac:spMk id="5" creationId="{00000000-0000-0000-0000-000000000000}"/>
+          </ac:spMkLst>
+        </pc:spChg>
+        <pc:spChg chg="mod">
+          <ac:chgData name="Jiageng Mi" userId="9ef2361a-baea-4751-b5dd-7ec30bf627a6" providerId="ADAL" clId="{ED3BAF67-0068-4BB9-A018-EE2B64C0FCCC}" dt="2026-04-07T02:51:48.369" v="628" actId="14100"/>
+          <ac:spMkLst>
+            <pc:docMk/>
+            <pc:sldMk cId="0" sldId="269"/>
+            <ac:spMk id="6" creationId="{00000000-0000-0000-0000-000000000000}"/>
+          </ac:spMkLst>
+        </pc:spChg>
+        <pc:spChg chg="mod">
+          <ac:chgData name="Jiageng Mi" userId="9ef2361a-baea-4751-b5dd-7ec30bf627a6" providerId="ADAL" clId="{ED3BAF67-0068-4BB9-A018-EE2B64C0FCCC}" dt="2026-04-07T02:51:51.824" v="629" actId="1076"/>
+          <ac:spMkLst>
+            <pc:docMk/>
+            <pc:sldMk cId="0" sldId="269"/>
+            <ac:spMk id="7" creationId="{00000000-0000-0000-0000-000000000000}"/>
+          </ac:spMkLst>
+        </pc:spChg>
+        <pc:spChg chg="mod topLvl">
+          <ac:chgData name="Jiageng Mi" userId="9ef2361a-baea-4751-b5dd-7ec30bf627a6" providerId="ADAL" clId="{ED3BAF67-0068-4BB9-A018-EE2B64C0FCCC}" dt="2026-04-07T03:04:33.964" v="635" actId="403"/>
+          <ac:spMkLst>
+            <pc:docMk/>
+            <pc:sldMk cId="0" sldId="269"/>
+            <ac:spMk id="9" creationId="{00000000-0000-0000-0000-000000000000}"/>
+          </ac:spMkLst>
+        </pc:spChg>
+        <pc:spChg chg="mod topLvl">
+          <ac:chgData name="Jiageng Mi" userId="9ef2361a-baea-4751-b5dd-7ec30bf627a6" providerId="ADAL" clId="{ED3BAF67-0068-4BB9-A018-EE2B64C0FCCC}" dt="2026-04-07T03:04:33.964" v="635" actId="403"/>
+          <ac:spMkLst>
+            <pc:docMk/>
+            <pc:sldMk cId="0" sldId="269"/>
+            <ac:spMk id="11" creationId="{00000000-0000-0000-0000-000000000000}"/>
+          </ac:spMkLst>
+        </pc:spChg>
+        <pc:spChg chg="mod topLvl">
+          <ac:chgData name="Jiageng Mi" userId="9ef2361a-baea-4751-b5dd-7ec30bf627a6" providerId="ADAL" clId="{ED3BAF67-0068-4BB9-A018-EE2B64C0FCCC}" dt="2026-04-07T03:04:33.964" v="635" actId="403"/>
+          <ac:spMkLst>
+            <pc:docMk/>
+            <pc:sldMk cId="0" sldId="269"/>
+            <ac:spMk id="15" creationId="{00000000-0000-0000-0000-000000000000}"/>
+          </ac:spMkLst>
+        </pc:spChg>
+        <pc:grpChg chg="add del mod">
+          <ac:chgData name="Jiageng Mi" userId="9ef2361a-baea-4751-b5dd-7ec30bf627a6" providerId="ADAL" clId="{ED3BAF67-0068-4BB9-A018-EE2B64C0FCCC}" dt="2026-04-07T02:52:16.884" v="632" actId="165"/>
+          <ac:grpSpMkLst>
+            <pc:docMk/>
+            <pc:sldMk cId="0" sldId="269"/>
+            <ac:grpSpMk id="2" creationId="{84C978D5-DD4C-3D11-F323-F3EB20DE356C}"/>
+          </ac:grpSpMkLst>
+        </pc:grpChg>
+        <pc:picChg chg="mod topLvl">
+          <ac:chgData name="Jiageng Mi" userId="9ef2361a-baea-4751-b5dd-7ec30bf627a6" providerId="ADAL" clId="{ED3BAF67-0068-4BB9-A018-EE2B64C0FCCC}" dt="2026-04-07T02:52:35.384" v="634" actId="14100"/>
+          <ac:picMkLst>
+            <pc:docMk/>
+            <pc:sldMk cId="0" sldId="269"/>
+            <ac:picMk id="8" creationId="{00000000-0000-0000-0000-000000000000}"/>
+          </ac:picMkLst>
+        </pc:picChg>
+        <pc:picChg chg="mod topLvl">
+          <ac:chgData name="Jiageng Mi" userId="9ef2361a-baea-4751-b5dd-7ec30bf627a6" providerId="ADAL" clId="{ED3BAF67-0068-4BB9-A018-EE2B64C0FCCC}" dt="2026-04-07T02:52:35.384" v="634" actId="14100"/>
+          <ac:picMkLst>
+            <pc:docMk/>
+            <pc:sldMk cId="0" sldId="269"/>
+            <ac:picMk id="10" creationId="{00000000-0000-0000-0000-000000000000}"/>
+          </ac:picMkLst>
+        </pc:picChg>
+        <pc:picChg chg="mod topLvl">
+          <ac:chgData name="Jiageng Mi" userId="9ef2361a-baea-4751-b5dd-7ec30bf627a6" providerId="ADAL" clId="{ED3BAF67-0068-4BB9-A018-EE2B64C0FCCC}" dt="2026-04-07T02:52:35.384" v="634" actId="14100"/>
+          <ac:picMkLst>
+            <pc:docMk/>
+            <pc:sldMk cId="0" sldId="269"/>
+            <ac:picMk id="12" creationId="{00000000-0000-0000-0000-000000000000}"/>
+          </ac:picMkLst>
+        </pc:picChg>
+        <pc:picChg chg="mod topLvl">
+          <ac:chgData name="Jiageng Mi" userId="9ef2361a-baea-4751-b5dd-7ec30bf627a6" providerId="ADAL" clId="{ED3BAF67-0068-4BB9-A018-EE2B64C0FCCC}" dt="2026-04-07T02:52:35.384" v="634" actId="14100"/>
+          <ac:picMkLst>
+            <pc:docMk/>
+            <pc:sldMk cId="0" sldId="269"/>
+            <ac:picMk id="14" creationId="{00000000-0000-0000-0000-000000000000}"/>
+          </ac:picMkLst>
+        </pc:picChg>
+      </pc:sldChg>
+      <pc:sldChg chg="mod modShow">
+        <pc:chgData name="Jiageng Mi" userId="9ef2361a-baea-4751-b5dd-7ec30bf627a6" providerId="ADAL" clId="{ED3BAF67-0068-4BB9-A018-EE2B64C0FCCC}" dt="2026-04-07T03:05:31.565" v="636" actId="729"/>
+        <pc:sldMkLst>
+          <pc:docMk/>
+          <pc:sldMk cId="0" sldId="270"/>
+        </pc:sldMkLst>
       </pc:sldChg>
       <pc:sldChg chg="addSp delSp mod">
         <pc:chgData name="Jiageng Mi" userId="9ef2361a-baea-4751-b5dd-7ec30bf627a6" providerId="ADAL" clId="{ED3BAF67-0068-4BB9-A018-EE2B64C0FCCC}" dt="2026-04-05T07:23:32.904" v="2" actId="22"/>
@@ -217,42 +1156,21 @@
           <pc:docMk/>
           <pc:sldMk cId="0" sldId="274"/>
         </pc:sldMkLst>
-        <pc:spChg chg="add del">
-          <ac:chgData name="Jiageng Mi" userId="9ef2361a-baea-4751-b5dd-7ec30bf627a6" providerId="ADAL" clId="{ED3BAF67-0068-4BB9-A018-EE2B64C0FCCC}" dt="2026-04-05T07:23:32.904" v="2" actId="22"/>
+      </pc:sldChg>
+      <pc:sldChg chg="modSp mod">
+        <pc:chgData name="Jiageng Mi" userId="9ef2361a-baea-4751-b5dd-7ec30bf627a6" providerId="ADAL" clId="{ED3BAF67-0068-4BB9-A018-EE2B64C0FCCC}" dt="2026-04-06T22:10:55.379" v="66" actId="20577"/>
+        <pc:sldMkLst>
+          <pc:docMk/>
+          <pc:sldMk cId="0" sldId="277"/>
+        </pc:sldMkLst>
+        <pc:spChg chg="mod">
+          <ac:chgData name="Jiageng Mi" userId="9ef2361a-baea-4751-b5dd-7ec30bf627a6" providerId="ADAL" clId="{ED3BAF67-0068-4BB9-A018-EE2B64C0FCCC}" dt="2026-04-06T22:10:55.379" v="66" actId="20577"/>
           <ac:spMkLst>
             <pc:docMk/>
-            <pc:sldMk cId="0" sldId="274"/>
-            <ac:spMk id="24" creationId="{5FD21C35-6EF5-B943-8DC7-8A8BC0AFC7F8}"/>
+            <pc:sldMk cId="0" sldId="277"/>
+            <ac:spMk id="28" creationId="{00000000-0000-0000-0000-000000000000}"/>
           </ac:spMkLst>
         </pc:spChg>
-      </pc:sldChg>
-      <pc:sldChg chg="del">
-        <pc:chgData name="Jiageng Mi" userId="9ef2361a-baea-4751-b5dd-7ec30bf627a6" providerId="ADAL" clId="{ED3BAF67-0068-4BB9-A018-EE2B64C0FCCC}" dt="2026-04-05T07:23:24.420" v="0" actId="47"/>
-        <pc:sldMkLst>
-          <pc:docMk/>
-          <pc:sldMk cId="0" sldId="275"/>
-        </pc:sldMkLst>
-      </pc:sldChg>
-      <pc:sldChg chg="del">
-        <pc:chgData name="Jiageng Mi" userId="9ef2361a-baea-4751-b5dd-7ec30bf627a6" providerId="ADAL" clId="{ED3BAF67-0068-4BB9-A018-EE2B64C0FCCC}" dt="2026-04-05T07:23:24.420" v="0" actId="47"/>
-        <pc:sldMkLst>
-          <pc:docMk/>
-          <pc:sldMk cId="0" sldId="276"/>
-        </pc:sldMkLst>
-      </pc:sldChg>
-      <pc:sldChg chg="del">
-        <pc:chgData name="Jiageng Mi" userId="9ef2361a-baea-4751-b5dd-7ec30bf627a6" providerId="ADAL" clId="{ED3BAF67-0068-4BB9-A018-EE2B64C0FCCC}" dt="2026-04-05T07:24:02.393" v="6" actId="47"/>
-        <pc:sldMkLst>
-          <pc:docMk/>
-          <pc:sldMk cId="0" sldId="278"/>
-        </pc:sldMkLst>
-      </pc:sldChg>
-      <pc:sldChg chg="del">
-        <pc:chgData name="Jiageng Mi" userId="9ef2361a-baea-4751-b5dd-7ec30bf627a6" providerId="ADAL" clId="{ED3BAF67-0068-4BB9-A018-EE2B64C0FCCC}" dt="2026-04-05T07:24:02.393" v="6" actId="47"/>
-        <pc:sldMkLst>
-          <pc:docMk/>
-          <pc:sldMk cId="0" sldId="279"/>
-        </pc:sldMkLst>
       </pc:sldChg>
     </pc:docChg>
   </pc:docChgLst>
@@ -1567,7 +2485,7 @@
           <a:p>
             <a:fld id="{4B2CACE1-0839-DD4E-8A8D-815B08AED9A4}" type="datetimeFigureOut">
               <a:rPr lang="en-US" smtClean="0"/>
-              <a:t>4/5/2026</a:t>
+              <a:t>4/6/2026</a:t>
             </a:fld>
             <a:endParaRPr lang="en-US"/>
           </a:p>
@@ -5861,8 +6779,8 @@
         </p:nvSpPr>
         <p:spPr>
           <a:xfrm>
-            <a:off x="731520" y="4876800"/>
-            <a:ext cx="8534400" cy="1219200"/>
+            <a:off x="731520" y="4632959"/>
+            <a:ext cx="8534400" cy="1560317"/>
           </a:xfrm>
           <a:prstGeom prst="rect">
             <a:avLst/>
@@ -5909,7 +6827,36 @@
               </a:rPr>
               <a:t>University of Calgary | Winter 2026</a:t>
             </a:r>
-            <a:endParaRPr lang="en-US" sz="1867" dirty="0"/>
+          </a:p>
+          <a:p>
+            <a:pPr>
+              <a:lnSpc>
+                <a:spcPct val="150000"/>
+              </a:lnSpc>
+            </a:pPr>
+            <a:r>
+              <a:rPr lang="en-US" sz="1867" dirty="0">
+                <a:solidFill>
+                  <a:schemeClr val="bg1"/>
+                </a:solidFill>
+              </a:rPr>
+              <a:t>Presenter: Jiageng Mi</a:t>
+            </a:r>
+          </a:p>
+          <a:p>
+            <a:pPr>
+              <a:lnSpc>
+                <a:spcPct val="150000"/>
+              </a:lnSpc>
+            </a:pPr>
+            <a:r>
+              <a:rPr lang="en-US" sz="1867" dirty="0">
+                <a:solidFill>
+                  <a:schemeClr val="bg1"/>
+                </a:solidFill>
+              </a:rPr>
+              <a:t>                   Shima Moradi Mousavi  </a:t>
+            </a:r>
           </a:p>
         </p:txBody>
       </p:sp>
@@ -5938,30 +6885,6 @@
           <a:chExt cx="0" cy="0"/>
         </a:xfrm>
       </p:grpSpPr>
-      <p:pic>
-        <p:nvPicPr>
-          <p:cNvPr id="2" name="Image 0" descr="/home/claude/unpacked_template/ppt/media/image2.jpg"/>
-          <p:cNvPicPr>
-            <a:picLocks noChangeAspect="1"/>
-          </p:cNvPicPr>
-          <p:nvPr/>
-        </p:nvPicPr>
-        <p:blipFill>
-          <a:blip r:embed="rId3"/>
-          <a:stretch>
-            <a:fillRect/>
-          </a:stretch>
-        </p:blipFill>
-        <p:spPr>
-          <a:xfrm>
-            <a:off x="0" y="0"/>
-            <a:ext cx="12192000" cy="1036320"/>
-          </a:xfrm>
-          <a:prstGeom prst="rect">
-            <a:avLst/>
-          </a:prstGeom>
-        </p:spPr>
-      </p:pic>
       <p:sp>
         <p:nvSpPr>
           <p:cNvPr id="3" name="Text 0"/>
@@ -6004,46 +6927,52 @@
           <p:cNvGraphicFramePr>
             <a:graphicFrameLocks noGrp="1"/>
           </p:cNvGraphicFramePr>
-          <p:nvPr/>
+          <p:nvPr>
+            <p:extLst>
+              <p:ext uri="{D42A27DB-BD31-4B8C-83A1-F6EECF244321}">
+                <p14:modId xmlns:p14="http://schemas.microsoft.com/office/powerpoint/2010/main" val="3838270584"/>
+              </p:ext>
+            </p:extLst>
+          </p:nvPr>
         </p:nvGraphicFramePr>
         <p:xfrm>
-          <a:off x="731520" y="1584960"/>
-          <a:ext cx="9387840" cy="1463040"/>
+          <a:off x="731519" y="1584960"/>
+          <a:ext cx="10910148" cy="1463040"/>
         </p:xfrm>
         <a:graphic>
           <a:graphicData uri="http://schemas.openxmlformats.org/drawingml/2006/table">
             <a:tbl>
               <a:tblPr/>
               <a:tblGrid>
-                <a:gridCol w="3169920">
+                <a:gridCol w="3683946">
                   <a:extLst>
                     <a:ext uri="{9D8B030D-6E8A-4147-A177-3AD203B41FA5}">
                       <a16:colId xmlns:a16="http://schemas.microsoft.com/office/drawing/2014/main" val="20000"/>
                     </a:ext>
                   </a:extLst>
                 </a:gridCol>
-                <a:gridCol w="1463040">
+                <a:gridCol w="1700283">
                   <a:extLst>
                     <a:ext uri="{9D8B030D-6E8A-4147-A177-3AD203B41FA5}">
                       <a16:colId xmlns:a16="http://schemas.microsoft.com/office/drawing/2014/main" val="20001"/>
                     </a:ext>
                   </a:extLst>
                 </a:gridCol>
-                <a:gridCol w="1463040">
+                <a:gridCol w="1700283">
                   <a:extLst>
                     <a:ext uri="{9D8B030D-6E8A-4147-A177-3AD203B41FA5}">
                       <a16:colId xmlns:a16="http://schemas.microsoft.com/office/drawing/2014/main" val="20002"/>
                     </a:ext>
                   </a:extLst>
                 </a:gridCol>
-                <a:gridCol w="1463040">
+                <a:gridCol w="1700283">
                   <a:extLst>
                     <a:ext uri="{9D8B030D-6E8A-4147-A177-3AD203B41FA5}">
                       <a16:colId xmlns:a16="http://schemas.microsoft.com/office/drawing/2014/main" val="20003"/>
                     </a:ext>
                   </a:extLst>
                 </a:gridCol>
-                <a:gridCol w="1828800">
+                <a:gridCol w="2125353">
                   <a:extLst>
                     <a:ext uri="{9D8B030D-6E8A-4147-A177-3AD203B41FA5}">
                       <a16:colId xmlns:a16="http://schemas.microsoft.com/office/drawing/2014/main" val="20004"/>
@@ -7455,7 +8384,7 @@
         </p:xfrm>
         <a:graphic>
           <a:graphicData uri="http://schemas.openxmlformats.org/drawingml/2006/chart">
-            <c:chart xmlns:c="http://schemas.openxmlformats.org/drawingml/2006/chart" xmlns:r="http://schemas.openxmlformats.org/officeDocument/2006/relationships" r:id="rId4"/>
+            <c:chart xmlns:c="http://schemas.openxmlformats.org/drawingml/2006/chart" xmlns:r="http://schemas.openxmlformats.org/officeDocument/2006/relationships" r:id="rId3"/>
           </a:graphicData>
         </a:graphic>
       </p:graphicFrame>
@@ -7495,7 +8424,7 @@
         <p:spPr>
           <a:xfrm>
             <a:off x="7924800" y="3657600"/>
-            <a:ext cx="3413760" cy="2560320"/>
+            <a:ext cx="3535680" cy="2560320"/>
           </a:xfrm>
           <a:prstGeom prst="rect">
             <a:avLst/>
@@ -7508,7 +8437,7 @@
           <a:lstStyle/>
           <a:p>
             <a:r>
-              <a:rPr lang="en-US" sz="1733" b="1" dirty="0">
+              <a:rPr lang="en-US" sz="2400" b="1" dirty="0">
                 <a:solidFill>
                   <a:srgbClr val="EE2C2A"/>
                 </a:solidFill>
@@ -7519,11 +8448,11 @@
               <a:t>Key Finding
 </a:t>
             </a:r>
-            <a:endParaRPr lang="en-US" sz="1733" dirty="0"/>
-          </a:p>
-          <a:p>
-            <a:r>
-              <a:rPr lang="en-US" sz="1467" dirty="0">
+            <a:endParaRPr lang="en-US" sz="2400" dirty="0"/>
+          </a:p>
+          <a:p>
+            <a:r>
+              <a:rPr lang="en-US" sz="2000" dirty="0">
                 <a:solidFill>
                   <a:srgbClr val="2B2B2B"/>
                 </a:solidFill>
@@ -7534,11 +8463,11 @@
               <a:t>Tree models achieved near-perfect CV F1 but failed on test set.
 </a:t>
             </a:r>
-            <a:endParaRPr lang="en-US" sz="1733" dirty="0"/>
-          </a:p>
-          <a:p>
-            <a:r>
-              <a:rPr lang="en-US" sz="1467" b="1" dirty="0">
+            <a:endParaRPr lang="en-US" sz="2400" dirty="0"/>
+          </a:p>
+          <a:p>
+            <a:r>
+              <a:rPr lang="en-US" sz="2000" b="1" dirty="0">
                 <a:solidFill>
                   <a:srgbClr val="2B2B2B"/>
                 </a:solidFill>
@@ -7549,7 +8478,7 @@
               <a:t>Solution: </a:t>
             </a:r>
             <a:r>
-              <a:rPr lang="en-US" sz="1467" dirty="0">
+              <a:rPr lang="en-US" sz="2000" dirty="0">
                 <a:solidFill>
                   <a:srgbClr val="8C857B"/>
                 </a:solidFill>
@@ -7559,7 +8488,7 @@
               </a:rPr>
               <a:t>Apply regularization to reduce overfitting gaps</a:t>
             </a:r>
-            <a:endParaRPr lang="en-US" sz="1733" dirty="0"/>
+            <a:endParaRPr lang="en-US" sz="2400" dirty="0"/>
           </a:p>
         </p:txBody>
       </p:sp>
@@ -7648,68 +8577,117 @@
                 <a:ea typeface="Calibri" pitchFamily="34" charset="-122"/>
                 <a:cs typeface="Calibri" pitchFamily="34" charset="-120"/>
               </a:rPr>
-              <a:t>Cross-Validation Results: Regularized Models</a:t>
+              <a:t>Model Selection: HGB Chosen by Best Test F1 and Precision</a:t>
             </a:r>
             <a:endParaRPr lang="en-US" sz="2933" dirty="0"/>
+          </a:p>
+        </p:txBody>
+      </p:sp>
+      <p:sp>
+        <p:nvSpPr>
+          <p:cNvPr id="20" name="Slide Number Placeholder 19">
+            <a:extLst>
+              <a:ext uri="{FF2B5EF4-FFF2-40B4-BE49-F238E27FC236}">
+                <a16:creationId xmlns:a16="http://schemas.microsoft.com/office/drawing/2014/main" id="{F419DCCD-114A-09F7-BB5E-DAB596BF4399}"/>
+              </a:ext>
+            </a:extLst>
+          </p:cNvPr>
+          <p:cNvSpPr>
+            <a:spLocks noGrp="1"/>
+          </p:cNvSpPr>
+          <p:nvPr>
+            <p:ph type="sldNum" sz="quarter" idx="12"/>
+          </p:nvPr>
+        </p:nvSpPr>
+        <p:spPr/>
+        <p:txBody>
+          <a:bodyPr/>
+          <a:lstStyle/>
+          <a:p>
+            <a:fld id="{5C35FCF4-C3EF-BD43-82E0-05BC237DAD2A}" type="slidenum">
+              <a:rPr lang="en-US" smtClean="0"/>
+              <a:pPr/>
+              <a:t>11</a:t>
+            </a:fld>
+            <a:endParaRPr lang="en-US" dirty="0"/>
           </a:p>
         </p:txBody>
       </p:sp>
       <p:graphicFrame>
         <p:nvGraphicFramePr>
-          <p:cNvPr id="12" name="Table 0"/>
+          <p:cNvPr id="2" name="Table 0">
+            <a:extLst>
+              <a:ext uri="{FF2B5EF4-FFF2-40B4-BE49-F238E27FC236}">
+                <a16:creationId xmlns:a16="http://schemas.microsoft.com/office/drawing/2014/main" id="{D12F9249-F7C2-F555-7399-1586B222814D}"/>
+              </a:ext>
+            </a:extLst>
+          </p:cNvPr>
           <p:cNvGraphicFramePr>
             <a:graphicFrameLocks noGrp="1"/>
           </p:cNvGraphicFramePr>
-          <p:nvPr/>
+          <p:nvPr>
+            <p:extLst>
+              <p:ext uri="{D42A27DB-BD31-4B8C-83A1-F6EECF244321}">
+                <p14:modId xmlns:p14="http://schemas.microsoft.com/office/powerpoint/2010/main" val="1760836427"/>
+              </p:ext>
+            </p:extLst>
+          </p:nvPr>
         </p:nvGraphicFramePr>
         <p:xfrm>
-          <a:off x="731520" y="1584960"/>
-          <a:ext cx="10485120" cy="1402080"/>
+          <a:off x="539561" y="4149391"/>
+          <a:ext cx="6937765" cy="1584960"/>
         </p:xfrm>
         <a:graphic>
           <a:graphicData uri="http://schemas.openxmlformats.org/drawingml/2006/table">
             <a:tbl>
               <a:tblPr/>
               <a:tblGrid>
-                <a:gridCol w="2438400">
+                <a:gridCol w="874192">
                   <a:extLst>
                     <a:ext uri="{9D8B030D-6E8A-4147-A177-3AD203B41FA5}">
                       <a16:colId xmlns:a16="http://schemas.microsoft.com/office/drawing/2014/main" val="20000"/>
                     </a:ext>
                   </a:extLst>
                 </a:gridCol>
-                <a:gridCol w="1706880">
+                <a:gridCol w="1018162">
                   <a:extLst>
                     <a:ext uri="{9D8B030D-6E8A-4147-A177-3AD203B41FA5}">
                       <a16:colId xmlns:a16="http://schemas.microsoft.com/office/drawing/2014/main" val="20001"/>
                     </a:ext>
                   </a:extLst>
                 </a:gridCol>
-                <a:gridCol w="1706880">
+                <a:gridCol w="1495857">
                   <a:extLst>
                     <a:ext uri="{9D8B030D-6E8A-4147-A177-3AD203B41FA5}">
                       <a16:colId xmlns:a16="http://schemas.microsoft.com/office/drawing/2014/main" val="20002"/>
                     </a:ext>
                   </a:extLst>
                 </a:gridCol>
-                <a:gridCol w="1463040">
+                <a:gridCol w="806717">
                   <a:extLst>
                     <a:ext uri="{9D8B030D-6E8A-4147-A177-3AD203B41FA5}">
                       <a16:colId xmlns:a16="http://schemas.microsoft.com/office/drawing/2014/main" val="20003"/>
                     </a:ext>
                   </a:extLst>
                 </a:gridCol>
-                <a:gridCol w="1463040">
+                <a:gridCol w="806717">
                   <a:extLst>
                     <a:ext uri="{9D8B030D-6E8A-4147-A177-3AD203B41FA5}">
                       <a16:colId xmlns:a16="http://schemas.microsoft.com/office/drawing/2014/main" val="20004"/>
                     </a:ext>
                   </a:extLst>
                 </a:gridCol>
-                <a:gridCol w="1706880">
+                <a:gridCol w="968060">
                   <a:extLst>
                     <a:ext uri="{9D8B030D-6E8A-4147-A177-3AD203B41FA5}">
                       <a16:colId xmlns:a16="http://schemas.microsoft.com/office/drawing/2014/main" val="20005"/>
+                    </a:ext>
+                  </a:extLst>
+                </a:gridCol>
+                <a:gridCol w="968060">
+                  <a:extLst>
+                    <a:ext uri="{9D8B030D-6E8A-4147-A177-3AD203B41FA5}">
+                      <a16:colId xmlns:a16="http://schemas.microsoft.com/office/drawing/2014/main" val="20006"/>
                     </a:ext>
                   </a:extLst>
                 </a:gridCol>
@@ -7724,7 +8702,7 @@
                         <a:buNone/>
                       </a:pPr>
                       <a:r>
-                        <a:rPr lang="en-US" sz="1500" b="1" dirty="0">
+                        <a:rPr lang="en-US" sz="1400" b="1" dirty="0">
                           <a:solidFill>
                             <a:srgbClr val="FFFFFF"/>
                           </a:solidFill>
@@ -7734,7 +8712,7 @@
                         </a:rPr>
                         <a:t>Model</a:t>
                       </a:r>
-                      <a:endParaRPr lang="en-US" sz="1500" dirty="0">
+                      <a:endParaRPr lang="en-US" sz="1400" dirty="0">
                         <a:latin typeface="Calibri" charset="0"/>
                         <a:ea typeface="Calibri" charset="0"/>
                         <a:cs typeface="Calibri" charset="0"/>
@@ -7792,7 +8770,7 @@
                         <a:buNone/>
                       </a:pPr>
                       <a:r>
-                        <a:rPr lang="en-US" sz="1500" b="1" dirty="0">
+                        <a:rPr lang="en-US" sz="1400" b="1" dirty="0">
                           <a:solidFill>
                             <a:srgbClr val="FFFFFF"/>
                           </a:solidFill>
@@ -7802,7 +8780,7 @@
                         </a:rPr>
                         <a:t>Accuracy</a:t>
                       </a:r>
-                      <a:endParaRPr lang="en-US" sz="1500" dirty="0">
+                      <a:endParaRPr lang="en-US" sz="1400" dirty="0">
                         <a:latin typeface="Calibri" charset="0"/>
                         <a:ea typeface="Calibri" charset="0"/>
                         <a:cs typeface="Calibri" charset="0"/>
@@ -7860,7 +8838,7 @@
                         <a:buNone/>
                       </a:pPr>
                       <a:r>
-                        <a:rPr lang="en-US" sz="1500" b="1" dirty="0">
+                        <a:rPr lang="en-US" sz="1400" b="1" dirty="0">
                           <a:solidFill>
                             <a:srgbClr val="FFFFFF"/>
                           </a:solidFill>
@@ -7870,7 +8848,7 @@
                         </a:rPr>
                         <a:t>Precision</a:t>
                       </a:r>
-                      <a:endParaRPr lang="en-US" sz="1500" dirty="0">
+                      <a:endParaRPr lang="en-US" sz="1400" dirty="0">
                         <a:latin typeface="Calibri" charset="0"/>
                         <a:ea typeface="Calibri" charset="0"/>
                         <a:cs typeface="Calibri" charset="0"/>
@@ -7928,7 +8906,7 @@
                         <a:buNone/>
                       </a:pPr>
                       <a:r>
-                        <a:rPr lang="en-US" sz="1500" b="1" dirty="0">
+                        <a:rPr lang="en-US" sz="1400" b="1" dirty="0">
                           <a:solidFill>
                             <a:srgbClr val="FFFFFF"/>
                           </a:solidFill>
@@ -7938,7 +8916,7 @@
                         </a:rPr>
                         <a:t>Recall</a:t>
                       </a:r>
-                      <a:endParaRPr lang="en-US" sz="1500" dirty="0">
+                      <a:endParaRPr lang="en-US" sz="1400" dirty="0">
                         <a:latin typeface="Calibri" charset="0"/>
                         <a:ea typeface="Calibri" charset="0"/>
                         <a:cs typeface="Calibri" charset="0"/>
@@ -7996,7 +8974,7 @@
                         <a:buNone/>
                       </a:pPr>
                       <a:r>
-                        <a:rPr lang="en-US" sz="1500" b="1" dirty="0">
+                        <a:rPr lang="en-US" sz="1400" b="1" dirty="0">
                           <a:solidFill>
                             <a:srgbClr val="FFFFFF"/>
                           </a:solidFill>
@@ -8006,7 +8984,7 @@
                         </a:rPr>
                         <a:t>F1</a:t>
                       </a:r>
-                      <a:endParaRPr lang="en-US" sz="1500" dirty="0">
+                      <a:endParaRPr lang="en-US" sz="1400" dirty="0">
                         <a:latin typeface="Calibri" charset="0"/>
                         <a:ea typeface="Calibri" charset="0"/>
                         <a:cs typeface="Calibri" charset="0"/>
@@ -8064,7 +9042,7 @@
                         <a:buNone/>
                       </a:pPr>
                       <a:r>
-                        <a:rPr lang="en-US" sz="1500" b="1" dirty="0">
+                        <a:rPr lang="en-US" sz="1400" b="1" dirty="0">
                           <a:solidFill>
                             <a:srgbClr val="FFFFFF"/>
                           </a:solidFill>
@@ -8074,7 +9052,64 @@
                         </a:rPr>
                         <a:t>ROC-AUC</a:t>
                       </a:r>
-                      <a:endParaRPr lang="en-US" sz="1500" dirty="0">
+                      <a:endParaRPr lang="en-US" sz="1400" dirty="0">
+                        <a:latin typeface="Calibri" charset="0"/>
+                        <a:ea typeface="Calibri" charset="0"/>
+                        <a:cs typeface="Calibri" charset="0"/>
+                      </a:endParaRPr>
+                    </a:p>
+                  </a:txBody>
+                  <a:tcPr marL="121920" marR="121920" marT="60960" marB="60960">
+                    <a:lnL w="6350" cap="flat" cmpd="sng" algn="ctr">
+                      <a:solidFill>
+                        <a:srgbClr val="C3BFB6"/>
+                      </a:solidFill>
+                      <a:prstDash val="solid"/>
+                      <a:round/>
+                      <a:headEnd type="none" w="med" len="med"/>
+                      <a:tailEnd type="none" w="med" len="med"/>
+                    </a:lnL>
+                    <a:lnR w="6350" cap="flat" cmpd="sng" algn="ctr">
+                      <a:solidFill>
+                        <a:srgbClr val="C3BFB6"/>
+                      </a:solidFill>
+                      <a:prstDash val="solid"/>
+                      <a:round/>
+                      <a:headEnd type="none" w="med" len="med"/>
+                      <a:tailEnd type="none" w="med" len="med"/>
+                    </a:lnR>
+                    <a:lnT w="6350" cap="flat" cmpd="sng" algn="ctr">
+                      <a:solidFill>
+                        <a:srgbClr val="C3BFB6"/>
+                      </a:solidFill>
+                      <a:prstDash val="solid"/>
+                      <a:round/>
+                      <a:headEnd type="none" w="med" len="med"/>
+                      <a:tailEnd type="none" w="med" len="med"/>
+                    </a:lnT>
+                    <a:lnB w="6350" cap="flat" cmpd="sng" algn="ctr">
+                      <a:solidFill>
+                        <a:srgbClr val="C3BFB6"/>
+                      </a:solidFill>
+                      <a:prstDash val="solid"/>
+                      <a:round/>
+                      <a:headEnd type="none" w="med" len="med"/>
+                      <a:tailEnd type="none" w="med" len="med"/>
+                    </a:lnB>
+                    <a:solidFill>
+                      <a:srgbClr val="EE2C2A"/>
+                    </a:solidFill>
+                  </a:tcPr>
+                </a:tc>
+                <a:tc>
+                  <a:txBody>
+                    <a:bodyPr/>
+                    <a:lstStyle/>
+                    <a:p>
+                      <a:pPr marL="0" indent="0" algn="ctr">
+                        <a:buNone/>
+                      </a:pPr>
+                      <a:endParaRPr lang="en-US" sz="1400" dirty="0">
                         <a:latin typeface="Calibri" charset="0"/>
                         <a:ea typeface="Calibri" charset="0"/>
                         <a:cs typeface="Calibri" charset="0"/>
@@ -8139,7 +9174,7 @@
                         <a:buNone/>
                       </a:pPr>
                       <a:r>
-                        <a:rPr lang="en-US" sz="1500" dirty="0">
+                        <a:rPr lang="en-US" sz="1400" b="1" dirty="0">
                           <a:solidFill>
                             <a:srgbClr val="2B2B2B"/>
                           </a:solidFill>
@@ -8147,9 +9182,9 @@
                           <a:ea typeface="Calibri" pitchFamily="34" charset="-122"/>
                           <a:cs typeface="Calibri" pitchFamily="34" charset="-120"/>
                         </a:rPr>
-                        <a:t>LogReg</a:t>
+                        <a:t>HGB</a:t>
                       </a:r>
-                      <a:endParaRPr lang="en-US" sz="1500" dirty="0">
+                      <a:endParaRPr lang="en-US" sz="1400" dirty="0">
                         <a:latin typeface="Calibri" charset="0"/>
                         <a:ea typeface="Calibri" charset="0"/>
                         <a:cs typeface="Calibri" charset="0"/>
@@ -8194,7 +9229,7 @@
                       <a:tailEnd type="none" w="med" len="med"/>
                     </a:lnB>
                     <a:solidFill>
-                      <a:srgbClr val="F7F5F2"/>
+                      <a:srgbClr val="FFF8E1"/>
                     </a:solidFill>
                   </a:tcPr>
                 </a:tc>
@@ -8207,7 +9242,7 @@
                         <a:buNone/>
                       </a:pPr>
                       <a:r>
-                        <a:rPr lang="en-US" sz="1500" dirty="0">
+                        <a:rPr lang="en-US" sz="1400" b="1" dirty="0">
                           <a:solidFill>
                             <a:srgbClr val="2B2B2B"/>
                           </a:solidFill>
@@ -8215,9 +9250,9 @@
                           <a:ea typeface="Calibri" pitchFamily="34" charset="-122"/>
                           <a:cs typeface="Calibri" pitchFamily="34" charset="-120"/>
                         </a:rPr>
-                        <a:t>96.3%</a:t>
+                        <a:t>98.0%</a:t>
                       </a:r>
-                      <a:endParaRPr lang="en-US" sz="1500" dirty="0">
+                      <a:endParaRPr lang="en-US" sz="1400" dirty="0">
                         <a:latin typeface="Calibri" charset="0"/>
                         <a:ea typeface="Calibri" charset="0"/>
                         <a:cs typeface="Calibri" charset="0"/>
@@ -8262,7 +9297,7 @@
                       <a:tailEnd type="none" w="med" len="med"/>
                     </a:lnB>
                     <a:solidFill>
-                      <a:srgbClr val="F7F5F2"/>
+                      <a:srgbClr val="FFF8E1"/>
                     </a:solidFill>
                   </a:tcPr>
                 </a:tc>
@@ -8275,7 +9310,7 @@
                         <a:buNone/>
                       </a:pPr>
                       <a:r>
-                        <a:rPr lang="en-US" sz="1500" dirty="0">
+                        <a:rPr lang="en-US" sz="1400" b="1" dirty="0">
                           <a:solidFill>
                             <a:srgbClr val="2B2B2B"/>
                           </a:solidFill>
@@ -8283,9 +9318,9 @@
                           <a:ea typeface="Calibri" pitchFamily="34" charset="-122"/>
                           <a:cs typeface="Calibri" pitchFamily="34" charset="-120"/>
                         </a:rPr>
-                        <a:t>0.32</a:t>
+                        <a:t>0.88</a:t>
                       </a:r>
-                      <a:endParaRPr lang="en-US" sz="1500" dirty="0">
+                      <a:endParaRPr lang="en-US" sz="1400" dirty="0">
                         <a:latin typeface="Calibri" charset="0"/>
                         <a:ea typeface="Calibri" charset="0"/>
                         <a:cs typeface="Calibri" charset="0"/>
@@ -8330,7 +9365,7 @@
                       <a:tailEnd type="none" w="med" len="med"/>
                     </a:lnB>
                     <a:solidFill>
-                      <a:srgbClr val="F7F5F2"/>
+                      <a:srgbClr val="FFF8E1"/>
                     </a:solidFill>
                   </a:tcPr>
                 </a:tc>
@@ -8343,7 +9378,7 @@
                         <a:buNone/>
                       </a:pPr>
                       <a:r>
-                        <a:rPr lang="en-US" sz="1500" dirty="0">
+                        <a:rPr lang="en-US" sz="1400" b="1" dirty="0">
                           <a:solidFill>
                             <a:srgbClr val="2B2B2B"/>
                           </a:solidFill>
@@ -8351,9 +9386,9 @@
                           <a:ea typeface="Calibri" pitchFamily="34" charset="-122"/>
                           <a:cs typeface="Calibri" pitchFamily="34" charset="-120"/>
                         </a:rPr>
-                        <a:t>0.29</a:t>
+                        <a:t>0.64</a:t>
                       </a:r>
-                      <a:endParaRPr lang="en-US" sz="1500" dirty="0">
+                      <a:endParaRPr lang="en-US" sz="1400" dirty="0">
                         <a:latin typeface="Calibri" charset="0"/>
                         <a:ea typeface="Calibri" charset="0"/>
                         <a:cs typeface="Calibri" charset="0"/>
@@ -8398,7 +9433,7 @@
                       <a:tailEnd type="none" w="med" len="med"/>
                     </a:lnB>
                     <a:solidFill>
-                      <a:srgbClr val="F7F5F2"/>
+                      <a:srgbClr val="FFF8E1"/>
                     </a:solidFill>
                   </a:tcPr>
                 </a:tc>
@@ -8411,7 +9446,7 @@
                         <a:buNone/>
                       </a:pPr>
                       <a:r>
-                        <a:rPr lang="en-US" sz="1500" dirty="0">
+                        <a:rPr lang="en-US" sz="1400" b="1" dirty="0">
                           <a:solidFill>
                             <a:srgbClr val="2B2B2B"/>
                           </a:solidFill>
@@ -8419,9 +9454,9 @@
                           <a:ea typeface="Calibri" pitchFamily="34" charset="-122"/>
                           <a:cs typeface="Calibri" pitchFamily="34" charset="-120"/>
                         </a:rPr>
-                        <a:t>0.30</a:t>
+                        <a:t>0.67</a:t>
                       </a:r>
-                      <a:endParaRPr lang="en-US" sz="1500" dirty="0">
+                      <a:endParaRPr lang="en-US" sz="1400" dirty="0">
                         <a:latin typeface="Calibri" charset="0"/>
                         <a:ea typeface="Calibri" charset="0"/>
                         <a:cs typeface="Calibri" charset="0"/>
@@ -8466,7 +9501,7 @@
                       <a:tailEnd type="none" w="med" len="med"/>
                     </a:lnB>
                     <a:solidFill>
-                      <a:srgbClr val="F7F5F2"/>
+                      <a:srgbClr val="FFF8E1"/>
                     </a:solidFill>
                   </a:tcPr>
                 </a:tc>
@@ -8479,7 +9514,7 @@
                         <a:buNone/>
                       </a:pPr>
                       <a:r>
-                        <a:rPr lang="en-US" sz="1500" dirty="0">
+                        <a:rPr lang="en-US" sz="1400" b="1" dirty="0">
                           <a:solidFill>
                             <a:srgbClr val="2B2B2B"/>
                           </a:solidFill>
@@ -8487,9 +9522,9 @@
                           <a:ea typeface="Calibri" pitchFamily="34" charset="-122"/>
                           <a:cs typeface="Calibri" pitchFamily="34" charset="-120"/>
                         </a:rPr>
-                        <a:t>0.77</a:t>
+                        <a:t>0.94</a:t>
                       </a:r>
-                      <a:endParaRPr lang="en-US" sz="1500" dirty="0">
+                      <a:endParaRPr lang="en-US" sz="1400" dirty="0">
                         <a:latin typeface="Calibri" charset="0"/>
                         <a:ea typeface="Calibri" charset="0"/>
                         <a:cs typeface="Calibri" charset="0"/>
@@ -8534,7 +9569,75 @@
                       <a:tailEnd type="none" w="med" len="med"/>
                     </a:lnB>
                     <a:solidFill>
-                      <a:srgbClr val="F7F5F2"/>
+                      <a:srgbClr val="FFF8E1"/>
+                    </a:solidFill>
+                  </a:tcPr>
+                </a:tc>
+                <a:tc>
+                  <a:txBody>
+                    <a:bodyPr/>
+                    <a:lstStyle/>
+                    <a:p>
+                      <a:pPr marL="0" indent="0" algn="ctr">
+                        <a:buNone/>
+                      </a:pPr>
+                      <a:r>
+                        <a:rPr lang="en-US" sz="1400" b="1" dirty="0">
+                          <a:solidFill>
+                            <a:srgbClr val="FFA300"/>
+                          </a:solidFill>
+                          <a:latin typeface="Calibri" pitchFamily="34" charset="0"/>
+                          <a:ea typeface="Calibri" pitchFamily="34" charset="-122"/>
+                          <a:cs typeface="Calibri" pitchFamily="34" charset="-120"/>
+                        </a:rPr>
+                        <a:t>★ BEST</a:t>
+                      </a:r>
+                      <a:endParaRPr lang="en-US" sz="1400" dirty="0">
+                        <a:latin typeface="Calibri" charset="0"/>
+                        <a:ea typeface="Calibri" charset="0"/>
+                        <a:cs typeface="Calibri" charset="0"/>
+                      </a:endParaRPr>
+                    </a:p>
+                  </a:txBody>
+                  <a:tcPr marL="121920" marR="121920" marT="60960" marB="60960">
+                    <a:lnL w="6350" cap="flat" cmpd="sng" algn="ctr">
+                      <a:solidFill>
+                        <a:srgbClr val="C3BFB6"/>
+                      </a:solidFill>
+                      <a:prstDash val="solid"/>
+                      <a:round/>
+                      <a:headEnd type="none" w="med" len="med"/>
+                      <a:tailEnd type="none" w="med" len="med"/>
+                    </a:lnL>
+                    <a:lnR w="6350" cap="flat" cmpd="sng" algn="ctr">
+                      <a:solidFill>
+                        <a:srgbClr val="C3BFB6"/>
+                      </a:solidFill>
+                      <a:prstDash val="solid"/>
+                      <a:round/>
+                      <a:headEnd type="none" w="med" len="med"/>
+                      <a:tailEnd type="none" w="med" len="med"/>
+                    </a:lnR>
+                    <a:lnT w="6350" cap="flat" cmpd="sng" algn="ctr">
+                      <a:solidFill>
+                        <a:srgbClr val="C3BFB6"/>
+                      </a:solidFill>
+                      <a:prstDash val="solid"/>
+                      <a:round/>
+                      <a:headEnd type="none" w="med" len="med"/>
+                      <a:tailEnd type="none" w="med" len="med"/>
+                    </a:lnT>
+                    <a:lnB w="6350" cap="flat" cmpd="sng" algn="ctr">
+                      <a:solidFill>
+                        <a:srgbClr val="C3BFB6"/>
+                      </a:solidFill>
+                      <a:prstDash val="solid"/>
+                      <a:round/>
+                      <a:headEnd type="none" w="med" len="med"/>
+                      <a:tailEnd type="none" w="med" len="med"/>
+                    </a:lnB>
+                    <a:solidFill>
+                      <a:srgbClr val="FFF8E1"/>
                     </a:solidFill>
                   </a:tcPr>
                 </a:tc>
@@ -8554,7 +9657,7 @@
                         <a:buNone/>
                       </a:pPr>
                       <a:r>
-                        <a:rPr lang="en-US" sz="1500" dirty="0">
+                        <a:rPr lang="en-US" sz="1400" dirty="0">
                           <a:solidFill>
                             <a:srgbClr val="2B2B2B"/>
                           </a:solidFill>
@@ -8562,9 +9665,9 @@
                           <a:ea typeface="Calibri" pitchFamily="34" charset="-122"/>
                           <a:cs typeface="Calibri" pitchFamily="34" charset="-120"/>
                         </a:rPr>
-                        <a:t>RF (reg)</a:t>
+                        <a:t>RandomForest</a:t>
                       </a:r>
-                      <a:endParaRPr lang="en-US" sz="1500" dirty="0">
+                      <a:endParaRPr lang="en-US" sz="1400" dirty="0">
                         <a:latin typeface="Calibri" charset="0"/>
                         <a:ea typeface="Calibri" charset="0"/>
                         <a:cs typeface="Calibri" charset="0"/>
@@ -8622,7 +9725,7 @@
                         <a:buNone/>
                       </a:pPr>
                       <a:r>
-                        <a:rPr lang="en-US" sz="1500" dirty="0">
+                        <a:rPr lang="en-US" sz="1400" dirty="0">
                           <a:solidFill>
                             <a:srgbClr val="2B2B2B"/>
                           </a:solidFill>
@@ -8630,9 +9733,9 @@
                           <a:ea typeface="Calibri" pitchFamily="34" charset="-122"/>
                           <a:cs typeface="Calibri" pitchFamily="34" charset="-120"/>
                         </a:rPr>
-                        <a:t>97.1%</a:t>
+                        <a:t>98.1%</a:t>
                       </a:r>
-                      <a:endParaRPr lang="en-US" sz="1500" dirty="0">
+                      <a:endParaRPr lang="en-US" sz="1400" dirty="0">
                         <a:latin typeface="Calibri" charset="0"/>
                         <a:ea typeface="Calibri" charset="0"/>
                         <a:cs typeface="Calibri" charset="0"/>
@@ -8690,7 +9793,7 @@
                         <a:buNone/>
                       </a:pPr>
                       <a:r>
-                        <a:rPr lang="en-US" sz="1500" dirty="0">
+                        <a:rPr lang="en-US" sz="1400" dirty="0">
                           <a:solidFill>
                             <a:srgbClr val="2B2B2B"/>
                           </a:solidFill>
@@ -8698,9 +9801,9 @@
                           <a:ea typeface="Calibri" pitchFamily="34" charset="-122"/>
                           <a:cs typeface="Calibri" pitchFamily="34" charset="-120"/>
                         </a:rPr>
-                        <a:t>0.85</a:t>
+                        <a:t>0.76</a:t>
                       </a:r>
-                      <a:endParaRPr lang="en-US" sz="1500" dirty="0">
+                      <a:endParaRPr lang="en-US" sz="1400" dirty="0">
                         <a:latin typeface="Calibri" charset="0"/>
                         <a:ea typeface="Calibri" charset="0"/>
                         <a:cs typeface="Calibri" charset="0"/>
@@ -8758,7 +9861,7 @@
                         <a:buNone/>
                       </a:pPr>
                       <a:r>
-                        <a:rPr lang="en-US" sz="1500" dirty="0">
+                        <a:rPr lang="en-US" sz="1400" dirty="0">
                           <a:solidFill>
                             <a:srgbClr val="2B2B2B"/>
                           </a:solidFill>
@@ -8766,9 +9869,9 @@
                           <a:ea typeface="Calibri" pitchFamily="34" charset="-122"/>
                           <a:cs typeface="Calibri" pitchFamily="34" charset="-120"/>
                         </a:rPr>
-                        <a:t>0.81</a:t>
+                        <a:t>0.77</a:t>
                       </a:r>
-                      <a:endParaRPr lang="en-US" sz="1500" dirty="0">
+                      <a:endParaRPr lang="en-US" sz="1400" dirty="0">
                         <a:latin typeface="Calibri" charset="0"/>
                         <a:ea typeface="Calibri" charset="0"/>
                         <a:cs typeface="Calibri" charset="0"/>
@@ -8826,7 +9929,7 @@
                         <a:buNone/>
                       </a:pPr>
                       <a:r>
-                        <a:rPr lang="en-US" sz="1500" dirty="0">
+                        <a:rPr lang="en-US" sz="1400" dirty="0">
                           <a:solidFill>
                             <a:srgbClr val="2B2B2B"/>
                           </a:solidFill>
@@ -8834,9 +9937,9 @@
                           <a:ea typeface="Calibri" pitchFamily="34" charset="-122"/>
                           <a:cs typeface="Calibri" pitchFamily="34" charset="-120"/>
                         </a:rPr>
-                        <a:t>0.82</a:t>
+                        <a:t>0.54</a:t>
                       </a:r>
-                      <a:endParaRPr lang="en-US" sz="1500" dirty="0">
+                      <a:endParaRPr lang="en-US" sz="1400" dirty="0">
                         <a:latin typeface="Calibri" charset="0"/>
                         <a:ea typeface="Calibri" charset="0"/>
                         <a:cs typeface="Calibri" charset="0"/>
@@ -8894,7 +9997,7 @@
                         <a:buNone/>
                       </a:pPr>
                       <a:r>
-                        <a:rPr lang="en-US" sz="1500" dirty="0">
+                        <a:rPr lang="en-US" sz="1400" dirty="0">
                           <a:solidFill>
                             <a:srgbClr val="2B2B2B"/>
                           </a:solidFill>
@@ -8902,13 +10005,73 @@
                           <a:ea typeface="Calibri" pitchFamily="34" charset="-122"/>
                           <a:cs typeface="Calibri" pitchFamily="34" charset="-120"/>
                         </a:rPr>
-                        <a:t>0.95</a:t>
+                        <a:t>0.91</a:t>
                       </a:r>
-                      <a:endParaRPr lang="en-US" sz="1500" dirty="0">
+                      <a:endParaRPr lang="en-US" sz="1400" dirty="0">
                         <a:latin typeface="Calibri" charset="0"/>
                         <a:ea typeface="Calibri" charset="0"/>
                         <a:cs typeface="Calibri" charset="0"/>
                       </a:endParaRPr>
+                    </a:p>
+                  </a:txBody>
+                  <a:tcPr marL="121920" marR="121920" marT="60960" marB="60960">
+                    <a:lnL w="6350" cap="flat" cmpd="sng" algn="ctr">
+                      <a:solidFill>
+                        <a:srgbClr val="C3BFB6"/>
+                      </a:solidFill>
+                      <a:prstDash val="solid"/>
+                      <a:round/>
+                      <a:headEnd type="none" w="med" len="med"/>
+                      <a:tailEnd type="none" w="med" len="med"/>
+                    </a:lnL>
+                    <a:lnR w="6350" cap="flat" cmpd="sng" algn="ctr">
+                      <a:solidFill>
+                        <a:srgbClr val="C3BFB6"/>
+                      </a:solidFill>
+                      <a:prstDash val="solid"/>
+                      <a:round/>
+                      <a:headEnd type="none" w="med" len="med"/>
+                      <a:tailEnd type="none" w="med" len="med"/>
+                    </a:lnR>
+                    <a:lnT w="6350" cap="flat" cmpd="sng" algn="ctr">
+                      <a:solidFill>
+                        <a:srgbClr val="C3BFB6"/>
+                      </a:solidFill>
+                      <a:prstDash val="solid"/>
+                      <a:round/>
+                      <a:headEnd type="none" w="med" len="med"/>
+                      <a:tailEnd type="none" w="med" len="med"/>
+                    </a:lnT>
+                    <a:lnB w="6350" cap="flat" cmpd="sng" algn="ctr">
+                      <a:solidFill>
+                        <a:srgbClr val="C3BFB6"/>
+                      </a:solidFill>
+                      <a:prstDash val="solid"/>
+                      <a:round/>
+                      <a:headEnd type="none" w="med" len="med"/>
+                      <a:tailEnd type="none" w="med" len="med"/>
+                    </a:lnB>
+                    <a:solidFill>
+                      <a:srgbClr val="FFFFFF"/>
+                    </a:solidFill>
+                  </a:tcPr>
+                </a:tc>
+                <a:tc>
+                  <a:txBody>
+                    <a:bodyPr/>
+                    <a:lstStyle/>
+                    <a:p>
+                      <a:pPr marL="0" indent="0" algn="ctr">
+                        <a:buNone/>
+                      </a:pPr>
+                      <a:r>
+                        <a:rPr lang="en-US" sz="1400" dirty="0">
+                          <a:latin typeface="Calibri" charset="0"/>
+                          <a:ea typeface="Calibri" charset="0"/>
+                          <a:cs typeface="Calibri" charset="0"/>
+                        </a:rPr>
+                        <a:t>Best Recall</a:t>
+                      </a:r>
                     </a:p>
                   </a:txBody>
                   <a:tcPr marL="121920" marR="121920" marT="60960" marB="60960">
@@ -8969,7 +10132,7 @@
                         <a:buNone/>
                       </a:pPr>
                       <a:r>
-                        <a:rPr lang="en-US" sz="1500" dirty="0">
+                        <a:rPr lang="en-US" sz="1400" dirty="0">
                           <a:solidFill>
                             <a:srgbClr val="2B2B2B"/>
                           </a:solidFill>
@@ -8977,9 +10140,9 @@
                           <a:ea typeface="Calibri" pitchFamily="34" charset="-122"/>
                           <a:cs typeface="Calibri" pitchFamily="34" charset="-120"/>
                         </a:rPr>
-                        <a:t>HGB (reg)</a:t>
+                        <a:t>LogReg</a:t>
                       </a:r>
-                      <a:endParaRPr lang="en-US" sz="1500" dirty="0">
+                      <a:endParaRPr lang="en-US" sz="1400" dirty="0">
                         <a:latin typeface="Calibri" charset="0"/>
                         <a:ea typeface="Calibri" charset="0"/>
                         <a:cs typeface="Calibri" charset="0"/>
@@ -9037,7 +10200,7 @@
                         <a:buNone/>
                       </a:pPr>
                       <a:r>
-                        <a:rPr lang="en-US" sz="1500" dirty="0">
+                        <a:rPr lang="en-US" sz="1400" dirty="0">
                           <a:solidFill>
                             <a:srgbClr val="2B2B2B"/>
                           </a:solidFill>
@@ -9045,9 +10208,9 @@
                           <a:ea typeface="Calibri" pitchFamily="34" charset="-122"/>
                           <a:cs typeface="Calibri" pitchFamily="34" charset="-120"/>
                         </a:rPr>
-                        <a:t>97.4%</a:t>
+                        <a:t>96.3%</a:t>
                       </a:r>
-                      <a:endParaRPr lang="en-US" sz="1500" dirty="0">
+                      <a:endParaRPr lang="en-US" sz="1400" dirty="0">
                         <a:latin typeface="Calibri" charset="0"/>
                         <a:ea typeface="Calibri" charset="0"/>
                         <a:cs typeface="Calibri" charset="0"/>
@@ -9105,7 +10268,7 @@
                         <a:buNone/>
                       </a:pPr>
                       <a:r>
-                        <a:rPr lang="en-US" sz="1500" dirty="0">
+                        <a:rPr lang="en-US" sz="1400" dirty="0">
                           <a:solidFill>
                             <a:srgbClr val="2B2B2B"/>
                           </a:solidFill>
@@ -9113,9 +10276,9 @@
                           <a:ea typeface="Calibri" pitchFamily="34" charset="-122"/>
                           <a:cs typeface="Calibri" pitchFamily="34" charset="-120"/>
                         </a:rPr>
-                        <a:t>0.87</a:t>
+                        <a:t>0.30</a:t>
                       </a:r>
-                      <a:endParaRPr lang="en-US" sz="1500" dirty="0">
+                      <a:endParaRPr lang="en-US" sz="1400" dirty="0">
                         <a:latin typeface="Calibri" charset="0"/>
                         <a:ea typeface="Calibri" charset="0"/>
                         <a:cs typeface="Calibri" charset="0"/>
@@ -9173,7 +10336,7 @@
                         <a:buNone/>
                       </a:pPr>
                       <a:r>
-                        <a:rPr lang="en-US" sz="1500" dirty="0">
+                        <a:rPr lang="en-US" sz="1400" dirty="0">
                           <a:solidFill>
                             <a:srgbClr val="2B2B2B"/>
                           </a:solidFill>
@@ -9181,9 +10344,9 @@
                           <a:ea typeface="Calibri" pitchFamily="34" charset="-122"/>
                           <a:cs typeface="Calibri" pitchFamily="34" charset="-120"/>
                         </a:rPr>
-                        <a:t>0.79</a:t>
+                        <a:t>0.31</a:t>
                       </a:r>
-                      <a:endParaRPr lang="en-US" sz="1500" dirty="0">
+                      <a:endParaRPr lang="en-US" sz="1400" dirty="0">
                         <a:latin typeface="Calibri" charset="0"/>
                         <a:ea typeface="Calibri" charset="0"/>
                         <a:cs typeface="Calibri" charset="0"/>
@@ -9241,7 +10404,7 @@
                         <a:buNone/>
                       </a:pPr>
                       <a:r>
-                        <a:rPr lang="en-US" sz="1500" dirty="0">
+                        <a:rPr lang="en-US" sz="1400" dirty="0">
                           <a:solidFill>
                             <a:srgbClr val="2B2B2B"/>
                           </a:solidFill>
@@ -9249,9 +10412,9 @@
                           <a:ea typeface="Calibri" pitchFamily="34" charset="-122"/>
                           <a:cs typeface="Calibri" pitchFamily="34" charset="-120"/>
                         </a:rPr>
-                        <a:t>0.82</a:t>
+                        <a:t>0.30</a:t>
                       </a:r>
-                      <a:endParaRPr lang="en-US" sz="1500" dirty="0">
+                      <a:endParaRPr lang="en-US" sz="1400" dirty="0">
                         <a:latin typeface="Calibri" charset="0"/>
                         <a:ea typeface="Calibri" charset="0"/>
                         <a:cs typeface="Calibri" charset="0"/>
@@ -9309,7 +10472,7 @@
                         <a:buNone/>
                       </a:pPr>
                       <a:r>
-                        <a:rPr lang="en-US" sz="1500" dirty="0">
+                        <a:rPr lang="en-US" sz="1400" dirty="0">
                           <a:solidFill>
                             <a:srgbClr val="2B2B2B"/>
                           </a:solidFill>
@@ -9317,9 +10480,74 @@
                           <a:ea typeface="Calibri" pitchFamily="34" charset="-122"/>
                           <a:cs typeface="Calibri" pitchFamily="34" charset="-120"/>
                         </a:rPr>
-                        <a:t>0.96</a:t>
+                        <a:t>0.77</a:t>
                       </a:r>
-                      <a:endParaRPr lang="en-US" sz="1500" dirty="0">
+                      <a:endParaRPr lang="en-US" sz="1400" dirty="0">
+                        <a:latin typeface="Calibri" charset="0"/>
+                        <a:ea typeface="Calibri" charset="0"/>
+                        <a:cs typeface="Calibri" charset="0"/>
+                      </a:endParaRPr>
+                    </a:p>
+                  </a:txBody>
+                  <a:tcPr marL="121920" marR="121920" marT="60960" marB="60960">
+                    <a:lnL w="6350" cap="flat" cmpd="sng" algn="ctr">
+                      <a:solidFill>
+                        <a:srgbClr val="C3BFB6"/>
+                      </a:solidFill>
+                      <a:prstDash val="solid"/>
+                      <a:round/>
+                      <a:headEnd type="none" w="med" len="med"/>
+                      <a:tailEnd type="none" w="med" len="med"/>
+                    </a:lnL>
+                    <a:lnR w="6350" cap="flat" cmpd="sng" algn="ctr">
+                      <a:solidFill>
+                        <a:srgbClr val="C3BFB6"/>
+                      </a:solidFill>
+                      <a:prstDash val="solid"/>
+                      <a:round/>
+                      <a:headEnd type="none" w="med" len="med"/>
+                      <a:tailEnd type="none" w="med" len="med"/>
+                    </a:lnR>
+                    <a:lnT w="6350" cap="flat" cmpd="sng" algn="ctr">
+                      <a:solidFill>
+                        <a:srgbClr val="C3BFB6"/>
+                      </a:solidFill>
+                      <a:prstDash val="solid"/>
+                      <a:round/>
+                      <a:headEnd type="none" w="med" len="med"/>
+                      <a:tailEnd type="none" w="med" len="med"/>
+                    </a:lnT>
+                    <a:lnB w="6350" cap="flat" cmpd="sng" algn="ctr">
+                      <a:solidFill>
+                        <a:srgbClr val="C3BFB6"/>
+                      </a:solidFill>
+                      <a:prstDash val="solid"/>
+                      <a:round/>
+                      <a:headEnd type="none" w="med" len="med"/>
+                      <a:tailEnd type="none" w="med" len="med"/>
+                    </a:lnB>
+                    <a:solidFill>
+                      <a:srgbClr val="F7F5F2"/>
+                    </a:solidFill>
+                  </a:tcPr>
+                </a:tc>
+                <a:tc>
+                  <a:txBody>
+                    <a:bodyPr/>
+                    <a:lstStyle/>
+                    <a:p>
+                      <a:pPr marL="0" indent="0" algn="ctr">
+                        <a:buNone/>
+                      </a:pPr>
+                      <a:r>
+                        <a:rPr lang="en-US" altLang="zh-CN" sz="1400" dirty="0">
+                          <a:latin typeface="Calibri" charset="0"/>
+                          <a:ea typeface="Calibri" charset="0"/>
+                          <a:cs typeface="Calibri" charset="0"/>
+                        </a:rPr>
+                        <a:t>Baseline</a:t>
+                      </a:r>
+                      <a:endParaRPr lang="en-US" sz="1400" dirty="0">
                         <a:latin typeface="Calibri" charset="0"/>
                         <a:ea typeface="Calibri" charset="0"/>
                         <a:cs typeface="Calibri" charset="0"/>
@@ -9378,36 +10606,15 @@
           </a:graphicData>
         </a:graphic>
       </p:graphicFrame>
-      <p:sp>
-        <p:nvSpPr>
-          <p:cNvPr id="6" name="Shape 2"/>
-          <p:cNvSpPr/>
-          <p:nvPr/>
-        </p:nvSpPr>
-        <p:spPr>
-          <a:xfrm>
-            <a:off x="853440" y="3779520"/>
-            <a:ext cx="426720" cy="426720"/>
-          </a:xfrm>
-          <a:prstGeom prst="ellipse">
-            <a:avLst/>
-          </a:prstGeom>
-          <a:solidFill>
-            <a:srgbClr val="F7F5F2"/>
-          </a:solidFill>
-          <a:ln/>
-        </p:spPr>
-        <p:txBody>
-          <a:bodyPr/>
-          <a:lstStyle/>
-          <a:p>
-            <a:endParaRPr lang="zh-CN" altLang="en-US" sz="2400"/>
-          </a:p>
-        </p:txBody>
-      </p:sp>
       <p:pic>
         <p:nvPicPr>
-          <p:cNvPr id="7" name="Image 1" descr="preencoded.png"/>
+          <p:cNvPr id="4" name="Image 0" descr="preencoded.png">
+            <a:extLst>
+              <a:ext uri="{FF2B5EF4-FFF2-40B4-BE49-F238E27FC236}">
+                <a16:creationId xmlns:a16="http://schemas.microsoft.com/office/drawing/2014/main" id="{864B15ED-6D29-5DB9-596A-03FAF335E9F8}"/>
+              </a:ext>
+            </a:extLst>
+          </p:cNvPr>
           <p:cNvPicPr>
             <a:picLocks noChangeAspect="1"/>
           </p:cNvPicPr>
@@ -9415,347 +10622,48 @@
         </p:nvPicPr>
         <p:blipFill>
           <a:blip r:embed="rId3"/>
-          <a:stretch>
-            <a:fillRect/>
-          </a:stretch>
+          <a:srcRect/>
+          <a:stretch/>
         </p:blipFill>
         <p:spPr>
           <a:xfrm>
-            <a:off x="947319" y="3873399"/>
-            <a:ext cx="238963" cy="238963"/>
+            <a:off x="539561" y="1215738"/>
+            <a:ext cx="5981004" cy="2990502"/>
           </a:xfrm>
           <a:prstGeom prst="rect">
             <a:avLst/>
           </a:prstGeom>
         </p:spPr>
       </p:pic>
-      <p:sp>
-        <p:nvSpPr>
-          <p:cNvPr id="8" name="Text 3"/>
-          <p:cNvSpPr/>
-          <p:nvPr/>
-        </p:nvSpPr>
-        <p:spPr>
-          <a:xfrm>
-            <a:off x="1463040" y="3779520"/>
-            <a:ext cx="9997440" cy="426720"/>
-          </a:xfrm>
-          <a:prstGeom prst="rect">
-            <a:avLst/>
-          </a:prstGeom>
-          <a:noFill/>
-          <a:ln/>
-        </p:spPr>
-        <p:txBody>
-          <a:bodyPr wrap="square" lIns="0" tIns="0" rIns="0" bIns="0" rtlCol="0" anchor="ctr"/>
-          <a:lstStyle/>
-          <a:p>
-            <a:r>
-              <a:rPr lang="en-US" sz="1467" dirty="0">
-                <a:solidFill>
-                  <a:srgbClr val="2B2B2B"/>
-                </a:solidFill>
-                <a:latin typeface="Calibri" pitchFamily="34" charset="0"/>
-                <a:ea typeface="Calibri" pitchFamily="34" charset="-122"/>
-                <a:cs typeface="Calibri" pitchFamily="34" charset="-120"/>
-              </a:rPr>
-              <a:t>Both tree models achieve F1 = 0.82 on CV (major improvement)</a:t>
-            </a:r>
-            <a:endParaRPr lang="en-US" sz="1467" dirty="0"/>
-          </a:p>
-        </p:txBody>
-      </p:sp>
-      <p:sp>
-        <p:nvSpPr>
-          <p:cNvPr id="9" name="Shape 4"/>
-          <p:cNvSpPr/>
-          <p:nvPr/>
-        </p:nvSpPr>
-        <p:spPr>
-          <a:xfrm>
-            <a:off x="853440" y="4450080"/>
-            <a:ext cx="426720" cy="426720"/>
-          </a:xfrm>
-          <a:prstGeom prst="ellipse">
-            <a:avLst/>
-          </a:prstGeom>
-          <a:solidFill>
-            <a:srgbClr val="F7F5F2"/>
-          </a:solidFill>
-          <a:ln/>
-        </p:spPr>
-        <p:txBody>
-          <a:bodyPr/>
-          <a:lstStyle/>
-          <a:p>
-            <a:endParaRPr lang="zh-CN" altLang="en-US" sz="2400"/>
-          </a:p>
-        </p:txBody>
-      </p:sp>
       <p:pic>
         <p:nvPicPr>
-          <p:cNvPr id="10" name="Image 2" descr="preencoded.png"/>
+          <p:cNvPr id="18" name="Image 1" descr="preencoded.png">
+            <a:extLst>
+              <a:ext uri="{FF2B5EF4-FFF2-40B4-BE49-F238E27FC236}">
+                <a16:creationId xmlns:a16="http://schemas.microsoft.com/office/drawing/2014/main" id="{536FB93C-1049-8348-6E1A-E31E3E4916B5}"/>
+              </a:ext>
+            </a:extLst>
+          </p:cNvPr>
           <p:cNvPicPr>
             <a:picLocks noChangeAspect="1"/>
           </p:cNvPicPr>
           <p:nvPr/>
         </p:nvPicPr>
         <p:blipFill>
-          <a:blip r:embed="rId3"/>
-          <a:stretch>
-            <a:fillRect/>
-          </a:stretch>
+          <a:blip r:embed="rId4"/>
+          <a:srcRect/>
+          <a:stretch/>
         </p:blipFill>
         <p:spPr>
           <a:xfrm>
-            <a:off x="947319" y="4543959"/>
-            <a:ext cx="238963" cy="238963"/>
+            <a:off x="6755114" y="1215738"/>
+            <a:ext cx="5042807" cy="2990502"/>
           </a:xfrm>
           <a:prstGeom prst="rect">
             <a:avLst/>
           </a:prstGeom>
         </p:spPr>
       </p:pic>
-      <p:sp>
-        <p:nvSpPr>
-          <p:cNvPr id="11" name="Text 5"/>
-          <p:cNvSpPr/>
-          <p:nvPr/>
-        </p:nvSpPr>
-        <p:spPr>
-          <a:xfrm>
-            <a:off x="1463040" y="4450080"/>
-            <a:ext cx="9997440" cy="426720"/>
-          </a:xfrm>
-          <a:prstGeom prst="rect">
-            <a:avLst/>
-          </a:prstGeom>
-          <a:noFill/>
-          <a:ln/>
-        </p:spPr>
-        <p:txBody>
-          <a:bodyPr wrap="square" lIns="0" tIns="0" rIns="0" bIns="0" rtlCol="0" anchor="ctr"/>
-          <a:lstStyle/>
-          <a:p>
-            <a:r>
-              <a:rPr lang="en-US" sz="1467" dirty="0">
-                <a:solidFill>
-                  <a:srgbClr val="2B2B2B"/>
-                </a:solidFill>
-                <a:latin typeface="Calibri" pitchFamily="34" charset="0"/>
-                <a:ea typeface="Calibri" pitchFamily="34" charset="-122"/>
-                <a:cs typeface="Calibri" pitchFamily="34" charset="-120"/>
-              </a:rPr>
-              <a:t>HGB: Slightly higher accuracy (97.4%) + precision (0.87)</a:t>
-            </a:r>
-            <a:endParaRPr lang="en-US" sz="1467" dirty="0"/>
-          </a:p>
-        </p:txBody>
-      </p:sp>
-      <p:sp>
-        <p:nvSpPr>
-          <p:cNvPr id="5" name="Shape 6"/>
-          <p:cNvSpPr/>
-          <p:nvPr/>
-        </p:nvSpPr>
-        <p:spPr>
-          <a:xfrm>
-            <a:off x="853440" y="5120640"/>
-            <a:ext cx="426720" cy="426720"/>
-          </a:xfrm>
-          <a:prstGeom prst="ellipse">
-            <a:avLst/>
-          </a:prstGeom>
-          <a:solidFill>
-            <a:srgbClr val="F7F5F2"/>
-          </a:solidFill>
-          <a:ln/>
-        </p:spPr>
-        <p:txBody>
-          <a:bodyPr/>
-          <a:lstStyle/>
-          <a:p>
-            <a:endParaRPr lang="zh-CN" altLang="en-US" sz="2400"/>
-          </a:p>
-        </p:txBody>
-      </p:sp>
-      <p:pic>
-        <p:nvPicPr>
-          <p:cNvPr id="13" name="Image 3" descr="preencoded.png"/>
-          <p:cNvPicPr>
-            <a:picLocks noChangeAspect="1"/>
-          </p:cNvPicPr>
-          <p:nvPr/>
-        </p:nvPicPr>
-        <p:blipFill>
-          <a:blip r:embed="rId3"/>
-          <a:stretch>
-            <a:fillRect/>
-          </a:stretch>
-        </p:blipFill>
-        <p:spPr>
-          <a:xfrm>
-            <a:off x="947319" y="5214519"/>
-            <a:ext cx="238963" cy="238963"/>
-          </a:xfrm>
-          <a:prstGeom prst="rect">
-            <a:avLst/>
-          </a:prstGeom>
-        </p:spPr>
-      </p:pic>
-      <p:sp>
-        <p:nvSpPr>
-          <p:cNvPr id="14" name="Text 7"/>
-          <p:cNvSpPr/>
-          <p:nvPr/>
-        </p:nvSpPr>
-        <p:spPr>
-          <a:xfrm>
-            <a:off x="1463040" y="5120640"/>
-            <a:ext cx="9997440" cy="426720"/>
-          </a:xfrm>
-          <a:prstGeom prst="rect">
-            <a:avLst/>
-          </a:prstGeom>
-          <a:noFill/>
-          <a:ln/>
-        </p:spPr>
-        <p:txBody>
-          <a:bodyPr wrap="square" lIns="0" tIns="0" rIns="0" bIns="0" rtlCol="0" anchor="ctr"/>
-          <a:lstStyle/>
-          <a:p>
-            <a:r>
-              <a:rPr lang="en-US" sz="1467" dirty="0">
-                <a:solidFill>
-                  <a:srgbClr val="2B2B2B"/>
-                </a:solidFill>
-                <a:latin typeface="Calibri" pitchFamily="34" charset="0"/>
-                <a:ea typeface="Calibri" pitchFamily="34" charset="-122"/>
-                <a:cs typeface="Calibri" pitchFamily="34" charset="-120"/>
-              </a:rPr>
-              <a:t>RF: Better recall (0.81) — catches more events</a:t>
-            </a:r>
-            <a:endParaRPr lang="en-US" sz="1467" dirty="0"/>
-          </a:p>
-        </p:txBody>
-      </p:sp>
-      <p:sp>
-        <p:nvSpPr>
-          <p:cNvPr id="15" name="Shape 8"/>
-          <p:cNvSpPr/>
-          <p:nvPr/>
-        </p:nvSpPr>
-        <p:spPr>
-          <a:xfrm>
-            <a:off x="853440" y="5791200"/>
-            <a:ext cx="426720" cy="426720"/>
-          </a:xfrm>
-          <a:prstGeom prst="ellipse">
-            <a:avLst/>
-          </a:prstGeom>
-          <a:solidFill>
-            <a:srgbClr val="F7F5F2"/>
-          </a:solidFill>
-          <a:ln/>
-        </p:spPr>
-        <p:txBody>
-          <a:bodyPr/>
-          <a:lstStyle/>
-          <a:p>
-            <a:endParaRPr lang="zh-CN" altLang="en-US" sz="2400"/>
-          </a:p>
-        </p:txBody>
-      </p:sp>
-      <p:pic>
-        <p:nvPicPr>
-          <p:cNvPr id="16" name="Image 4" descr="preencoded.png"/>
-          <p:cNvPicPr>
-            <a:picLocks noChangeAspect="1"/>
-          </p:cNvPicPr>
-          <p:nvPr/>
-        </p:nvPicPr>
-        <p:blipFill>
-          <a:blip r:embed="rId3"/>
-          <a:stretch>
-            <a:fillRect/>
-          </a:stretch>
-        </p:blipFill>
-        <p:spPr>
-          <a:xfrm>
-            <a:off x="947319" y="5885079"/>
-            <a:ext cx="238963" cy="238963"/>
-          </a:xfrm>
-          <a:prstGeom prst="rect">
-            <a:avLst/>
-          </a:prstGeom>
-        </p:spPr>
-      </p:pic>
-      <p:sp>
-        <p:nvSpPr>
-          <p:cNvPr id="17" name="Text 9"/>
-          <p:cNvSpPr/>
-          <p:nvPr/>
-        </p:nvSpPr>
-        <p:spPr>
-          <a:xfrm>
-            <a:off x="1463040" y="5791200"/>
-            <a:ext cx="9997440" cy="426720"/>
-          </a:xfrm>
-          <a:prstGeom prst="rect">
-            <a:avLst/>
-          </a:prstGeom>
-          <a:noFill/>
-          <a:ln/>
-        </p:spPr>
-        <p:txBody>
-          <a:bodyPr wrap="square" lIns="0" tIns="0" rIns="0" bIns="0" rtlCol="0" anchor="ctr"/>
-          <a:lstStyle/>
-          <a:p>
-            <a:r>
-              <a:rPr lang="en-US" sz="1467" dirty="0">
-                <a:solidFill>
-                  <a:srgbClr val="2B2B2B"/>
-                </a:solidFill>
-                <a:latin typeface="Calibri" pitchFamily="34" charset="0"/>
-                <a:ea typeface="Calibri" pitchFamily="34" charset="-122"/>
-                <a:cs typeface="Calibri" pitchFamily="34" charset="-120"/>
-              </a:rPr>
-              <a:t>LogReg: Interpretable baseline but lower performance</a:t>
-            </a:r>
-            <a:endParaRPr lang="en-US" sz="1467" dirty="0"/>
-          </a:p>
-        </p:txBody>
-      </p:sp>
-      <p:sp>
-        <p:nvSpPr>
-          <p:cNvPr id="20" name="Slide Number Placeholder 19">
-            <a:extLst>
-              <a:ext uri="{FF2B5EF4-FFF2-40B4-BE49-F238E27FC236}">
-                <a16:creationId xmlns:a16="http://schemas.microsoft.com/office/drawing/2014/main" id="{F419DCCD-114A-09F7-BB5E-DAB596BF4399}"/>
-              </a:ext>
-            </a:extLst>
-          </p:cNvPr>
-          <p:cNvSpPr>
-            <a:spLocks noGrp="1"/>
-          </p:cNvSpPr>
-          <p:nvPr>
-            <p:ph type="sldNum" sz="quarter" idx="12"/>
-          </p:nvPr>
-        </p:nvSpPr>
-        <p:spPr/>
-        <p:txBody>
-          <a:bodyPr/>
-          <a:lstStyle/>
-          <a:p>
-            <a:fld id="{5C35FCF4-C3EF-BD43-82E0-05BC237DAD2A}" type="slidenum">
-              <a:rPr lang="en-US" smtClean="0"/>
-              <a:pPr/>
-              <a:t>11</a:t>
-            </a:fld>
-            <a:endParaRPr lang="en-US" dirty="0"/>
-          </a:p>
-        </p:txBody>
-      </p:sp>
     </p:spTree>
   </p:cSld>
   <p:clrMapOvr>
@@ -9765,7 +10673,7 @@
 </file>
 
 <file path=ppt/slides/slide12.xml><?xml version="1.0" encoding="utf-8"?>
-<p:sld xmlns:a="http://schemas.openxmlformats.org/drawingml/2006/main" xmlns:r="http://schemas.openxmlformats.org/officeDocument/2006/relationships" xmlns:p="http://schemas.openxmlformats.org/presentationml/2006/main">
+<p:sld xmlns:a="http://schemas.openxmlformats.org/drawingml/2006/main" xmlns:r="http://schemas.openxmlformats.org/officeDocument/2006/relationships" xmlns:p="http://schemas.openxmlformats.org/presentationml/2006/main" show="0">
   <p:cSld>
     <p:spTree>
       <p:nvGrpSpPr>
@@ -11795,8 +12703,8 @@
         </p:nvSpPr>
         <p:spPr>
           <a:xfrm>
-            <a:off x="609600" y="3901440"/>
-            <a:ext cx="10972800" cy="2560320"/>
+            <a:off x="609600" y="3435924"/>
+            <a:ext cx="10972800" cy="3025836"/>
           </a:xfrm>
           <a:prstGeom prst="rect">
             <a:avLst/>
@@ -11829,7 +12737,7 @@
         </p:nvSpPr>
         <p:spPr>
           <a:xfrm>
-            <a:off x="853440" y="4023360"/>
+            <a:off x="853440" y="3533742"/>
             <a:ext cx="10485120" cy="487680"/>
           </a:xfrm>
           <a:prstGeom prst="rect">
@@ -11873,8 +12781,8 @@
         </p:blipFill>
         <p:spPr>
           <a:xfrm>
-            <a:off x="975360" y="4718304"/>
-            <a:ext cx="341376" cy="341376"/>
+            <a:off x="925576" y="4130176"/>
+            <a:ext cx="319024" cy="329716"/>
           </a:xfrm>
           <a:prstGeom prst="rect">
             <a:avLst/>
@@ -11889,8 +12797,8 @@
         </p:nvSpPr>
         <p:spPr>
           <a:xfrm>
-            <a:off x="1463040" y="4693920"/>
-            <a:ext cx="9753600" cy="390144"/>
+            <a:off x="1463040" y="4021422"/>
+            <a:ext cx="9753600" cy="547224"/>
           </a:xfrm>
           <a:prstGeom prst="rect">
             <a:avLst/>
@@ -11903,7 +12811,7 @@
           <a:lstStyle/>
           <a:p>
             <a:r>
-              <a:rPr lang="en-US" sz="1467" dirty="0">
+              <a:rPr lang="en-US" sz="2000" dirty="0">
                 <a:solidFill>
                   <a:srgbClr val="2B2B2B"/>
                 </a:solidFill>
@@ -11913,7 +12821,7 @@
               </a:rPr>
               <a:t>Highest F1: 0.67 (best balance of precision and recall)</a:t>
             </a:r>
-            <a:endParaRPr lang="en-US" sz="1467" dirty="0"/>
+            <a:endParaRPr lang="en-US" sz="2000" dirty="0"/>
           </a:p>
         </p:txBody>
       </p:sp>
@@ -11933,8 +12841,8 @@
         </p:blipFill>
         <p:spPr>
           <a:xfrm>
-            <a:off x="975360" y="5145024"/>
-            <a:ext cx="341376" cy="341376"/>
+            <a:off x="925576" y="4728703"/>
+            <a:ext cx="319024" cy="329716"/>
           </a:xfrm>
           <a:prstGeom prst="rect">
             <a:avLst/>
@@ -11949,8 +12857,8 @@
         </p:nvSpPr>
         <p:spPr>
           <a:xfrm>
-            <a:off x="1463040" y="5120640"/>
-            <a:ext cx="9753600" cy="390144"/>
+            <a:off x="1463040" y="4619948"/>
+            <a:ext cx="9753600" cy="547224"/>
           </a:xfrm>
           <a:prstGeom prst="rect">
             <a:avLst/>
@@ -11963,7 +12871,7 @@
           <a:lstStyle/>
           <a:p>
             <a:r>
-              <a:rPr lang="en-US" sz="1467" dirty="0">
+              <a:rPr lang="en-US" sz="2000" dirty="0">
                 <a:solidFill>
                   <a:srgbClr val="2B2B2B"/>
                 </a:solidFill>
@@ -11973,7 +12881,7 @@
               </a:rPr>
               <a:t>Highest Precision: 0.88 (minimize false alarms for public health)</a:t>
             </a:r>
-            <a:endParaRPr lang="en-US" sz="1467" dirty="0"/>
+            <a:endParaRPr lang="en-US" sz="2000" dirty="0"/>
           </a:p>
         </p:txBody>
       </p:sp>
@@ -11993,8 +12901,8 @@
         </p:blipFill>
         <p:spPr>
           <a:xfrm>
-            <a:off x="975360" y="5571744"/>
-            <a:ext cx="341376" cy="341376"/>
+            <a:off x="925576" y="5327229"/>
+            <a:ext cx="319024" cy="329716"/>
           </a:xfrm>
           <a:prstGeom prst="rect">
             <a:avLst/>
@@ -12009,8 +12917,8 @@
         </p:nvSpPr>
         <p:spPr>
           <a:xfrm>
-            <a:off x="1463040" y="5547360"/>
-            <a:ext cx="9753600" cy="390144"/>
+            <a:off x="1463040" y="5218474"/>
+            <a:ext cx="9753600" cy="547224"/>
           </a:xfrm>
           <a:prstGeom prst="rect">
             <a:avLst/>
@@ -12023,7 +12931,7 @@
           <a:lstStyle/>
           <a:p>
             <a:r>
-              <a:rPr lang="en-US" sz="1467" dirty="0">
+              <a:rPr lang="en-US" sz="2000" dirty="0">
                 <a:solidFill>
                   <a:srgbClr val="2B2B2B"/>
                 </a:solidFill>
@@ -12033,7 +12941,7 @@
               </a:rPr>
               <a:t>ROC-AUC: 0.94 (strong discrimination high/low pollution)</a:t>
             </a:r>
-            <a:endParaRPr lang="en-US" sz="1467" dirty="0"/>
+            <a:endParaRPr lang="en-US" sz="2000" dirty="0"/>
           </a:p>
         </p:txBody>
       </p:sp>
@@ -12053,8 +12961,8 @@
         </p:blipFill>
         <p:spPr>
           <a:xfrm>
-            <a:off x="975360" y="5998464"/>
-            <a:ext cx="341376" cy="341376"/>
+            <a:off x="925576" y="5925755"/>
+            <a:ext cx="319024" cy="329716"/>
           </a:xfrm>
           <a:prstGeom prst="rect">
             <a:avLst/>
@@ -12069,8 +12977,8 @@
         </p:nvSpPr>
         <p:spPr>
           <a:xfrm>
-            <a:off x="1463040" y="5974080"/>
-            <a:ext cx="9753600" cy="390144"/>
+            <a:off x="1463040" y="5817000"/>
+            <a:ext cx="9753600" cy="547224"/>
           </a:xfrm>
           <a:prstGeom prst="rect">
             <a:avLst/>
@@ -12083,7 +12991,7 @@
           <a:lstStyle/>
           <a:p>
             <a:r>
-              <a:rPr lang="en-US" sz="1467" dirty="0">
+              <a:rPr lang="en-US" sz="2000" dirty="0">
                 <a:solidFill>
                   <a:srgbClr val="2B2B2B"/>
                 </a:solidFill>
@@ -12093,7 +13001,7 @@
               </a:rPr>
               <a:t>Test F1 Improvement: 0.35 → 0.67 (+92% from baseline)</a:t>
             </a:r>
-            <a:endParaRPr lang="en-US" sz="1467" dirty="0"/>
+            <a:endParaRPr lang="en-US" sz="2000" dirty="0"/>
           </a:p>
         </p:txBody>
       </p:sp>
@@ -12136,7 +13044,7 @@
 </file>
 
 <file path=ppt/slides/slide13.xml><?xml version="1.0" encoding="utf-8"?>
-<p:sld xmlns:a="http://schemas.openxmlformats.org/drawingml/2006/main" xmlns:r="http://schemas.openxmlformats.org/officeDocument/2006/relationships" xmlns:p="http://schemas.openxmlformats.org/presentationml/2006/main">
+<p:sld xmlns:a="http://schemas.openxmlformats.org/drawingml/2006/main" xmlns:r="http://schemas.openxmlformats.org/officeDocument/2006/relationships" xmlns:p="http://schemas.openxmlformats.org/presentationml/2006/main" show="0">
   <p:cSld>
     <p:spTree>
       <p:nvGrpSpPr>
@@ -16904,7 +17812,7 @@
                 <a:ea typeface="Calibri" pitchFamily="34" charset="-122"/>
                 <a:cs typeface="Calibri" pitchFamily="34" charset="-120"/>
               </a:rPr>
-              <a:t>1 year of training data</a:t>
+              <a:t>6 year of training data</a:t>
             </a:r>
             <a:endParaRPr lang="en-US" sz="1333" dirty="0"/>
           </a:p>
@@ -17009,154 +17917,8 @@
                 <a:ea typeface="Calibri" pitchFamily="34" charset="-122"/>
                 <a:cs typeface="Calibri" pitchFamily="34" charset="-120"/>
               </a:rPr>
-              <a:t>Crisis Context: July 2024 PM2.5 Surge</a:t>
-            </a:r>
-            <a:endParaRPr lang="en-US" sz="2933" dirty="0"/>
-          </a:p>
-        </p:txBody>
-      </p:sp>
-      <p:sp>
-        <p:nvSpPr>
-          <p:cNvPr id="5" name="Shape 2"/>
-          <p:cNvSpPr/>
-          <p:nvPr/>
-        </p:nvSpPr>
-        <p:spPr>
-          <a:xfrm>
-            <a:off x="731520" y="1463040"/>
-            <a:ext cx="4389120" cy="2926080"/>
-          </a:xfrm>
-          <a:prstGeom prst="rect">
-            <a:avLst/>
-          </a:prstGeom>
-          <a:solidFill>
-            <a:srgbClr val="EE2C2A"/>
-          </a:solidFill>
-          <a:ln/>
-          <a:effectLst>
-            <a:outerShdw blurRad="50800" dist="25400" dir="8100000" algn="bl" rotWithShape="0">
-              <a:srgbClr val="000000">
-                <a:alpha val="10000"/>
-              </a:srgbClr>
-            </a:outerShdw>
-          </a:effectLst>
-        </p:spPr>
-        <p:txBody>
-          <a:bodyPr/>
-          <a:lstStyle/>
-          <a:p>
-            <a:endParaRPr lang="zh-CN" altLang="en-US" sz="2400"/>
-          </a:p>
-        </p:txBody>
-      </p:sp>
-      <p:sp>
-        <p:nvSpPr>
-          <p:cNvPr id="6" name="Text 3"/>
-          <p:cNvSpPr/>
-          <p:nvPr/>
-        </p:nvSpPr>
-        <p:spPr>
-          <a:xfrm>
-            <a:off x="731520" y="1463040"/>
-            <a:ext cx="4389120" cy="1706880"/>
-          </a:xfrm>
-          <a:prstGeom prst="rect">
-            <a:avLst/>
-          </a:prstGeom>
-          <a:noFill/>
-          <a:ln/>
-        </p:spPr>
-        <p:txBody>
-          <a:bodyPr wrap="square" lIns="0" tIns="0" rIns="0" bIns="0" rtlCol="0" anchor="b"/>
-          <a:lstStyle/>
-          <a:p>
-            <a:pPr algn="ctr"/>
-            <a:r>
-              <a:rPr lang="en-US" sz="9600" b="1" dirty="0">
-                <a:solidFill>
-                  <a:srgbClr val="FFFFFF"/>
-                </a:solidFill>
-                <a:latin typeface="Calibri" pitchFamily="34" charset="0"/>
-                <a:ea typeface="Calibri" pitchFamily="34" charset="-122"/>
-                <a:cs typeface="Calibri" pitchFamily="34" charset="-120"/>
-              </a:rPr>
-              <a:t>134</a:t>
-            </a:r>
-            <a:endParaRPr lang="en-US" sz="9600" dirty="0"/>
-          </a:p>
-        </p:txBody>
-      </p:sp>
-      <p:sp>
-        <p:nvSpPr>
-          <p:cNvPr id="7" name="Text 4"/>
-          <p:cNvSpPr/>
-          <p:nvPr/>
-        </p:nvSpPr>
-        <p:spPr>
-          <a:xfrm>
-            <a:off x="731520" y="3048000"/>
-            <a:ext cx="4389120" cy="609600"/>
-          </a:xfrm>
-          <a:prstGeom prst="rect">
-            <a:avLst/>
-          </a:prstGeom>
-          <a:noFill/>
-          <a:ln/>
-        </p:spPr>
-        <p:txBody>
-          <a:bodyPr wrap="square" rtlCol="0" anchor="ctr"/>
-          <a:lstStyle/>
-          <a:p>
-            <a:pPr algn="ctr"/>
-            <a:r>
-              <a:rPr lang="en-US" sz="1867" dirty="0">
-                <a:solidFill>
-                  <a:srgbClr val="FFFFFF"/>
-                </a:solidFill>
-                <a:latin typeface="Calibri" pitchFamily="34" charset="0"/>
-                <a:ea typeface="Calibri" pitchFamily="34" charset="-122"/>
-                <a:cs typeface="Calibri" pitchFamily="34" charset="-120"/>
-              </a:rPr>
-              <a:t>PM2.5 µg/m³ peak</a:t>
-            </a:r>
-            <a:endParaRPr lang="en-US" sz="1867" dirty="0"/>
-          </a:p>
-        </p:txBody>
-      </p:sp>
-      <p:sp>
-        <p:nvSpPr>
-          <p:cNvPr id="8" name="Text 5"/>
-          <p:cNvSpPr/>
-          <p:nvPr/>
-        </p:nvSpPr>
-        <p:spPr>
-          <a:xfrm>
-            <a:off x="731520" y="3535680"/>
-            <a:ext cx="4389120" cy="487680"/>
-          </a:xfrm>
-          <a:prstGeom prst="rect">
-            <a:avLst/>
-          </a:prstGeom>
-          <a:noFill/>
-          <a:ln/>
-        </p:spPr>
-        <p:txBody>
-          <a:bodyPr wrap="square" rtlCol="0" anchor="ctr"/>
-          <a:lstStyle/>
-          <a:p>
-            <a:pPr algn="ctr"/>
-            <a:r>
-              <a:rPr lang="en-US" sz="1733" b="1" dirty="0">
-                <a:solidFill>
-                  <a:srgbClr val="FFCD00"/>
-                </a:solidFill>
-                <a:latin typeface="Calibri" pitchFamily="34" charset="0"/>
-                <a:ea typeface="Calibri" pitchFamily="34" charset="-122"/>
-                <a:cs typeface="Calibri" pitchFamily="34" charset="-120"/>
-              </a:rPr>
-              <a:t>6× WHO guideline</a:t>
-            </a:r>
-            <a:endParaRPr lang="en-US" sz="1733" dirty="0"/>
+              <a:t>Why Does This Matter?</a:t>
+            </a:r>
           </a:p>
         </p:txBody>
       </p:sp>
@@ -17168,7 +17930,7 @@
         </p:nvSpPr>
         <p:spPr>
           <a:xfrm>
-            <a:off x="5730240" y="1584960"/>
+            <a:off x="731520" y="1661455"/>
             <a:ext cx="609600" cy="609600"/>
           </a:xfrm>
           <a:prstGeom prst="ellipse">
@@ -17203,7 +17965,7 @@
         </p:blipFill>
         <p:spPr>
           <a:xfrm>
-            <a:off x="5864352" y="1719072"/>
+            <a:off x="865632" y="1795567"/>
             <a:ext cx="341376" cy="341376"/>
           </a:xfrm>
           <a:prstGeom prst="rect">
@@ -17219,7 +17981,7 @@
         </p:nvSpPr>
         <p:spPr>
           <a:xfrm>
-            <a:off x="6522720" y="1584960"/>
+            <a:off x="1524000" y="1661455"/>
             <a:ext cx="4876800" cy="341376"/>
           </a:xfrm>
           <a:prstGeom prst="rect">
@@ -17255,7 +18017,7 @@
         </p:nvSpPr>
         <p:spPr>
           <a:xfrm>
-            <a:off x="6522720" y="1901952"/>
+            <a:off x="1524000" y="1978447"/>
             <a:ext cx="4876800" cy="341376"/>
           </a:xfrm>
           <a:prstGeom prst="rect">
@@ -17291,7 +18053,7 @@
         </p:nvSpPr>
         <p:spPr>
           <a:xfrm>
-            <a:off x="5730240" y="2621280"/>
+            <a:off x="731520" y="2697775"/>
             <a:ext cx="609600" cy="609600"/>
           </a:xfrm>
           <a:prstGeom prst="ellipse">
@@ -17326,7 +18088,7 @@
         </p:blipFill>
         <p:spPr>
           <a:xfrm>
-            <a:off x="5864352" y="2755392"/>
+            <a:off x="865632" y="2831887"/>
             <a:ext cx="341376" cy="341376"/>
           </a:xfrm>
           <a:prstGeom prst="rect">
@@ -17342,7 +18104,7 @@
         </p:nvSpPr>
         <p:spPr>
           <a:xfrm>
-            <a:off x="6522720" y="2621280"/>
+            <a:off x="1524000" y="2697775"/>
             <a:ext cx="4876800" cy="341376"/>
           </a:xfrm>
           <a:prstGeom prst="rect">
@@ -17378,7 +18140,7 @@
         </p:nvSpPr>
         <p:spPr>
           <a:xfrm>
-            <a:off x="6522720" y="2938272"/>
+            <a:off x="1524000" y="3014767"/>
             <a:ext cx="4876800" cy="341376"/>
           </a:xfrm>
           <a:prstGeom prst="rect">
@@ -17414,7 +18176,7 @@
         </p:nvSpPr>
         <p:spPr>
           <a:xfrm>
-            <a:off x="5730240" y="3657600"/>
+            <a:off x="731520" y="3734095"/>
             <a:ext cx="609600" cy="609600"/>
           </a:xfrm>
           <a:prstGeom prst="ellipse">
@@ -17449,7 +18211,7 @@
         </p:blipFill>
         <p:spPr>
           <a:xfrm>
-            <a:off x="5864352" y="3791712"/>
+            <a:off x="865632" y="3868207"/>
             <a:ext cx="341376" cy="341376"/>
           </a:xfrm>
           <a:prstGeom prst="rect">
@@ -17465,7 +18227,7 @@
         </p:nvSpPr>
         <p:spPr>
           <a:xfrm>
-            <a:off x="6522720" y="3657600"/>
+            <a:off x="1524000" y="3734095"/>
             <a:ext cx="4876800" cy="341376"/>
           </a:xfrm>
           <a:prstGeom prst="rect">
@@ -17501,7 +18263,7 @@
         </p:nvSpPr>
         <p:spPr>
           <a:xfrm>
-            <a:off x="6522720" y="3974592"/>
+            <a:off x="1524000" y="4051087"/>
             <a:ext cx="4876800" cy="341376"/>
           </a:xfrm>
           <a:prstGeom prst="rect">
@@ -17526,114 +18288,6 @@
               <a:t>No operational ML-based early warning</a:t>
             </a:r>
             <a:endParaRPr lang="en-US" sz="1467" dirty="0"/>
-          </a:p>
-        </p:txBody>
-      </p:sp>
-      <p:sp>
-        <p:nvSpPr>
-          <p:cNvPr id="21" name="Shape 15"/>
-          <p:cNvSpPr/>
-          <p:nvPr/>
-        </p:nvSpPr>
-        <p:spPr>
-          <a:xfrm>
-            <a:off x="731520" y="4876800"/>
-            <a:ext cx="10728960" cy="1097280"/>
-          </a:xfrm>
-          <a:prstGeom prst="rect">
-            <a:avLst/>
-          </a:prstGeom>
-          <a:solidFill>
-            <a:srgbClr val="FFF8E1"/>
-          </a:solidFill>
-          <a:ln/>
-          <a:effectLst>
-            <a:outerShdw blurRad="50800" dist="25400" dir="8100000" algn="bl" rotWithShape="0">
-              <a:srgbClr val="000000">
-                <a:alpha val="10000"/>
-              </a:srgbClr>
-            </a:outerShdw>
-          </a:effectLst>
-        </p:spPr>
-        <p:txBody>
-          <a:bodyPr/>
-          <a:lstStyle/>
-          <a:p>
-            <a:endParaRPr lang="zh-CN" altLang="en-US" sz="2400"/>
-          </a:p>
-        </p:txBody>
-      </p:sp>
-      <p:sp>
-        <p:nvSpPr>
-          <p:cNvPr id="22" name="Shape 16"/>
-          <p:cNvSpPr/>
-          <p:nvPr/>
-        </p:nvSpPr>
-        <p:spPr>
-          <a:xfrm>
-            <a:off x="731520" y="4876800"/>
-            <a:ext cx="73152" cy="1097280"/>
-          </a:xfrm>
-          <a:prstGeom prst="rect">
-            <a:avLst/>
-          </a:prstGeom>
-          <a:solidFill>
-            <a:srgbClr val="FFA300"/>
-          </a:solidFill>
-          <a:ln/>
-        </p:spPr>
-        <p:txBody>
-          <a:bodyPr/>
-          <a:lstStyle/>
-          <a:p>
-            <a:endParaRPr lang="zh-CN" altLang="en-US" sz="2400"/>
-          </a:p>
-        </p:txBody>
-      </p:sp>
-      <p:sp>
-        <p:nvSpPr>
-          <p:cNvPr id="23" name="Text 17"/>
-          <p:cNvSpPr/>
-          <p:nvPr/>
-        </p:nvSpPr>
-        <p:spPr>
-          <a:xfrm>
-            <a:off x="1097280" y="4876800"/>
-            <a:ext cx="10119360" cy="1097280"/>
-          </a:xfrm>
-          <a:prstGeom prst="rect">
-            <a:avLst/>
-          </a:prstGeom>
-          <a:noFill/>
-          <a:ln/>
-        </p:spPr>
-        <p:txBody>
-          <a:bodyPr wrap="square" rtlCol="0" anchor="ctr"/>
-          <a:lstStyle/>
-          <a:p>
-            <a:r>
-              <a:rPr lang="en-US" sz="1733" b="1" dirty="0">
-                <a:solidFill>
-                  <a:srgbClr val="2B2B2B"/>
-                </a:solidFill>
-                <a:latin typeface="Calibri" pitchFamily="34" charset="0"/>
-                <a:ea typeface="Calibri" pitchFamily="34" charset="-122"/>
-                <a:cs typeface="Calibri" pitchFamily="34" charset="-120"/>
-              </a:rPr>
-              <a:t>Research Question: </a:t>
-            </a:r>
-            <a:r>
-              <a:rPr lang="en-US" sz="1733" dirty="0">
-                <a:solidFill>
-                  <a:srgbClr val="555555"/>
-                </a:solidFill>
-                <a:latin typeface="Calibri" pitchFamily="34" charset="0"/>
-                <a:ea typeface="Calibri" pitchFamily="34" charset="-122"/>
-                <a:cs typeface="Calibri" pitchFamily="34" charset="-120"/>
-              </a:rPr>
-              <a:t>Can we predict high PM2.5 days 1-2 days in advance using environmental data?</a:t>
-            </a:r>
-            <a:endParaRPr lang="en-US" sz="1733" dirty="0"/>
           </a:p>
         </p:txBody>
       </p:sp>
@@ -17664,6 +18318,260 @@
               <a:t>2</a:t>
             </a:fld>
             <a:endParaRPr lang="en-US" dirty="0"/>
+          </a:p>
+        </p:txBody>
+      </p:sp>
+      <p:grpSp>
+        <p:nvGrpSpPr>
+          <p:cNvPr id="24" name="Group 23">
+            <a:extLst>
+              <a:ext uri="{FF2B5EF4-FFF2-40B4-BE49-F238E27FC236}">
+                <a16:creationId xmlns:a16="http://schemas.microsoft.com/office/drawing/2014/main" id="{FD602332-B8F3-9F1E-0D73-442176C5FE9D}"/>
+              </a:ext>
+            </a:extLst>
+          </p:cNvPr>
+          <p:cNvGrpSpPr/>
+          <p:nvPr/>
+        </p:nvGrpSpPr>
+        <p:grpSpPr>
+          <a:xfrm>
+            <a:off x="6200775" y="1599572"/>
+            <a:ext cx="5991225" cy="4272456"/>
+            <a:chOff x="6393450" y="1599572"/>
+            <a:chExt cx="5798550" cy="3950436"/>
+          </a:xfrm>
+        </p:grpSpPr>
+        <p:pic>
+          <p:nvPicPr>
+            <p:cNvPr id="2" name="Image 0" descr="preencoded.png">
+              <a:extLst>
+                <a:ext uri="{FF2B5EF4-FFF2-40B4-BE49-F238E27FC236}">
+                  <a16:creationId xmlns:a16="http://schemas.microsoft.com/office/drawing/2014/main" id="{975B6621-DEDA-5301-BF21-7440F16BF2CE}"/>
+                </a:ext>
+              </a:extLst>
+            </p:cNvPr>
+            <p:cNvPicPr>
+              <a:picLocks noChangeAspect="1"/>
+            </p:cNvPicPr>
+            <p:nvPr/>
+          </p:nvPicPr>
+          <p:blipFill>
+            <a:blip r:embed="rId6"/>
+            <a:srcRect l="1145" t="1733" r="3752"/>
+            <a:stretch>
+              <a:fillRect/>
+            </a:stretch>
+          </p:blipFill>
+          <p:spPr>
+            <a:xfrm>
+              <a:off x="6393450" y="1599572"/>
+              <a:ext cx="5798550" cy="3950436"/>
+            </a:xfrm>
+            <a:prstGeom prst="rect">
+              <a:avLst/>
+            </a:prstGeom>
+          </p:spPr>
+        </p:pic>
+        <p:sp>
+          <p:nvSpPr>
+            <p:cNvPr id="6" name="Text 3"/>
+            <p:cNvSpPr/>
+            <p:nvPr/>
+          </p:nvSpPr>
+          <p:spPr>
+            <a:xfrm>
+              <a:off x="7103744" y="1894521"/>
+              <a:ext cx="4389120" cy="1706880"/>
+            </a:xfrm>
+            <a:prstGeom prst="rect">
+              <a:avLst/>
+            </a:prstGeom>
+            <a:noFill/>
+            <a:ln/>
+          </p:spPr>
+          <p:txBody>
+            <a:bodyPr wrap="square" lIns="0" tIns="0" rIns="0" bIns="0" rtlCol="0" anchor="b"/>
+            <a:lstStyle/>
+            <a:p>
+              <a:pPr algn="ctr"/>
+              <a:r>
+                <a:rPr lang="en-US" sz="9600" b="1" dirty="0">
+                  <a:solidFill>
+                    <a:srgbClr val="FFFFFF"/>
+                  </a:solidFill>
+                  <a:latin typeface="Calibri" pitchFamily="34" charset="0"/>
+                  <a:ea typeface="Calibri" pitchFamily="34" charset="-122"/>
+                  <a:cs typeface="Calibri" pitchFamily="34" charset="-120"/>
+                </a:rPr>
+                <a:t>134</a:t>
+              </a:r>
+              <a:endParaRPr lang="en-US" sz="9600" dirty="0"/>
+            </a:p>
+          </p:txBody>
+        </p:sp>
+        <p:sp>
+          <p:nvSpPr>
+            <p:cNvPr id="7" name="Text 4"/>
+            <p:cNvSpPr/>
+            <p:nvPr/>
+          </p:nvSpPr>
+          <p:spPr>
+            <a:xfrm>
+              <a:off x="7103744" y="3479481"/>
+              <a:ext cx="4389120" cy="609600"/>
+            </a:xfrm>
+            <a:prstGeom prst="rect">
+              <a:avLst/>
+            </a:prstGeom>
+            <a:noFill/>
+            <a:ln/>
+          </p:spPr>
+          <p:txBody>
+            <a:bodyPr wrap="square" rtlCol="0" anchor="ctr"/>
+            <a:lstStyle/>
+            <a:p>
+              <a:pPr algn="ctr"/>
+              <a:r>
+                <a:rPr lang="en-US" sz="1867" dirty="0">
+                  <a:solidFill>
+                    <a:srgbClr val="FFFFFF"/>
+                  </a:solidFill>
+                  <a:latin typeface="Calibri" pitchFamily="34" charset="0"/>
+                  <a:ea typeface="Calibri" pitchFamily="34" charset="-122"/>
+                  <a:cs typeface="Calibri" pitchFamily="34" charset="-120"/>
+                </a:rPr>
+                <a:t>PM2.5 µg/m³ peak</a:t>
+              </a:r>
+              <a:endParaRPr lang="en-US" sz="1867" dirty="0"/>
+            </a:p>
+          </p:txBody>
+        </p:sp>
+        <p:sp>
+          <p:nvSpPr>
+            <p:cNvPr id="8" name="Text 5"/>
+            <p:cNvSpPr/>
+            <p:nvPr/>
+          </p:nvSpPr>
+          <p:spPr>
+            <a:xfrm>
+              <a:off x="7103744" y="3967161"/>
+              <a:ext cx="4389120" cy="487680"/>
+            </a:xfrm>
+            <a:prstGeom prst="rect">
+              <a:avLst/>
+            </a:prstGeom>
+            <a:noFill/>
+            <a:ln/>
+          </p:spPr>
+          <p:txBody>
+            <a:bodyPr wrap="square" rtlCol="0" anchor="ctr"/>
+            <a:lstStyle/>
+            <a:p>
+              <a:pPr algn="ctr"/>
+              <a:r>
+                <a:rPr lang="en-US" sz="1733" b="1" dirty="0">
+                  <a:solidFill>
+                    <a:schemeClr val="bg1"/>
+                  </a:solidFill>
+                  <a:latin typeface="Calibri" pitchFamily="34" charset="0"/>
+                  <a:ea typeface="Calibri" pitchFamily="34" charset="-122"/>
+                  <a:cs typeface="Calibri" pitchFamily="34" charset="-120"/>
+                </a:rPr>
+                <a:t>6× WHO guideline</a:t>
+              </a:r>
+              <a:endParaRPr lang="en-US" sz="1733" dirty="0">
+                <a:solidFill>
+                  <a:schemeClr val="bg1"/>
+                </a:solidFill>
+              </a:endParaRPr>
+            </a:p>
+          </p:txBody>
+        </p:sp>
+        <p:sp>
+          <p:nvSpPr>
+            <p:cNvPr id="4" name="Text 5">
+              <a:extLst>
+                <a:ext uri="{FF2B5EF4-FFF2-40B4-BE49-F238E27FC236}">
+                  <a16:creationId xmlns:a16="http://schemas.microsoft.com/office/drawing/2014/main" id="{00358996-F12C-7A6B-362C-03553E3E4C8E}"/>
+                </a:ext>
+              </a:extLst>
+            </p:cNvPr>
+            <p:cNvSpPr/>
+            <p:nvPr/>
+          </p:nvSpPr>
+          <p:spPr>
+            <a:xfrm>
+              <a:off x="7103744" y="4418050"/>
+              <a:ext cx="4389120" cy="487680"/>
+            </a:xfrm>
+            <a:prstGeom prst="rect">
+              <a:avLst/>
+            </a:prstGeom>
+            <a:noFill/>
+            <a:ln/>
+          </p:spPr>
+          <p:txBody>
+            <a:bodyPr wrap="square" rtlCol="0" anchor="ctr"/>
+            <a:lstStyle/>
+            <a:p>
+              <a:pPr algn="ctr"/>
+              <a:r>
+                <a:rPr lang="en-US" sz="1733" b="1" dirty="0">
+                  <a:solidFill>
+                    <a:schemeClr val="bg1"/>
+                  </a:solidFill>
+                  <a:latin typeface="Calibri" pitchFamily="34" charset="0"/>
+                  <a:ea typeface="Calibri" pitchFamily="34" charset="-122"/>
+                  <a:cs typeface="Calibri" pitchFamily="34" charset="-120"/>
+                </a:rPr>
+                <a:t>July 24, 2024 — BC wildfires smoke</a:t>
+              </a:r>
+            </a:p>
+          </p:txBody>
+        </p:sp>
+      </p:grpSp>
+      <p:sp>
+        <p:nvSpPr>
+          <p:cNvPr id="23" name="Text 17"/>
+          <p:cNvSpPr/>
+          <p:nvPr/>
+        </p:nvSpPr>
+        <p:spPr>
+          <a:xfrm>
+            <a:off x="731521" y="4774748"/>
+            <a:ext cx="5189260" cy="1097280"/>
+          </a:xfrm>
+          <a:prstGeom prst="rect">
+            <a:avLst/>
+          </a:prstGeom>
+          <a:solidFill>
+            <a:schemeClr val="accent2">
+              <a:lumMod val="20000"/>
+              <a:lumOff val="80000"/>
+            </a:schemeClr>
+          </a:solidFill>
+          <a:ln/>
+        </p:spPr>
+        <p:txBody>
+          <a:bodyPr wrap="square" rtlCol="0" anchor="ctr"/>
+          <a:lstStyle/>
+          <a:p>
+            <a:r>
+              <a:rPr lang="en-US" sz="2000" b="1" dirty="0">
+                <a:solidFill>
+                  <a:srgbClr val="FF671F"/>
+                </a:solidFill>
+                <a:ea typeface="Verdana" panose="020B0604030504040204" pitchFamily="34" charset="0"/>
+                <a:cs typeface="Calibri" pitchFamily="34" charset="-120"/>
+              </a:rPr>
+              <a:t>Question is: Can we predict high PM2.5 days 1-2 days in advance using environmental data?</a:t>
+            </a:r>
+            <a:endParaRPr lang="en-US" sz="2000" b="1" dirty="0">
+              <a:solidFill>
+                <a:srgbClr val="FF671F"/>
+              </a:solidFill>
+              <a:ea typeface="Verdana" panose="020B0604030504040204" pitchFamily="34" charset="0"/>
+            </a:endParaRPr>
           </a:p>
         </p:txBody>
       </p:sp>
@@ -21254,7 +22162,7 @@
           <a:p>
             <a:pPr algn="ctr"/>
             <a:r>
-              <a:rPr lang="en-US" sz="1333" dirty="0">
+              <a:rPr lang="en-US" sz="1400" dirty="0">
                 <a:solidFill>
                   <a:srgbClr val="FFFFFF"/>
                 </a:solidFill>
@@ -21264,12 +22172,12 @@
               </a:rPr>
               <a:t>MODIS Active Fires</a:t>
             </a:r>
-            <a:endParaRPr lang="en-US" sz="1333" dirty="0"/>
+            <a:endParaRPr lang="en-US" sz="1400" dirty="0"/>
           </a:p>
           <a:p>
             <a:pPr algn="ctr"/>
             <a:r>
-              <a:rPr lang="en-US" sz="1333" dirty="0">
+              <a:rPr lang="en-US" sz="1400" dirty="0">
                 <a:solidFill>
                   <a:srgbClr val="FFFFFF"/>
                 </a:solidFill>
@@ -21279,7 +22187,7 @@
               </a:rPr>
               <a:t>(NASA FIRMS)</a:t>
             </a:r>
-            <a:endParaRPr lang="en-US" sz="1333" dirty="0"/>
+            <a:endParaRPr lang="en-US" sz="1400" dirty="0"/>
           </a:p>
         </p:txBody>
       </p:sp>
@@ -21406,7 +22314,7 @@
                 <a:ea typeface="Calibri" pitchFamily="34" charset="-122"/>
                 <a:cs typeface="Calibri" pitchFamily="34" charset="-120"/>
               </a:rPr>
-              <a:t>Atmosphere</a:t>
+              <a:t>Atmosphere Transport</a:t>
             </a:r>
             <a:endParaRPr lang="en-US" sz="1600" dirty="0"/>
           </a:p>
@@ -21435,32 +22343,18 @@
           <a:p>
             <a:pPr algn="ctr"/>
             <a:r>
-              <a:rPr lang="en-US" sz="1333" dirty="0">
+              <a:rPr lang="en-US" altLang="zh-CN" sz="1400" dirty="0">
                 <a:solidFill>
-                  <a:srgbClr val="FFFFFF"/>
+                  <a:schemeClr val="bg1"/>
                 </a:solidFill>
-                <a:latin typeface="Calibri" pitchFamily="34" charset="0"/>
-                <a:ea typeface="Calibri" pitchFamily="34" charset="-122"/>
-                <a:cs typeface="Calibri" pitchFamily="34" charset="-120"/>
               </a:rPr>
-              <a:t>ERA5 Meteorology</a:t>
-            </a:r>
-            <a:endParaRPr lang="en-US" sz="1333" dirty="0"/>
-          </a:p>
-          <a:p>
-            <a:pPr algn="ctr"/>
-            <a:r>
-              <a:rPr lang="en-US" sz="1333" dirty="0">
-                <a:solidFill>
-                  <a:srgbClr val="FFFFFF"/>
-                </a:solidFill>
-                <a:latin typeface="Calibri" pitchFamily="34" charset="0"/>
-                <a:ea typeface="Calibri" pitchFamily="34" charset="-122"/>
-                <a:cs typeface="Calibri" pitchFamily="34" charset="-120"/>
-              </a:rPr>
-              <a:t>(Copernicus)</a:t>
-            </a:r>
-            <a:endParaRPr lang="en-US" sz="1333" dirty="0"/>
+              <a:t>ERA5 Reanalysis + Environment Canada Hourly Weather</a:t>
+            </a:r>
+            <a:endParaRPr lang="en-US" sz="1400" dirty="0">
+              <a:solidFill>
+                <a:schemeClr val="bg1"/>
+              </a:solidFill>
+            </a:endParaRPr>
           </a:p>
         </p:txBody>
       </p:sp>
@@ -21587,7 +22481,7 @@
                 <a:ea typeface="Calibri" pitchFamily="34" charset="-122"/>
                 <a:cs typeface="Calibri" pitchFamily="34" charset="-120"/>
               </a:rPr>
-              <a:t>Smoke Signal</a:t>
+              <a:t>Feature Integration</a:t>
             </a:r>
             <a:endParaRPr lang="en-US" sz="1600" dirty="0"/>
           </a:p>
@@ -21616,7 +22510,7 @@
           <a:p>
             <a:pPr algn="ctr"/>
             <a:r>
-              <a:rPr lang="en-US" sz="1333" dirty="0">
+              <a:rPr lang="en-US" sz="1400" dirty="0">
                 <a:solidFill>
                   <a:srgbClr val="FFFFFF"/>
                 </a:solidFill>
@@ -21624,24 +22518,9 @@
                 <a:ea typeface="Calibri" pitchFamily="34" charset="-122"/>
                 <a:cs typeface="Calibri" pitchFamily="34" charset="-120"/>
               </a:rPr>
-              <a:t>Sentinel-5P Aerosols</a:t>
-            </a:r>
-            <a:endParaRPr lang="en-US" sz="1333" dirty="0"/>
-          </a:p>
-          <a:p>
-            <a:pPr algn="ctr"/>
-            <a:r>
-              <a:rPr lang="en-US" sz="1333" dirty="0">
-                <a:solidFill>
-                  <a:srgbClr val="FFFFFF"/>
-                </a:solidFill>
-                <a:latin typeface="Calibri" pitchFamily="34" charset="0"/>
-                <a:ea typeface="Calibri" pitchFamily="34" charset="-122"/>
-                <a:cs typeface="Calibri" pitchFamily="34" charset="-120"/>
-              </a:rPr>
-              <a:t>(ESA)</a:t>
-            </a:r>
-            <a:endParaRPr lang="en-US" sz="1333" dirty="0"/>
+              <a:t>Daily Integrated Fire-Weather Features</a:t>
+            </a:r>
+            <a:endParaRPr lang="en-US" sz="1400" dirty="0"/>
           </a:p>
         </p:txBody>
       </p:sp>
@@ -21797,7 +22676,7 @@
           <a:p>
             <a:pPr algn="ctr"/>
             <a:r>
-              <a:rPr lang="en-US" sz="1333" dirty="0">
+              <a:rPr lang="en-US" sz="1400" dirty="0">
                 <a:solidFill>
                   <a:srgbClr val="FFFFFF"/>
                 </a:solidFill>
@@ -21807,12 +22686,12 @@
               </a:rPr>
               <a:t>PM2.5 Station</a:t>
             </a:r>
-            <a:endParaRPr lang="en-US" sz="1333" dirty="0"/>
+            <a:endParaRPr lang="en-US" sz="1400" dirty="0"/>
           </a:p>
           <a:p>
             <a:pPr algn="ctr"/>
             <a:r>
-              <a:rPr lang="en-US" sz="1333" dirty="0">
+              <a:rPr lang="en-US" sz="1400" dirty="0">
                 <a:solidFill>
                   <a:srgbClr val="FFFFFF"/>
                 </a:solidFill>
@@ -21822,7 +22701,7 @@
               </a:rPr>
               <a:t>(Alberta AQI)</a:t>
             </a:r>
-            <a:endParaRPr lang="en-US" sz="1333" dirty="0"/>
+            <a:endParaRPr lang="en-US" sz="1400" dirty="0"/>
           </a:p>
         </p:txBody>
       </p:sp>
@@ -21834,7 +22713,7 @@
         </p:nvSpPr>
         <p:spPr>
           <a:xfrm>
-            <a:off x="609600" y="4267200"/>
+            <a:off x="609600" y="3779520"/>
             <a:ext cx="2560320" cy="853440"/>
           </a:xfrm>
           <a:prstGeom prst="rect">
@@ -21849,7 +22728,7 @@
           <a:p>
             <a:pPr algn="ctr"/>
             <a:r>
-              <a:rPr lang="en-US" sz="1333" b="1" dirty="0">
+              <a:rPr lang="en-US" sz="1600" b="1" dirty="0">
                 <a:solidFill>
                   <a:srgbClr val="2B2B2B"/>
                 </a:solidFill>
@@ -21860,7 +22739,7 @@
               <a:t>Fire Location: </a:t>
             </a:r>
             <a:r>
-              <a:rPr lang="en-US" sz="1333" dirty="0">
+              <a:rPr lang="en-US" sz="1600" dirty="0">
                 <a:solidFill>
                   <a:srgbClr val="8C857B"/>
                 </a:solidFill>
@@ -21868,9 +22747,9 @@
                 <a:ea typeface="Calibri" pitchFamily="34" charset="-122"/>
                 <a:cs typeface="Calibri" pitchFamily="34" charset="-120"/>
               </a:rPr>
-              <a:t>Identify pollution source</a:t>
-            </a:r>
-            <a:endParaRPr lang="en-US" sz="1333" dirty="0"/>
+              <a:t>Identify fire location and intensity</a:t>
+            </a:r>
+            <a:endParaRPr lang="en-US" sz="1600" dirty="0"/>
           </a:p>
         </p:txBody>
       </p:sp>
@@ -21882,7 +22761,7 @@
         </p:nvSpPr>
         <p:spPr>
           <a:xfrm>
-            <a:off x="3474720" y="4267200"/>
+            <a:off x="3474720" y="3779520"/>
             <a:ext cx="2560320" cy="853440"/>
           </a:xfrm>
           <a:prstGeom prst="rect">
@@ -21897,7 +22776,7 @@
           <a:p>
             <a:pPr algn="ctr"/>
             <a:r>
-              <a:rPr lang="en-US" sz="1333" b="1" dirty="0">
+              <a:rPr lang="en-US" sz="1600" b="1" dirty="0">
                 <a:solidFill>
                   <a:srgbClr val="2B2B2B"/>
                 </a:solidFill>
@@ -21908,7 +22787,7 @@
               <a:t>Meteorology: </a:t>
             </a:r>
             <a:r>
-              <a:rPr lang="en-US" sz="1333" dirty="0">
+              <a:rPr lang="en-US" sz="1600" dirty="0">
                 <a:solidFill>
                   <a:srgbClr val="8C857B"/>
                 </a:solidFill>
@@ -21916,9 +22795,9 @@
                 <a:ea typeface="Calibri" pitchFamily="34" charset="-122"/>
                 <a:cs typeface="Calibri" pitchFamily="34" charset="-120"/>
               </a:rPr>
-              <a:t>Model smoke transport</a:t>
-            </a:r>
-            <a:endParaRPr lang="en-US" sz="1333" dirty="0"/>
+              <a:t>Model smoke transport conditions</a:t>
+            </a:r>
+            <a:endParaRPr lang="en-US" sz="1600" dirty="0"/>
           </a:p>
         </p:txBody>
       </p:sp>
@@ -21930,8 +22809,8 @@
         </p:nvSpPr>
         <p:spPr>
           <a:xfrm>
-            <a:off x="6339840" y="4267200"/>
-            <a:ext cx="2560320" cy="853440"/>
+            <a:off x="6248400" y="3779520"/>
+            <a:ext cx="2743200" cy="853440"/>
           </a:xfrm>
           <a:prstGeom prst="rect">
             <a:avLst/>
@@ -21945,7 +22824,7 @@
           <a:p>
             <a:pPr algn="ctr"/>
             <a:r>
-              <a:rPr lang="en-US" sz="1333" b="1" dirty="0">
+              <a:rPr lang="en-US" sz="1600" b="1" dirty="0">
                 <a:solidFill>
                   <a:srgbClr val="2B2B2B"/>
                 </a:solidFill>
@@ -21953,10 +22832,10 @@
                 <a:ea typeface="Calibri" pitchFamily="34" charset="-122"/>
                 <a:cs typeface="Calibri" pitchFamily="34" charset="-120"/>
               </a:rPr>
-              <a:t>Aerosol Data: </a:t>
-            </a:r>
-            <a:r>
-              <a:rPr lang="en-US" sz="1333" dirty="0">
+              <a:t>Integrated Features: </a:t>
+            </a:r>
+            <a:r>
+              <a:rPr lang="en-US" sz="1600" dirty="0">
                 <a:solidFill>
                   <a:srgbClr val="8C857B"/>
                 </a:solidFill>
@@ -21964,9 +22843,9 @@
                 <a:ea typeface="Calibri" pitchFamily="34" charset="-122"/>
                 <a:cs typeface="Calibri" pitchFamily="34" charset="-120"/>
               </a:rPr>
-              <a:t>Track atmospheric plume</a:t>
-            </a:r>
-            <a:endParaRPr lang="en-US" sz="1333" dirty="0"/>
+              <a:t>Combine fire and weather signals</a:t>
+            </a:r>
+            <a:endParaRPr lang="en-US" sz="1600" dirty="0"/>
           </a:p>
         </p:txBody>
       </p:sp>
@@ -21978,8 +22857,8 @@
         </p:nvSpPr>
         <p:spPr>
           <a:xfrm>
-            <a:off x="9204960" y="4267200"/>
-            <a:ext cx="2560320" cy="853440"/>
+            <a:off x="9174480" y="3779520"/>
+            <a:ext cx="2689555" cy="853440"/>
           </a:xfrm>
           <a:prstGeom prst="rect">
             <a:avLst/>
@@ -21993,7 +22872,7 @@
           <a:p>
             <a:pPr algn="ctr"/>
             <a:r>
-              <a:rPr lang="en-US" sz="1333" b="1" dirty="0">
+              <a:rPr lang="en-US" sz="1600" b="1" dirty="0">
                 <a:solidFill>
                   <a:srgbClr val="2B2B2B"/>
                 </a:solidFill>
@@ -22004,7 +22883,7 @@
               <a:t>Ground Station: </a:t>
             </a:r>
             <a:r>
-              <a:rPr lang="en-US" sz="1333" dirty="0">
+              <a:rPr lang="en-US" sz="1600" dirty="0">
                 <a:solidFill>
                   <a:srgbClr val="8C857B"/>
                 </a:solidFill>
@@ -22012,9 +22891,9 @@
                 <a:ea typeface="Calibri" pitchFamily="34" charset="-122"/>
                 <a:cs typeface="Calibri" pitchFamily="34" charset="-120"/>
               </a:rPr>
-              <a:t>Validate predictions</a:t>
-            </a:r>
-            <a:endParaRPr lang="en-US" sz="1333" dirty="0"/>
+              <a:t>Validate predictions and define target</a:t>
+            </a:r>
+            <a:endParaRPr lang="en-US" sz="1600" dirty="0"/>
           </a:p>
         </p:txBody>
       </p:sp>
@@ -22026,8 +22905,8 @@
         </p:nvSpPr>
         <p:spPr>
           <a:xfrm>
-            <a:off x="609600" y="5486400"/>
-            <a:ext cx="10972800" cy="670560"/>
+            <a:off x="609600" y="5231196"/>
+            <a:ext cx="11155680" cy="670560"/>
           </a:xfrm>
           <a:prstGeom prst="rect">
             <a:avLst/>
@@ -22042,42 +22921,6 @@
           <a:lstStyle/>
           <a:p>
             <a:endParaRPr lang="zh-CN" altLang="en-US" sz="2400"/>
-          </a:p>
-        </p:txBody>
-      </p:sp>
-      <p:sp>
-        <p:nvSpPr>
-          <p:cNvPr id="29" name="Text 22"/>
-          <p:cNvSpPr/>
-          <p:nvPr/>
-        </p:nvSpPr>
-        <p:spPr>
-          <a:xfrm>
-            <a:off x="853440" y="5486400"/>
-            <a:ext cx="10485120" cy="670560"/>
-          </a:xfrm>
-          <a:prstGeom prst="rect">
-            <a:avLst/>
-          </a:prstGeom>
-          <a:noFill/>
-          <a:ln/>
-        </p:spPr>
-        <p:txBody>
-          <a:bodyPr wrap="square" rtlCol="0" anchor="ctr"/>
-          <a:lstStyle/>
-          <a:p>
-            <a:r>
-              <a:rPr lang="en-US" sz="1600" b="1" dirty="0">
-                <a:solidFill>
-                  <a:srgbClr val="FF671F"/>
-                </a:solidFill>
-                <a:latin typeface="Calibri" pitchFamily="34" charset="0"/>
-                <a:ea typeface="Calibri" pitchFamily="34" charset="-122"/>
-                <a:cs typeface="Calibri" pitchFamily="34" charset="-120"/>
-              </a:rPr>
-              <a:t>Synergy: Fire emissions → Atmospheric transport → Health impact</a:t>
-            </a:r>
-            <a:endParaRPr lang="en-US" sz="1600" dirty="0"/>
           </a:p>
         </p:txBody>
       </p:sp>
@@ -22108,6 +22951,85 @@
               <a:t>3</a:t>
             </a:fld>
             <a:endParaRPr lang="en-US" dirty="0"/>
+          </a:p>
+        </p:txBody>
+      </p:sp>
+      <p:sp>
+        <p:nvSpPr>
+          <p:cNvPr id="2" name="Shape 21">
+            <a:extLst>
+              <a:ext uri="{FF2B5EF4-FFF2-40B4-BE49-F238E27FC236}">
+                <a16:creationId xmlns:a16="http://schemas.microsoft.com/office/drawing/2014/main" id="{34E111ED-4AED-7E95-0D6B-49B2DB2C30FE}"/>
+              </a:ext>
+            </a:extLst>
+          </p:cNvPr>
+          <p:cNvSpPr/>
+          <p:nvPr/>
+        </p:nvSpPr>
+        <p:spPr>
+          <a:xfrm>
+            <a:off x="609599" y="5067714"/>
+            <a:ext cx="11155681" cy="64008"/>
+          </a:xfrm>
+          <a:prstGeom prst="rect">
+            <a:avLst/>
+          </a:prstGeom>
+          <a:solidFill>
+            <a:srgbClr val="E84855"/>
+          </a:solidFill>
+          <a:ln w="12700">
+            <a:solidFill>
+              <a:srgbClr val="E84855"/>
+            </a:solidFill>
+            <a:prstDash val="solid"/>
+          </a:ln>
+        </p:spPr>
+        <p:txBody>
+          <a:bodyPr/>
+          <a:lstStyle/>
+          <a:p>
+            <a:endParaRPr lang="zh-CN" altLang="en-US"/>
+          </a:p>
+        </p:txBody>
+      </p:sp>
+      <p:sp>
+        <p:nvSpPr>
+          <p:cNvPr id="30" name="Text 3">
+            <a:extLst>
+              <a:ext uri="{FF2B5EF4-FFF2-40B4-BE49-F238E27FC236}">
+                <a16:creationId xmlns:a16="http://schemas.microsoft.com/office/drawing/2014/main" id="{F89018CC-8CE3-161C-393A-8E66B242FB8C}"/>
+              </a:ext>
+            </a:extLst>
+          </p:cNvPr>
+          <p:cNvSpPr/>
+          <p:nvPr/>
+        </p:nvSpPr>
+        <p:spPr>
+          <a:xfrm>
+            <a:off x="792480" y="5201902"/>
+            <a:ext cx="10241280" cy="670560"/>
+          </a:xfrm>
+          <a:prstGeom prst="rect">
+            <a:avLst/>
+          </a:prstGeom>
+          <a:noFill/>
+          <a:ln/>
+        </p:spPr>
+        <p:txBody>
+          <a:bodyPr wrap="square" rtlCol="0" anchor="ctr"/>
+          <a:lstStyle/>
+          <a:p>
+            <a:r>
+              <a:rPr lang="en-US" sz="2000" b="1" dirty="0">
+                <a:solidFill>
+                  <a:srgbClr val="FF671F"/>
+                </a:solidFill>
+                <a:latin typeface="Calibri" pitchFamily="34" charset="0"/>
+                <a:ea typeface="Calibri" pitchFamily="34" charset="-122"/>
+                <a:cs typeface="Calibri" pitchFamily="34" charset="-120"/>
+              </a:rPr>
+              <a:t>They connect fire emissions, atmospheric transport, and health impacts.</a:t>
+            </a:r>
           </a:p>
         </p:txBody>
       </p:sp>
@@ -22178,32 +23100,52 @@
           <p:cNvGraphicFramePr>
             <a:graphicFrameLocks noGrp="1"/>
           </p:cNvGraphicFramePr>
-          <p:nvPr/>
+          <p:nvPr>
+            <p:extLst>
+              <p:ext uri="{D42A27DB-BD31-4B8C-83A1-F6EECF244321}">
+                <p14:modId xmlns:p14="http://schemas.microsoft.com/office/powerpoint/2010/main" val="2028912376"/>
+              </p:ext>
+            </p:extLst>
+          </p:nvPr>
         </p:nvGraphicFramePr>
         <p:xfrm>
-          <a:off x="731520" y="1584960"/>
-          <a:ext cx="10728960" cy="1767840"/>
+          <a:off x="680720" y="1430656"/>
+          <a:ext cx="10728961" cy="4292400"/>
         </p:xfrm>
         <a:graphic>
           <a:graphicData uri="http://schemas.openxmlformats.org/drawingml/2006/table">
             <a:tbl>
               <a:tblPr/>
               <a:tblGrid>
-                <a:gridCol w="2682240">
+                <a:gridCol w="1639147">
                   <a:extLst>
                     <a:ext uri="{9D8B030D-6E8A-4147-A177-3AD203B41FA5}">
                       <a16:colId xmlns:a16="http://schemas.microsoft.com/office/drawing/2014/main" val="20000"/>
                     </a:ext>
                   </a:extLst>
                 </a:gridCol>
-                <a:gridCol w="3413760">
+                <a:gridCol w="2086187">
+                  <a:extLst>
+                    <a:ext uri="{9D8B030D-6E8A-4147-A177-3AD203B41FA5}">
+                      <a16:colId xmlns:a16="http://schemas.microsoft.com/office/drawing/2014/main" val="2919705976"/>
+                    </a:ext>
+                  </a:extLst>
+                </a:gridCol>
+                <a:gridCol w="2086187">
+                  <a:extLst>
+                    <a:ext uri="{9D8B030D-6E8A-4147-A177-3AD203B41FA5}">
+                      <a16:colId xmlns:a16="http://schemas.microsoft.com/office/drawing/2014/main" val="453429595"/>
+                    </a:ext>
+                  </a:extLst>
+                </a:gridCol>
+                <a:gridCol w="2086187">
                   <a:extLst>
                     <a:ext uri="{9D8B030D-6E8A-4147-A177-3AD203B41FA5}">
                       <a16:colId xmlns:a16="http://schemas.microsoft.com/office/drawing/2014/main" val="20001"/>
                     </a:ext>
                   </a:extLst>
                 </a:gridCol>
-                <a:gridCol w="4632960">
+                <a:gridCol w="2831253">
                   <a:extLst>
                     <a:ext uri="{9D8B030D-6E8A-4147-A177-3AD203B41FA5}">
                       <a16:colId xmlns:a16="http://schemas.microsoft.com/office/drawing/2014/main" val="20002"/>
@@ -22211,7 +23153,7 @@
                   </a:extLst>
                 </a:gridCol>
               </a:tblGrid>
-              <a:tr h="365760">
+              <a:tr h="802862">
                 <a:tc>
                   <a:txBody>
                     <a:bodyPr/>
@@ -22221,9 +23163,9 @@
                         <a:buNone/>
                       </a:pPr>
                       <a:r>
-                        <a:rPr lang="en-US" sz="1600" b="1" dirty="0">
+                        <a:rPr lang="en-US" sz="1400" b="0" dirty="0">
                           <a:solidFill>
-                            <a:srgbClr val="FFFFFF"/>
+                            <a:schemeClr val="tx1"/>
                           </a:solidFill>
                           <a:latin typeface="Calibri" pitchFamily="34" charset="0"/>
                           <a:ea typeface="Calibri" pitchFamily="34" charset="-122"/>
@@ -22231,14 +23173,17 @@
                         </a:rPr>
                         <a:t>Data Source</a:t>
                       </a:r>
-                      <a:endParaRPr lang="en-US" sz="1600" dirty="0">
+                      <a:endParaRPr lang="en-US" sz="1400" b="0" dirty="0">
+                        <a:solidFill>
+                          <a:schemeClr val="tx1"/>
+                        </a:solidFill>
                         <a:latin typeface="Calibri" charset="0"/>
                         <a:ea typeface="Calibri" charset="0"/>
                         <a:cs typeface="Calibri" charset="0"/>
                       </a:endParaRPr>
                     </a:p>
                   </a:txBody>
-                  <a:tcPr marL="121920" marR="121920" marT="60960" marB="60960">
+                  <a:tcPr marL="121920" marR="121920" marT="60960" marB="60960" anchor="ctr">
                     <a:lnL w="6350" cap="flat" cmpd="sng" algn="ctr">
                       <a:solidFill>
                         <a:srgbClr val="C3BFB6"/>
@@ -22289,24 +23234,19 @@
                         <a:buNone/>
                       </a:pPr>
                       <a:r>
-                        <a:rPr lang="en-US" sz="1600" b="1" dirty="0">
+                        <a:rPr lang="en-US" sz="1400" b="0" dirty="0">
                           <a:solidFill>
-                            <a:srgbClr val="FFFFFF"/>
+                            <a:schemeClr val="tx1"/>
                           </a:solidFill>
-                          <a:latin typeface="Calibri" pitchFamily="34" charset="0"/>
-                          <a:ea typeface="Calibri" pitchFamily="34" charset="-122"/>
-                          <a:cs typeface="Calibri" pitchFamily="34" charset="-120"/>
+                          <a:latin typeface="Calibri" charset="0"/>
+                          <a:ea typeface="Calibri" charset="0"/>
+                          <a:cs typeface="Calibri" charset="0"/>
                         </a:rPr>
-                        <a:t>Capability</a:t>
+                        <a:t>Time Range</a:t>
                       </a:r>
-                      <a:endParaRPr lang="en-US" sz="1600" dirty="0">
-                        <a:latin typeface="Calibri" charset="0"/>
-                        <a:ea typeface="Calibri" charset="0"/>
-                        <a:cs typeface="Calibri" charset="0"/>
-                      </a:endParaRPr>
                     </a:p>
                   </a:txBody>
-                  <a:tcPr marL="121920" marR="121920" marT="60960" marB="60960">
+                  <a:tcPr marL="121920" marR="121920" marT="60960" marB="60960" anchor="ctr">
                     <a:lnL w="6350" cap="flat" cmpd="sng" algn="ctr">
                       <a:solidFill>
                         <a:srgbClr val="C3BFB6"/>
@@ -22357,9 +23297,143 @@
                         <a:buNone/>
                       </a:pPr>
                       <a:r>
-                        <a:rPr lang="en-US" sz="1600" b="1" dirty="0">
+                        <a:rPr lang="en-US" sz="1400" b="0" dirty="0">
                           <a:solidFill>
-                            <a:srgbClr val="FFFFFF"/>
+                            <a:schemeClr val="tx1"/>
+                          </a:solidFill>
+                          <a:latin typeface="Calibri" charset="0"/>
+                          <a:ea typeface="Calibri" charset="0"/>
+                          <a:cs typeface="Calibri" charset="0"/>
+                        </a:rPr>
+                        <a:t>Size</a:t>
+                      </a:r>
+                    </a:p>
+                  </a:txBody>
+                  <a:tcPr marL="121920" marR="121920" marT="60960" marB="60960" anchor="ctr">
+                    <a:lnL w="6350" cap="flat" cmpd="sng" algn="ctr">
+                      <a:solidFill>
+                        <a:srgbClr val="C3BFB6"/>
+                      </a:solidFill>
+                      <a:prstDash val="solid"/>
+                      <a:round/>
+                      <a:headEnd type="none" w="med" len="med"/>
+                      <a:tailEnd type="none" w="med" len="med"/>
+                    </a:lnL>
+                    <a:lnR w="6350" cap="flat" cmpd="sng" algn="ctr">
+                      <a:solidFill>
+                        <a:srgbClr val="C3BFB6"/>
+                      </a:solidFill>
+                      <a:prstDash val="solid"/>
+                      <a:round/>
+                      <a:headEnd type="none" w="med" len="med"/>
+                      <a:tailEnd type="none" w="med" len="med"/>
+                    </a:lnR>
+                    <a:lnT w="6350" cap="flat" cmpd="sng" algn="ctr">
+                      <a:solidFill>
+                        <a:srgbClr val="C3BFB6"/>
+                      </a:solidFill>
+                      <a:prstDash val="solid"/>
+                      <a:round/>
+                      <a:headEnd type="none" w="med" len="med"/>
+                      <a:tailEnd type="none" w="med" len="med"/>
+                    </a:lnT>
+                    <a:lnB w="6350" cap="flat" cmpd="sng" algn="ctr">
+                      <a:solidFill>
+                        <a:srgbClr val="C3BFB6"/>
+                      </a:solidFill>
+                      <a:prstDash val="solid"/>
+                      <a:round/>
+                      <a:headEnd type="none" w="med" len="med"/>
+                      <a:tailEnd type="none" w="med" len="med"/>
+                    </a:lnB>
+                    <a:solidFill>
+                      <a:srgbClr val="EE2C2A"/>
+                    </a:solidFill>
+                  </a:tcPr>
+                </a:tc>
+                <a:tc>
+                  <a:txBody>
+                    <a:bodyPr/>
+                    <a:lstStyle/>
+                    <a:p>
+                      <a:pPr marL="0" indent="0" algn="ctr">
+                        <a:buNone/>
+                      </a:pPr>
+                      <a:r>
+                        <a:rPr lang="en-US" sz="1400" b="0" dirty="0">
+                          <a:solidFill>
+                            <a:schemeClr val="tx1"/>
+                          </a:solidFill>
+                          <a:latin typeface="Calibri" pitchFamily="34" charset="0"/>
+                          <a:ea typeface="Calibri" pitchFamily="34" charset="-122"/>
+                          <a:cs typeface="Calibri" pitchFamily="34" charset="-120"/>
+                        </a:rPr>
+                        <a:t>Capability</a:t>
+                      </a:r>
+                      <a:endParaRPr lang="en-US" sz="1400" b="0" dirty="0">
+                        <a:solidFill>
+                          <a:schemeClr val="tx1"/>
+                        </a:solidFill>
+                        <a:latin typeface="Calibri" charset="0"/>
+                        <a:ea typeface="Calibri" charset="0"/>
+                        <a:cs typeface="Calibri" charset="0"/>
+                      </a:endParaRPr>
+                    </a:p>
+                  </a:txBody>
+                  <a:tcPr marL="121920" marR="121920" marT="60960" marB="60960" anchor="ctr">
+                    <a:lnL w="6350" cap="flat" cmpd="sng" algn="ctr">
+                      <a:solidFill>
+                        <a:srgbClr val="C3BFB6"/>
+                      </a:solidFill>
+                      <a:prstDash val="solid"/>
+                      <a:round/>
+                      <a:headEnd type="none" w="med" len="med"/>
+                      <a:tailEnd type="none" w="med" len="med"/>
+                    </a:lnL>
+                    <a:lnR w="6350" cap="flat" cmpd="sng" algn="ctr">
+                      <a:solidFill>
+                        <a:srgbClr val="C3BFB6"/>
+                      </a:solidFill>
+                      <a:prstDash val="solid"/>
+                      <a:round/>
+                      <a:headEnd type="none" w="med" len="med"/>
+                      <a:tailEnd type="none" w="med" len="med"/>
+                    </a:lnR>
+                    <a:lnT w="6350" cap="flat" cmpd="sng" algn="ctr">
+                      <a:solidFill>
+                        <a:srgbClr val="C3BFB6"/>
+                      </a:solidFill>
+                      <a:prstDash val="solid"/>
+                      <a:round/>
+                      <a:headEnd type="none" w="med" len="med"/>
+                      <a:tailEnd type="none" w="med" len="med"/>
+                    </a:lnT>
+                    <a:lnB w="6350" cap="flat" cmpd="sng" algn="ctr">
+                      <a:solidFill>
+                        <a:srgbClr val="C3BFB6"/>
+                      </a:solidFill>
+                      <a:prstDash val="solid"/>
+                      <a:round/>
+                      <a:headEnd type="none" w="med" len="med"/>
+                      <a:tailEnd type="none" w="med" len="med"/>
+                    </a:lnB>
+                    <a:solidFill>
+                      <a:srgbClr val="EE2C2A"/>
+                    </a:solidFill>
+                  </a:tcPr>
+                </a:tc>
+                <a:tc>
+                  <a:txBody>
+                    <a:bodyPr/>
+                    <a:lstStyle/>
+                    <a:p>
+                      <a:pPr marL="0" indent="0" algn="ctr">
+                        <a:buNone/>
+                      </a:pPr>
+                      <a:r>
+                        <a:rPr lang="en-US" sz="1400" b="0" dirty="0">
+                          <a:solidFill>
+                            <a:schemeClr val="tx1"/>
                           </a:solidFill>
                           <a:latin typeface="Calibri" pitchFamily="34" charset="0"/>
                           <a:ea typeface="Calibri" pitchFamily="34" charset="-122"/>
@@ -22367,14 +23441,17 @@
                         </a:rPr>
                         <a:t>Value</a:t>
                       </a:r>
-                      <a:endParaRPr lang="en-US" sz="1600" dirty="0">
+                      <a:endParaRPr lang="en-US" sz="1400" b="0" dirty="0">
+                        <a:solidFill>
+                          <a:schemeClr val="tx1"/>
+                        </a:solidFill>
                         <a:latin typeface="Calibri" charset="0"/>
                         <a:ea typeface="Calibri" charset="0"/>
                         <a:cs typeface="Calibri" charset="0"/>
                       </a:endParaRPr>
                     </a:p>
                   </a:txBody>
-                  <a:tcPr marL="121920" marR="121920" marT="60960" marB="60960">
+                  <a:tcPr marL="121920" marR="121920" marT="60960" marB="60960" anchor="ctr">
                     <a:lnL w="6350" cap="flat" cmpd="sng" algn="ctr">
                       <a:solidFill>
                         <a:srgbClr val="C3BFB6"/>
@@ -22422,7 +23499,7 @@
                   </a:ext>
                 </a:extLst>
               </a:tr>
-              <a:tr h="345440">
+              <a:tr h="947005">
                 <a:tc>
                   <a:txBody>
                     <a:bodyPr/>
@@ -22432,9 +23509,9 @@
                         <a:buNone/>
                       </a:pPr>
                       <a:r>
-                        <a:rPr lang="en-US" sz="1500" dirty="0">
+                        <a:rPr lang="en-US" sz="1400" dirty="0">
                           <a:solidFill>
-                            <a:srgbClr val="2B2B2B"/>
+                            <a:schemeClr val="tx1"/>
                           </a:solidFill>
                           <a:latin typeface="Calibri" pitchFamily="34" charset="0"/>
                           <a:ea typeface="Calibri" pitchFamily="34" charset="-122"/>
@@ -22442,14 +23519,17 @@
                         </a:rPr>
                         <a:t>ERA5 Reanalysis</a:t>
                       </a:r>
-                      <a:endParaRPr lang="en-US" sz="1500" dirty="0">
+                      <a:endParaRPr lang="en-US" sz="1400" dirty="0">
+                        <a:solidFill>
+                          <a:schemeClr val="tx1"/>
+                        </a:solidFill>
                         <a:latin typeface="Calibri" charset="0"/>
                         <a:ea typeface="Calibri" charset="0"/>
                         <a:cs typeface="Calibri" charset="0"/>
                       </a:endParaRPr>
                     </a:p>
                   </a:txBody>
-                  <a:tcPr marL="121920" marR="121920" marT="60960" marB="60960">
+                  <a:tcPr marL="121920" marR="121920" marT="60960" marB="60960" anchor="ctr">
                     <a:lnL w="6350" cap="flat" cmpd="sng" algn="ctr">
                       <a:solidFill>
                         <a:srgbClr val="C3BFB6"/>
@@ -22500,24 +23580,19 @@
                         <a:buNone/>
                       </a:pPr>
                       <a:r>
-                        <a:rPr lang="en-US" sz="1500" dirty="0">
+                        <a:rPr lang="en-US" sz="1400" dirty="0">
                           <a:solidFill>
-                            <a:srgbClr val="2B2B2B"/>
+                            <a:schemeClr val="tx1"/>
                           </a:solidFill>
-                          <a:latin typeface="Calibri" pitchFamily="34" charset="0"/>
-                          <a:ea typeface="Calibri" pitchFamily="34" charset="-122"/>
-                          <a:cs typeface="Calibri" pitchFamily="34" charset="-120"/>
+                          <a:latin typeface="Calibri" charset="0"/>
+                          <a:ea typeface="Calibri" charset="0"/>
+                          <a:cs typeface="Calibri" charset="0"/>
                         </a:rPr>
-                        <a:t>Global 0.1° weather data</a:t>
+                        <a:t>2018/1/1-2025/12/31</a:t>
                       </a:r>
-                      <a:endParaRPr lang="en-US" sz="1500" dirty="0">
-                        <a:latin typeface="Calibri" charset="0"/>
-                        <a:ea typeface="Calibri" charset="0"/>
-                        <a:cs typeface="Calibri" charset="0"/>
-                      </a:endParaRPr>
                     </a:p>
                   </a:txBody>
-                  <a:tcPr marL="121920" marR="121920" marT="60960" marB="60960">
+                  <a:tcPr marL="121920" marR="121920" marT="60960" marB="60960" anchor="ctr">
                     <a:lnL w="6350" cap="flat" cmpd="sng" algn="ctr">
                       <a:solidFill>
                         <a:srgbClr val="C3BFB6"/>
@@ -22568,24 +23643,163 @@
                         <a:buNone/>
                       </a:pPr>
                       <a:r>
-                        <a:rPr lang="en-US" sz="1500" dirty="0">
+                        <a:rPr lang="en-US" sz="1400" dirty="0">
                           <a:solidFill>
-                            <a:srgbClr val="2B2B2B"/>
+                            <a:schemeClr val="tx1"/>
                           </a:solidFill>
-                          <a:latin typeface="Calibri" pitchFamily="34" charset="0"/>
-                          <a:ea typeface="Calibri" pitchFamily="34" charset="-122"/>
-                          <a:cs typeface="Calibri" pitchFamily="34" charset="-120"/>
+                          <a:latin typeface="Calibri" charset="0"/>
+                          <a:ea typeface="Calibri" charset="0"/>
+                          <a:cs typeface="Calibri" charset="0"/>
                         </a:rPr>
-                        <a:t>Wind, temperature, pressure for transport</a:t>
+                        <a:t>70128*8</a:t>
                       </a:r>
-                      <a:endParaRPr lang="en-US" sz="1500" dirty="0">
+                    </a:p>
+                  </a:txBody>
+                  <a:tcPr marL="121920" marR="121920" marT="60960" marB="60960" anchor="ctr">
+                    <a:lnL w="6350" cap="flat" cmpd="sng" algn="ctr">
+                      <a:solidFill>
+                        <a:srgbClr val="C3BFB6"/>
+                      </a:solidFill>
+                      <a:prstDash val="solid"/>
+                      <a:round/>
+                      <a:headEnd type="none" w="med" len="med"/>
+                      <a:tailEnd type="none" w="med" len="med"/>
+                    </a:lnL>
+                    <a:lnR w="6350" cap="flat" cmpd="sng" algn="ctr">
+                      <a:solidFill>
+                        <a:srgbClr val="C3BFB6"/>
+                      </a:solidFill>
+                      <a:prstDash val="solid"/>
+                      <a:round/>
+                      <a:headEnd type="none" w="med" len="med"/>
+                      <a:tailEnd type="none" w="med" len="med"/>
+                    </a:lnR>
+                    <a:lnT w="6350" cap="flat" cmpd="sng" algn="ctr">
+                      <a:solidFill>
+                        <a:srgbClr val="C3BFB6"/>
+                      </a:solidFill>
+                      <a:prstDash val="solid"/>
+                      <a:round/>
+                      <a:headEnd type="none" w="med" len="med"/>
+                      <a:tailEnd type="none" w="med" len="med"/>
+                    </a:lnT>
+                    <a:lnB w="6350" cap="flat" cmpd="sng" algn="ctr">
+                      <a:solidFill>
+                        <a:srgbClr val="C3BFB6"/>
+                      </a:solidFill>
+                      <a:prstDash val="solid"/>
+                      <a:round/>
+                      <a:headEnd type="none" w="med" len="med"/>
+                      <a:tailEnd type="none" w="med" len="med"/>
+                    </a:lnB>
+                    <a:solidFill>
+                      <a:srgbClr val="F7F5F2"/>
+                    </a:solidFill>
+                  </a:tcPr>
+                </a:tc>
+                <a:tc>
+                  <a:txBody>
+                    <a:bodyPr/>
+                    <a:lstStyle/>
+                    <a:p>
+                      <a:pPr marL="0" indent="0">
+                        <a:buNone/>
+                      </a:pPr>
+                      <a:r>
+                        <a:rPr lang="en-US" altLang="zh-CN" sz="1400" b="0" i="0" kern="1200" dirty="0">
+                          <a:solidFill>
+                            <a:schemeClr val="tx1"/>
+                          </a:solidFill>
+                          <a:effectLst/>
+                          <a:latin typeface="+mn-lt"/>
+                          <a:ea typeface="+mn-ea"/>
+                          <a:cs typeface="+mn-cs"/>
+                        </a:rPr>
+                        <a:t>Reanalysis-based regional meteorology (wind, temperature, pressure)</a:t>
+                      </a:r>
+                      <a:endParaRPr lang="en-US" sz="1400" dirty="0">
+                        <a:solidFill>
+                          <a:schemeClr val="tx1"/>
+                        </a:solidFill>
                         <a:latin typeface="Calibri" charset="0"/>
                         <a:ea typeface="Calibri" charset="0"/>
                         <a:cs typeface="Calibri" charset="0"/>
                       </a:endParaRPr>
                     </a:p>
                   </a:txBody>
-                  <a:tcPr marL="121920" marR="121920" marT="60960" marB="60960">
+                  <a:tcPr marL="121920" marR="121920" marT="60960" marB="60960" anchor="ctr">
+                    <a:lnL w="6350" cap="flat" cmpd="sng" algn="ctr">
+                      <a:solidFill>
+                        <a:srgbClr val="C3BFB6"/>
+                      </a:solidFill>
+                      <a:prstDash val="solid"/>
+                      <a:round/>
+                      <a:headEnd type="none" w="med" len="med"/>
+                      <a:tailEnd type="none" w="med" len="med"/>
+                    </a:lnL>
+                    <a:lnR w="6350" cap="flat" cmpd="sng" algn="ctr">
+                      <a:solidFill>
+                        <a:srgbClr val="C3BFB6"/>
+                      </a:solidFill>
+                      <a:prstDash val="solid"/>
+                      <a:round/>
+                      <a:headEnd type="none" w="med" len="med"/>
+                      <a:tailEnd type="none" w="med" len="med"/>
+                    </a:lnR>
+                    <a:lnT w="6350" cap="flat" cmpd="sng" algn="ctr">
+                      <a:solidFill>
+                        <a:srgbClr val="C3BFB6"/>
+                      </a:solidFill>
+                      <a:prstDash val="solid"/>
+                      <a:round/>
+                      <a:headEnd type="none" w="med" len="med"/>
+                      <a:tailEnd type="none" w="med" len="med"/>
+                    </a:lnT>
+                    <a:lnB w="6350" cap="flat" cmpd="sng" algn="ctr">
+                      <a:solidFill>
+                        <a:srgbClr val="C3BFB6"/>
+                      </a:solidFill>
+                      <a:prstDash val="solid"/>
+                      <a:round/>
+                      <a:headEnd type="none" w="med" len="med"/>
+                      <a:tailEnd type="none" w="med" len="med"/>
+                    </a:lnB>
+                    <a:solidFill>
+                      <a:srgbClr val="F7F5F2"/>
+                    </a:solidFill>
+                  </a:tcPr>
+                </a:tc>
+                <a:tc>
+                  <a:txBody>
+                    <a:bodyPr/>
+                    <a:lstStyle/>
+                    <a:p>
+                      <a:pPr marL="0" indent="0">
+                        <a:buNone/>
+                      </a:pPr>
+                      <a:r>
+                        <a:rPr lang="en-US" altLang="zh-CN" sz="1400" b="0" i="0" kern="1200" dirty="0">
+                          <a:solidFill>
+                            <a:schemeClr val="tx1"/>
+                          </a:solidFill>
+                          <a:effectLst/>
+                          <a:latin typeface="+mn-lt"/>
+                          <a:ea typeface="+mn-ea"/>
+                          <a:cs typeface="+mn-cs"/>
+                        </a:rPr>
+                        <a:t>Drive smoke transport and dispersion features</a:t>
+                      </a:r>
+                      <a:endParaRPr lang="en-US" sz="1400" dirty="0">
+                        <a:solidFill>
+                          <a:schemeClr val="tx1"/>
+                        </a:solidFill>
+                        <a:latin typeface="Calibri" charset="0"/>
+                        <a:ea typeface="Calibri" charset="0"/>
+                        <a:cs typeface="Calibri" charset="0"/>
+                      </a:endParaRPr>
+                    </a:p>
+                  </a:txBody>
+                  <a:tcPr marL="121920" marR="121920" marT="60960" marB="60960" anchor="ctr">
                     <a:lnL w="6350" cap="flat" cmpd="sng" algn="ctr">
                       <a:solidFill>
                         <a:srgbClr val="C3BFB6"/>
@@ -22633,7 +23847,7 @@
                   </a:ext>
                 </a:extLst>
               </a:tr>
-              <a:tr h="345440">
+              <a:tr h="769409">
                 <a:tc>
                   <a:txBody>
                     <a:bodyPr/>
@@ -22643,24 +23857,28 @@
                         <a:buNone/>
                       </a:pPr>
                       <a:r>
-                        <a:rPr lang="en-US" sz="1500" dirty="0">
+                        <a:rPr lang="en-US" altLang="zh-CN" sz="1400" b="0" i="0" kern="1200" dirty="0">
                           <a:solidFill>
-                            <a:srgbClr val="2B2B2B"/>
+                            <a:schemeClr val="tx1"/>
                           </a:solidFill>
-                          <a:latin typeface="Calibri" pitchFamily="34" charset="0"/>
-                          <a:ea typeface="Calibri" pitchFamily="34" charset="-122"/>
-                          <a:cs typeface="Calibri" pitchFamily="34" charset="-120"/>
+                          <a:effectLst/>
+                          <a:latin typeface="+mn-lt"/>
+                          <a:ea typeface="+mn-ea"/>
+                          <a:cs typeface="+mn-cs"/>
                         </a:rPr>
-                        <a:t>MODIS Active Fires</a:t>
+                        <a:t>VIIRS Active Fires</a:t>
                       </a:r>
-                      <a:endParaRPr lang="en-US" sz="1500" dirty="0">
+                      <a:endParaRPr lang="en-US" sz="1400" dirty="0">
+                        <a:solidFill>
+                          <a:schemeClr val="tx1"/>
+                        </a:solidFill>
                         <a:latin typeface="Calibri" charset="0"/>
                         <a:ea typeface="Calibri" charset="0"/>
                         <a:cs typeface="Calibri" charset="0"/>
                       </a:endParaRPr>
                     </a:p>
                   </a:txBody>
-                  <a:tcPr marL="121920" marR="121920" marT="60960" marB="60960">
+                  <a:tcPr marL="121920" marR="121920" marT="60960" marB="60960" anchor="ctr">
                     <a:lnL w="6350" cap="flat" cmpd="sng" algn="ctr">
                       <a:solidFill>
                         <a:srgbClr val="C3BFB6"/>
@@ -22711,24 +23929,19 @@
                         <a:buNone/>
                       </a:pPr>
                       <a:r>
-                        <a:rPr lang="en-US" sz="1500" dirty="0">
+                        <a:rPr lang="en-US" sz="1400" dirty="0">
                           <a:solidFill>
-                            <a:srgbClr val="2B2B2B"/>
+                            <a:schemeClr val="tx1"/>
                           </a:solidFill>
-                          <a:latin typeface="Calibri" pitchFamily="34" charset="0"/>
-                          <a:ea typeface="Calibri" pitchFamily="34" charset="-122"/>
-                          <a:cs typeface="Calibri" pitchFamily="34" charset="-120"/>
+                          <a:latin typeface="Calibri" charset="0"/>
+                          <a:ea typeface="Calibri" charset="0"/>
+                          <a:cs typeface="Calibri" charset="0"/>
                         </a:rPr>
-                        <a:t>1-km fire pixel detection</a:t>
+                        <a:t>2018/4/1-2025/12/31</a:t>
                       </a:r>
-                      <a:endParaRPr lang="en-US" sz="1500" dirty="0">
-                        <a:latin typeface="Calibri" charset="0"/>
-                        <a:ea typeface="Calibri" charset="0"/>
-                        <a:cs typeface="Calibri" charset="0"/>
-                      </a:endParaRPr>
                     </a:p>
                   </a:txBody>
-                  <a:tcPr marL="121920" marR="121920" marT="60960" marB="60960">
+                  <a:tcPr marL="121920" marR="121920" marT="60960" marB="60960" anchor="ctr">
                     <a:lnL w="6350" cap="flat" cmpd="sng" algn="ctr">
                       <a:solidFill>
                         <a:srgbClr val="C3BFB6"/>
@@ -22779,9 +23992,143 @@
                         <a:buNone/>
                       </a:pPr>
                       <a:r>
-                        <a:rPr lang="en-US" sz="1500" dirty="0">
+                        <a:rPr lang="en-US" sz="1400" dirty="0">
                           <a:solidFill>
-                            <a:srgbClr val="2B2B2B"/>
+                            <a:schemeClr val="tx1"/>
+                          </a:solidFill>
+                          <a:latin typeface="Calibri" charset="0"/>
+                          <a:ea typeface="Calibri" charset="0"/>
+                          <a:cs typeface="Calibri" charset="0"/>
+                        </a:rPr>
+                        <a:t>3691161*15</a:t>
+                      </a:r>
+                    </a:p>
+                  </a:txBody>
+                  <a:tcPr marL="121920" marR="121920" marT="60960" marB="60960" anchor="ctr">
+                    <a:lnL w="6350" cap="flat" cmpd="sng" algn="ctr">
+                      <a:solidFill>
+                        <a:srgbClr val="C3BFB6"/>
+                      </a:solidFill>
+                      <a:prstDash val="solid"/>
+                      <a:round/>
+                      <a:headEnd type="none" w="med" len="med"/>
+                      <a:tailEnd type="none" w="med" len="med"/>
+                    </a:lnL>
+                    <a:lnR w="6350" cap="flat" cmpd="sng" algn="ctr">
+                      <a:solidFill>
+                        <a:srgbClr val="C3BFB6"/>
+                      </a:solidFill>
+                      <a:prstDash val="solid"/>
+                      <a:round/>
+                      <a:headEnd type="none" w="med" len="med"/>
+                      <a:tailEnd type="none" w="med" len="med"/>
+                    </a:lnR>
+                    <a:lnT w="6350" cap="flat" cmpd="sng" algn="ctr">
+                      <a:solidFill>
+                        <a:srgbClr val="C3BFB6"/>
+                      </a:solidFill>
+                      <a:prstDash val="solid"/>
+                      <a:round/>
+                      <a:headEnd type="none" w="med" len="med"/>
+                      <a:tailEnd type="none" w="med" len="med"/>
+                    </a:lnT>
+                    <a:lnB w="6350" cap="flat" cmpd="sng" algn="ctr">
+                      <a:solidFill>
+                        <a:srgbClr val="C3BFB6"/>
+                      </a:solidFill>
+                      <a:prstDash val="solid"/>
+                      <a:round/>
+                      <a:headEnd type="none" w="med" len="med"/>
+                      <a:tailEnd type="none" w="med" len="med"/>
+                    </a:lnB>
+                    <a:solidFill>
+                      <a:srgbClr val="FFFFFF"/>
+                    </a:solidFill>
+                  </a:tcPr>
+                </a:tc>
+                <a:tc>
+                  <a:txBody>
+                    <a:bodyPr/>
+                    <a:lstStyle/>
+                    <a:p>
+                      <a:pPr marL="0" indent="0">
+                        <a:buNone/>
+                      </a:pPr>
+                      <a:r>
+                        <a:rPr lang="en-US" sz="1400" dirty="0">
+                          <a:solidFill>
+                            <a:schemeClr val="tx1"/>
+                          </a:solidFill>
+                          <a:latin typeface="Calibri" pitchFamily="34" charset="0"/>
+                          <a:ea typeface="Calibri" pitchFamily="34" charset="-122"/>
+                          <a:cs typeface="Calibri" pitchFamily="34" charset="-120"/>
+                        </a:rPr>
+                        <a:t>1-km fire pixel detection</a:t>
+                      </a:r>
+                      <a:endParaRPr lang="en-US" sz="1400" dirty="0">
+                        <a:solidFill>
+                          <a:schemeClr val="tx1"/>
+                        </a:solidFill>
+                        <a:latin typeface="Calibri" charset="0"/>
+                        <a:ea typeface="Calibri" charset="0"/>
+                        <a:cs typeface="Calibri" charset="0"/>
+                      </a:endParaRPr>
+                    </a:p>
+                  </a:txBody>
+                  <a:tcPr marL="121920" marR="121920" marT="60960" marB="60960" anchor="ctr">
+                    <a:lnL w="6350" cap="flat" cmpd="sng" algn="ctr">
+                      <a:solidFill>
+                        <a:srgbClr val="C3BFB6"/>
+                      </a:solidFill>
+                      <a:prstDash val="solid"/>
+                      <a:round/>
+                      <a:headEnd type="none" w="med" len="med"/>
+                      <a:tailEnd type="none" w="med" len="med"/>
+                    </a:lnL>
+                    <a:lnR w="6350" cap="flat" cmpd="sng" algn="ctr">
+                      <a:solidFill>
+                        <a:srgbClr val="C3BFB6"/>
+                      </a:solidFill>
+                      <a:prstDash val="solid"/>
+                      <a:round/>
+                      <a:headEnd type="none" w="med" len="med"/>
+                      <a:tailEnd type="none" w="med" len="med"/>
+                    </a:lnR>
+                    <a:lnT w="6350" cap="flat" cmpd="sng" algn="ctr">
+                      <a:solidFill>
+                        <a:srgbClr val="C3BFB6"/>
+                      </a:solidFill>
+                      <a:prstDash val="solid"/>
+                      <a:round/>
+                      <a:headEnd type="none" w="med" len="med"/>
+                      <a:tailEnd type="none" w="med" len="med"/>
+                    </a:lnT>
+                    <a:lnB w="6350" cap="flat" cmpd="sng" algn="ctr">
+                      <a:solidFill>
+                        <a:srgbClr val="C3BFB6"/>
+                      </a:solidFill>
+                      <a:prstDash val="solid"/>
+                      <a:round/>
+                      <a:headEnd type="none" w="med" len="med"/>
+                      <a:tailEnd type="none" w="med" len="med"/>
+                    </a:lnB>
+                    <a:solidFill>
+                      <a:srgbClr val="FFFFFF"/>
+                    </a:solidFill>
+                  </a:tcPr>
+                </a:tc>
+                <a:tc>
+                  <a:txBody>
+                    <a:bodyPr/>
+                    <a:lstStyle/>
+                    <a:p>
+                      <a:pPr marL="0" indent="0">
+                        <a:buNone/>
+                      </a:pPr>
+                      <a:r>
+                        <a:rPr lang="en-US" sz="1400" dirty="0">
+                          <a:solidFill>
+                            <a:schemeClr val="tx1"/>
                           </a:solidFill>
                           <a:latin typeface="Calibri" pitchFamily="34" charset="0"/>
                           <a:ea typeface="Calibri" pitchFamily="34" charset="-122"/>
@@ -22789,14 +24136,17 @@
                         </a:rPr>
                         <a:t>Near-real-time fire source identification</a:t>
                       </a:r>
-                      <a:endParaRPr lang="en-US" sz="1500" dirty="0">
+                      <a:endParaRPr lang="en-US" sz="1400" dirty="0">
+                        <a:solidFill>
+                          <a:schemeClr val="tx1"/>
+                        </a:solidFill>
                         <a:latin typeface="Calibri" charset="0"/>
                         <a:ea typeface="Calibri" charset="0"/>
                         <a:cs typeface="Calibri" charset="0"/>
                       </a:endParaRPr>
                     </a:p>
                   </a:txBody>
-                  <a:tcPr marL="121920" marR="121920" marT="60960" marB="60960">
+                  <a:tcPr marL="121920" marR="121920" marT="60960" marB="60960" anchor="ctr">
                     <a:lnL w="6350" cap="flat" cmpd="sng" algn="ctr">
                       <a:solidFill>
                         <a:srgbClr val="C3BFB6"/>
@@ -22844,7 +24194,7 @@
                   </a:ext>
                 </a:extLst>
               </a:tr>
-              <a:tr h="345440">
+              <a:tr h="947005">
                 <a:tc>
                   <a:txBody>
                     <a:bodyPr/>
@@ -22854,24 +24204,182 @@
                         <a:buNone/>
                       </a:pPr>
                       <a:r>
-                        <a:rPr lang="en-US" sz="1500" dirty="0">
+                        <a:rPr lang="en-US" altLang="zh-CN" sz="1400" b="0" i="0" kern="1200" dirty="0">
                           <a:solidFill>
-                            <a:srgbClr val="2B2B2B"/>
+                            <a:schemeClr val="tx1"/>
                           </a:solidFill>
-                          <a:latin typeface="Calibri" pitchFamily="34" charset="0"/>
-                          <a:ea typeface="Calibri" pitchFamily="34" charset="-122"/>
-                          <a:cs typeface="Calibri" pitchFamily="34" charset="-120"/>
+                          <a:effectLst/>
+                          <a:latin typeface="+mn-lt"/>
+                          <a:ea typeface="+mn-ea"/>
+                          <a:cs typeface="+mn-cs"/>
                         </a:rPr>
-                        <a:t>Sentinel-5P Aerosols</a:t>
+                        <a:t>Weather station hourly</a:t>
                       </a:r>
-                      <a:endParaRPr lang="en-US" sz="1500" dirty="0">
+                      <a:endParaRPr lang="en-US" sz="1400" dirty="0">
+                        <a:solidFill>
+                          <a:schemeClr val="tx1"/>
+                        </a:solidFill>
                         <a:latin typeface="Calibri" charset="0"/>
                         <a:ea typeface="Calibri" charset="0"/>
                         <a:cs typeface="Calibri" charset="0"/>
                       </a:endParaRPr>
                     </a:p>
                   </a:txBody>
-                  <a:tcPr marL="121920" marR="121920" marT="60960" marB="60960">
+                  <a:tcPr marL="121920" marR="121920" marT="60960" marB="60960" anchor="ctr">
+                    <a:lnL w="6350" cap="flat" cmpd="sng" algn="ctr">
+                      <a:solidFill>
+                        <a:srgbClr val="C3BFB6"/>
+                      </a:solidFill>
+                      <a:prstDash val="solid"/>
+                      <a:round/>
+                      <a:headEnd type="none" w="med" len="med"/>
+                      <a:tailEnd type="none" w="med" len="med"/>
+                    </a:lnL>
+                    <a:lnR w="6350" cap="flat" cmpd="sng" algn="ctr">
+                      <a:solidFill>
+                        <a:srgbClr val="C3BFB6"/>
+                      </a:solidFill>
+                      <a:prstDash val="solid"/>
+                      <a:round/>
+                      <a:headEnd type="none" w="med" len="med"/>
+                      <a:tailEnd type="none" w="med" len="med"/>
+                    </a:lnR>
+                    <a:lnT w="6350" cap="flat" cmpd="sng" algn="ctr">
+                      <a:solidFill>
+                        <a:srgbClr val="C3BFB6"/>
+                      </a:solidFill>
+                      <a:prstDash val="solid"/>
+                      <a:round/>
+                      <a:headEnd type="none" w="med" len="med"/>
+                      <a:tailEnd type="none" w="med" len="med"/>
+                    </a:lnT>
+                    <a:lnB w="6350" cap="flat" cmpd="sng" algn="ctr">
+                      <a:solidFill>
+                        <a:srgbClr val="C3BFB6"/>
+                      </a:solidFill>
+                      <a:prstDash val="solid"/>
+                      <a:round/>
+                      <a:headEnd type="none" w="med" len="med"/>
+                      <a:tailEnd type="none" w="med" len="med"/>
+                    </a:lnB>
+                    <a:solidFill>
+                      <a:srgbClr val="F7F5F2"/>
+                    </a:solidFill>
+                  </a:tcPr>
+                </a:tc>
+                <a:tc>
+                  <a:txBody>
+                    <a:bodyPr/>
+                    <a:lstStyle/>
+                    <a:p>
+                      <a:pPr marL="0" marR="0" lvl="0" indent="0" algn="l" defTabSz="914400" rtl="0" eaLnBrk="1" fontAlgn="auto" latinLnBrk="0" hangingPunct="1">
+                        <a:lnSpc>
+                          <a:spcPct val="100000"/>
+                        </a:lnSpc>
+                        <a:spcBef>
+                          <a:spcPts val="0"/>
+                        </a:spcBef>
+                        <a:spcAft>
+                          <a:spcPts val="0"/>
+                        </a:spcAft>
+                        <a:buClrTx/>
+                        <a:buSzTx/>
+                        <a:buFontTx/>
+                        <a:buNone/>
+                        <a:tabLst/>
+                        <a:defRPr/>
+                      </a:pPr>
+                      <a:r>
+                        <a:rPr lang="en-US" altLang="zh-CN" sz="1400" dirty="0">
+                          <a:solidFill>
+                            <a:schemeClr val="tx1"/>
+                          </a:solidFill>
+                          <a:latin typeface="Calibri" charset="0"/>
+                          <a:ea typeface="Calibri" charset="0"/>
+                          <a:cs typeface="Calibri" charset="0"/>
+                        </a:rPr>
+                        <a:t>2018/1/1-2025/12/31</a:t>
+                      </a:r>
+                    </a:p>
+                  </a:txBody>
+                  <a:tcPr marL="121920" marR="121920" marT="60960" marB="60960" anchor="ctr">
+                    <a:lnL w="6350" cap="flat" cmpd="sng" algn="ctr">
+                      <a:solidFill>
+                        <a:srgbClr val="C3BFB6"/>
+                      </a:solidFill>
+                      <a:prstDash val="solid"/>
+                      <a:round/>
+                      <a:headEnd type="none" w="med" len="med"/>
+                      <a:tailEnd type="none" w="med" len="med"/>
+                    </a:lnL>
+                    <a:lnR w="6350" cap="flat" cmpd="sng" algn="ctr">
+                      <a:solidFill>
+                        <a:srgbClr val="C3BFB6"/>
+                      </a:solidFill>
+                      <a:prstDash val="solid"/>
+                      <a:round/>
+                      <a:headEnd type="none" w="med" len="med"/>
+                      <a:tailEnd type="none" w="med" len="med"/>
+                    </a:lnR>
+                    <a:lnT w="6350" cap="flat" cmpd="sng" algn="ctr">
+                      <a:solidFill>
+                        <a:srgbClr val="C3BFB6"/>
+                      </a:solidFill>
+                      <a:prstDash val="solid"/>
+                      <a:round/>
+                      <a:headEnd type="none" w="med" len="med"/>
+                      <a:tailEnd type="none" w="med" len="med"/>
+                    </a:lnT>
+                    <a:lnB w="6350" cap="flat" cmpd="sng" algn="ctr">
+                      <a:solidFill>
+                        <a:srgbClr val="C3BFB6"/>
+                      </a:solidFill>
+                      <a:prstDash val="solid"/>
+                      <a:round/>
+                      <a:headEnd type="none" w="med" len="med"/>
+                      <a:tailEnd type="none" w="med" len="med"/>
+                    </a:lnB>
+                    <a:solidFill>
+                      <a:srgbClr val="F7F5F2"/>
+                    </a:solidFill>
+                  </a:tcPr>
+                </a:tc>
+                <a:tc>
+                  <a:txBody>
+                    <a:bodyPr/>
+                    <a:lstStyle/>
+                    <a:p>
+                      <a:pPr marL="0" marR="0" lvl="0" indent="0" algn="l" defTabSz="914400" rtl="0" eaLnBrk="1" fontAlgn="auto" latinLnBrk="0" hangingPunct="1">
+                        <a:lnSpc>
+                          <a:spcPct val="100000"/>
+                        </a:lnSpc>
+                        <a:spcBef>
+                          <a:spcPts val="0"/>
+                        </a:spcBef>
+                        <a:spcAft>
+                          <a:spcPts val="0"/>
+                        </a:spcAft>
+                        <a:buClrTx/>
+                        <a:buSzTx/>
+                        <a:buFontTx/>
+                        <a:buNone/>
+                        <a:tabLst/>
+                        <a:defRPr/>
+                      </a:pPr>
+                      <a:r>
+                        <a:rPr lang="en-US" altLang="zh-CN" sz="1400" dirty="0">
+                          <a:solidFill>
+                            <a:schemeClr val="tx1"/>
+                          </a:solidFill>
+                          <a:latin typeface="Calibri" charset="0"/>
+                          <a:ea typeface="Calibri" charset="0"/>
+                          <a:cs typeface="Calibri" charset="0"/>
+                        </a:rPr>
+                        <a:t>7012831</a:t>
+                      </a:r>
+                    </a:p>
+                  </a:txBody>
+                  <a:tcPr marL="121920" marR="121920" marT="60960" marB="60960" anchor="ctr">
                     <a:lnL w="6350" cap="flat" cmpd="sng" algn="ctr">
                       <a:solidFill>
                         <a:srgbClr val="C3BFB6"/>
@@ -22922,24 +24430,28 @@
                         <a:buNone/>
                       </a:pPr>
                       <a:r>
-                        <a:rPr lang="en-US" sz="1500" dirty="0">
+                        <a:rPr lang="en-US" altLang="zh-CN" sz="1400" b="0" i="0" kern="1200" dirty="0">
                           <a:solidFill>
-                            <a:srgbClr val="2B2B2B"/>
+                            <a:schemeClr val="tx1"/>
                           </a:solidFill>
-                          <a:latin typeface="Calibri" pitchFamily="34" charset="0"/>
-                          <a:ea typeface="Calibri" pitchFamily="34" charset="-122"/>
-                          <a:cs typeface="Calibri" pitchFamily="34" charset="-120"/>
+                          <a:effectLst/>
+                          <a:latin typeface="+mn-lt"/>
+                          <a:ea typeface="+mn-ea"/>
+                          <a:cs typeface="+mn-cs"/>
                         </a:rPr>
-                        <a:t>Atmospheric monitoring</a:t>
+                        <a:t>Local near-surface meteorological monitoring</a:t>
                       </a:r>
-                      <a:endParaRPr lang="en-US" sz="1500" dirty="0">
+                      <a:endParaRPr lang="en-US" sz="1400" dirty="0">
+                        <a:solidFill>
+                          <a:schemeClr val="tx1"/>
+                        </a:solidFill>
                         <a:latin typeface="Calibri" charset="0"/>
                         <a:ea typeface="Calibri" charset="0"/>
                         <a:cs typeface="Calibri" charset="0"/>
                       </a:endParaRPr>
                     </a:p>
                   </a:txBody>
-                  <a:tcPr marL="121920" marR="121920" marT="60960" marB="60960">
+                  <a:tcPr marL="121920" marR="121920" marT="60960" marB="60960" anchor="ctr">
                     <a:lnL w="6350" cap="flat" cmpd="sng" algn="ctr">
                       <a:solidFill>
                         <a:srgbClr val="C3BFB6"/>
@@ -22990,24 +24502,28 @@
                         <a:buNone/>
                       </a:pPr>
                       <a:r>
-                        <a:rPr lang="en-US" sz="1500" dirty="0">
+                        <a:rPr lang="en-US" altLang="zh-CN" sz="1400" b="0" i="0" kern="1200" dirty="0">
                           <a:solidFill>
-                            <a:srgbClr val="2B2B2B"/>
+                            <a:schemeClr val="tx1"/>
                           </a:solidFill>
-                          <a:latin typeface="Calibri" pitchFamily="34" charset="0"/>
-                          <a:ea typeface="Calibri" pitchFamily="34" charset="-122"/>
-                          <a:cs typeface="Calibri" pitchFamily="34" charset="-120"/>
+                          <a:effectLst/>
+                          <a:latin typeface="+mn-lt"/>
+                          <a:ea typeface="+mn-ea"/>
+                          <a:cs typeface="+mn-cs"/>
                         </a:rPr>
-                        <a:t>Aerosol index + smoke plume tracking</a:t>
+                        <a:t>Provide hourly weather covariates (wind, RH, temperature, precipitation, visibility) for daily feature engineering</a:t>
                       </a:r>
-                      <a:endParaRPr lang="en-US" sz="1500" dirty="0">
+                      <a:endParaRPr lang="en-US" sz="1400" dirty="0">
+                        <a:solidFill>
+                          <a:schemeClr val="tx1"/>
+                        </a:solidFill>
                         <a:latin typeface="Calibri" charset="0"/>
                         <a:ea typeface="Calibri" charset="0"/>
                         <a:cs typeface="Calibri" charset="0"/>
                       </a:endParaRPr>
                     </a:p>
                   </a:txBody>
-                  <a:tcPr marL="121920" marR="121920" marT="60960" marB="60960">
+                  <a:tcPr marL="121920" marR="121920" marT="60960" marB="60960" anchor="ctr">
                     <a:lnL w="6350" cap="flat" cmpd="sng" algn="ctr">
                       <a:solidFill>
                         <a:srgbClr val="C3BFB6"/>
@@ -23055,7 +24571,7 @@
                   </a:ext>
                 </a:extLst>
               </a:tr>
-              <a:tr h="345440">
+              <a:tr h="769409">
                 <a:tc>
                   <a:txBody>
                     <a:bodyPr/>
@@ -23065,9 +24581,9 @@
                         <a:buNone/>
                       </a:pPr>
                       <a:r>
-                        <a:rPr lang="en-US" sz="1500" dirty="0">
+                        <a:rPr lang="en-US" sz="1400" dirty="0">
                           <a:solidFill>
-                            <a:srgbClr val="2B2B2B"/>
+                            <a:schemeClr val="tx1"/>
                           </a:solidFill>
                           <a:latin typeface="Calibri" pitchFamily="34" charset="0"/>
                           <a:ea typeface="Calibri" pitchFamily="34" charset="-122"/>
@@ -23075,14 +24591,17 @@
                         </a:rPr>
                         <a:t>Ground PM2.5</a:t>
                       </a:r>
-                      <a:endParaRPr lang="en-US" sz="1500" dirty="0">
+                      <a:endParaRPr lang="en-US" sz="1400" dirty="0">
+                        <a:solidFill>
+                          <a:schemeClr val="tx1"/>
+                        </a:solidFill>
                         <a:latin typeface="Calibri" charset="0"/>
                         <a:ea typeface="Calibri" charset="0"/>
                         <a:cs typeface="Calibri" charset="0"/>
                       </a:endParaRPr>
                     </a:p>
                   </a:txBody>
-                  <a:tcPr marL="121920" marR="121920" marT="60960" marB="60960">
+                  <a:tcPr marL="121920" marR="121920" marT="60960" marB="60960" anchor="ctr">
                     <a:lnL w="6350" cap="flat" cmpd="sng" algn="ctr">
                       <a:solidFill>
                         <a:srgbClr val="C3BFB6"/>
@@ -23133,24 +24652,19 @@
                         <a:buNone/>
                       </a:pPr>
                       <a:r>
-                        <a:rPr lang="en-US" sz="1500" dirty="0">
+                        <a:rPr lang="en-US" sz="1400" dirty="0">
                           <a:solidFill>
-                            <a:srgbClr val="2B2B2B"/>
+                            <a:schemeClr val="tx1"/>
                           </a:solidFill>
-                          <a:latin typeface="Calibri" pitchFamily="34" charset="0"/>
-                          <a:ea typeface="Calibri" pitchFamily="34" charset="-122"/>
-                          <a:cs typeface="Calibri" pitchFamily="34" charset="-120"/>
+                          <a:latin typeface="Calibri" charset="0"/>
+                          <a:ea typeface="Calibri" charset="0"/>
+                          <a:cs typeface="Calibri" charset="0"/>
                         </a:rPr>
-                        <a:t>Official AQI network</a:t>
+                        <a:t>2016/3/10-2026/3/17</a:t>
                       </a:r>
-                      <a:endParaRPr lang="en-US" sz="1500" dirty="0">
-                        <a:latin typeface="Calibri" charset="0"/>
-                        <a:ea typeface="Calibri" charset="0"/>
-                        <a:cs typeface="Calibri" charset="0"/>
-                      </a:endParaRPr>
                     </a:p>
                   </a:txBody>
-                  <a:tcPr marL="121920" marR="121920" marT="60960" marB="60960">
+                  <a:tcPr marL="121920" marR="121920" marT="60960" marB="60960" anchor="ctr">
                     <a:lnL w="6350" cap="flat" cmpd="sng" algn="ctr">
                       <a:solidFill>
                         <a:srgbClr val="C3BFB6"/>
@@ -23201,9 +24715,143 @@
                         <a:buNone/>
                       </a:pPr>
                       <a:r>
-                        <a:rPr lang="en-US" sz="1500" dirty="0">
+                        <a:rPr lang="en-US" sz="1400" dirty="0">
                           <a:solidFill>
-                            <a:srgbClr val="2B2B2B"/>
+                            <a:schemeClr val="tx1"/>
+                          </a:solidFill>
+                          <a:latin typeface="Calibri" charset="0"/>
+                          <a:ea typeface="Calibri" charset="0"/>
+                          <a:cs typeface="Calibri" charset="0"/>
+                        </a:rPr>
+                        <a:t>3062*10</a:t>
+                      </a:r>
+                    </a:p>
+                  </a:txBody>
+                  <a:tcPr marL="121920" marR="121920" marT="60960" marB="60960" anchor="ctr">
+                    <a:lnL w="6350" cap="flat" cmpd="sng" algn="ctr">
+                      <a:solidFill>
+                        <a:srgbClr val="C3BFB6"/>
+                      </a:solidFill>
+                      <a:prstDash val="solid"/>
+                      <a:round/>
+                      <a:headEnd type="none" w="med" len="med"/>
+                      <a:tailEnd type="none" w="med" len="med"/>
+                    </a:lnL>
+                    <a:lnR w="6350" cap="flat" cmpd="sng" algn="ctr">
+                      <a:solidFill>
+                        <a:srgbClr val="C3BFB6"/>
+                      </a:solidFill>
+                      <a:prstDash val="solid"/>
+                      <a:round/>
+                      <a:headEnd type="none" w="med" len="med"/>
+                      <a:tailEnd type="none" w="med" len="med"/>
+                    </a:lnR>
+                    <a:lnT w="6350" cap="flat" cmpd="sng" algn="ctr">
+                      <a:solidFill>
+                        <a:srgbClr val="C3BFB6"/>
+                      </a:solidFill>
+                      <a:prstDash val="solid"/>
+                      <a:round/>
+                      <a:headEnd type="none" w="med" len="med"/>
+                      <a:tailEnd type="none" w="med" len="med"/>
+                    </a:lnT>
+                    <a:lnB w="6350" cap="flat" cmpd="sng" algn="ctr">
+                      <a:solidFill>
+                        <a:srgbClr val="C3BFB6"/>
+                      </a:solidFill>
+                      <a:prstDash val="solid"/>
+                      <a:round/>
+                      <a:headEnd type="none" w="med" len="med"/>
+                      <a:tailEnd type="none" w="med" len="med"/>
+                    </a:lnB>
+                    <a:solidFill>
+                      <a:srgbClr val="FFFFFF"/>
+                    </a:solidFill>
+                  </a:tcPr>
+                </a:tc>
+                <a:tc>
+                  <a:txBody>
+                    <a:bodyPr/>
+                    <a:lstStyle/>
+                    <a:p>
+                      <a:pPr marL="0" indent="0">
+                        <a:buNone/>
+                      </a:pPr>
+                      <a:r>
+                        <a:rPr lang="en-US" sz="1400" dirty="0">
+                          <a:solidFill>
+                            <a:schemeClr val="tx1"/>
+                          </a:solidFill>
+                          <a:latin typeface="Calibri" pitchFamily="34" charset="0"/>
+                          <a:ea typeface="Calibri" pitchFamily="34" charset="-122"/>
+                          <a:cs typeface="Calibri" pitchFamily="34" charset="-120"/>
+                        </a:rPr>
+                        <a:t>Official AQI network</a:t>
+                      </a:r>
+                      <a:endParaRPr lang="en-US" sz="1400" dirty="0">
+                        <a:solidFill>
+                          <a:schemeClr val="tx1"/>
+                        </a:solidFill>
+                        <a:latin typeface="Calibri" charset="0"/>
+                        <a:ea typeface="Calibri" charset="0"/>
+                        <a:cs typeface="Calibri" charset="0"/>
+                      </a:endParaRPr>
+                    </a:p>
+                  </a:txBody>
+                  <a:tcPr marL="121920" marR="121920" marT="60960" marB="60960" anchor="ctr">
+                    <a:lnL w="6350" cap="flat" cmpd="sng" algn="ctr">
+                      <a:solidFill>
+                        <a:srgbClr val="C3BFB6"/>
+                      </a:solidFill>
+                      <a:prstDash val="solid"/>
+                      <a:round/>
+                      <a:headEnd type="none" w="med" len="med"/>
+                      <a:tailEnd type="none" w="med" len="med"/>
+                    </a:lnL>
+                    <a:lnR w="6350" cap="flat" cmpd="sng" algn="ctr">
+                      <a:solidFill>
+                        <a:srgbClr val="C3BFB6"/>
+                      </a:solidFill>
+                      <a:prstDash val="solid"/>
+                      <a:round/>
+                      <a:headEnd type="none" w="med" len="med"/>
+                      <a:tailEnd type="none" w="med" len="med"/>
+                    </a:lnR>
+                    <a:lnT w="6350" cap="flat" cmpd="sng" algn="ctr">
+                      <a:solidFill>
+                        <a:srgbClr val="C3BFB6"/>
+                      </a:solidFill>
+                      <a:prstDash val="solid"/>
+                      <a:round/>
+                      <a:headEnd type="none" w="med" len="med"/>
+                      <a:tailEnd type="none" w="med" len="med"/>
+                    </a:lnT>
+                    <a:lnB w="6350" cap="flat" cmpd="sng" algn="ctr">
+                      <a:solidFill>
+                        <a:srgbClr val="C3BFB6"/>
+                      </a:solidFill>
+                      <a:prstDash val="solid"/>
+                      <a:round/>
+                      <a:headEnd type="none" w="med" len="med"/>
+                      <a:tailEnd type="none" w="med" len="med"/>
+                    </a:lnB>
+                    <a:solidFill>
+                      <a:srgbClr val="FFFFFF"/>
+                    </a:solidFill>
+                  </a:tcPr>
+                </a:tc>
+                <a:tc>
+                  <a:txBody>
+                    <a:bodyPr/>
+                    <a:lstStyle/>
+                    <a:p>
+                      <a:pPr marL="0" indent="0">
+                        <a:buNone/>
+                      </a:pPr>
+                      <a:r>
+                        <a:rPr lang="en-US" sz="1400" dirty="0">
+                          <a:solidFill>
+                            <a:schemeClr val="tx1"/>
                           </a:solidFill>
                           <a:latin typeface="Calibri" pitchFamily="34" charset="0"/>
                           <a:ea typeface="Calibri" pitchFamily="34" charset="-122"/>
@@ -23211,14 +24859,17 @@
                         </a:rPr>
                         <a:t>Ground-truthed target variable</a:t>
                       </a:r>
-                      <a:endParaRPr lang="en-US" sz="1500" dirty="0">
+                      <a:endParaRPr lang="en-US" sz="1400" dirty="0">
+                        <a:solidFill>
+                          <a:schemeClr val="tx1"/>
+                        </a:solidFill>
                         <a:latin typeface="Calibri" charset="0"/>
                         <a:ea typeface="Calibri" charset="0"/>
                         <a:cs typeface="Calibri" charset="0"/>
                       </a:endParaRPr>
                     </a:p>
                   </a:txBody>
-                  <a:tcPr marL="121920" marR="121920" marT="60960" marB="60960">
+                  <a:tcPr marL="121920" marR="121920" marT="60960" marB="60960" anchor="ctr">
                     <a:lnL w="6350" cap="flat" cmpd="sng" algn="ctr">
                       <a:solidFill>
                         <a:srgbClr val="C3BFB6"/>
@@ -23278,7 +24929,7 @@
         </p:nvSpPr>
         <p:spPr>
           <a:xfrm>
-            <a:off x="731520" y="4267200"/>
+            <a:off x="680721" y="5868849"/>
             <a:ext cx="10728960" cy="670560"/>
           </a:xfrm>
           <a:prstGeom prst="rect">
@@ -23305,7 +24956,7 @@
         </p:nvSpPr>
         <p:spPr>
           <a:xfrm>
-            <a:off x="975360" y="4267200"/>
+            <a:off x="975360" y="5854065"/>
             <a:ext cx="10241280" cy="670560"/>
           </a:xfrm>
           <a:prstGeom prst="rect">
@@ -23319,7 +24970,7 @@
           <a:lstStyle/>
           <a:p>
             <a:r>
-              <a:rPr lang="en-US" sz="1600" b="1" dirty="0">
+              <a:rPr lang="en-US" sz="2000" b="1" dirty="0">
                 <a:solidFill>
                   <a:srgbClr val="FF671F"/>
                 </a:solidFill>
@@ -23327,9 +24978,8 @@
                 <a:ea typeface="Calibri" pitchFamily="34" charset="-122"/>
                 <a:cs typeface="Calibri" pitchFamily="34" charset="-120"/>
               </a:rPr>
-              <a:t>Synergy: Together they capture fire emissions → atmospheric transport → health impact</a:t>
-            </a:r>
-            <a:endParaRPr lang="en-US" sz="1600" dirty="0"/>
+              <a:t>They connect fire emissions, atmospheric transport, and health impacts.</a:t>
+            </a:r>
           </a:p>
         </p:txBody>
       </p:sp>
@@ -23341,7 +24991,7 @@
         </p:nvSpPr>
         <p:spPr>
           <a:xfrm>
-            <a:off x="731520" y="5120640"/>
+            <a:off x="975360" y="6880860"/>
             <a:ext cx="10728960" cy="426720"/>
           </a:xfrm>
           <a:prstGeom prst="rect">
@@ -23375,10 +25025,16 @@
           <p:cNvGraphicFramePr>
             <a:graphicFrameLocks noGrp="1"/>
           </p:cNvGraphicFramePr>
-          <p:nvPr/>
+          <p:nvPr>
+            <p:extLst>
+              <p:ext uri="{D42A27DB-BD31-4B8C-83A1-F6EECF244321}">
+                <p14:modId xmlns:p14="http://schemas.microsoft.com/office/powerpoint/2010/main" val="4136772557"/>
+              </p:ext>
+            </p:extLst>
+          </p:nvPr>
         </p:nvGraphicFramePr>
         <p:xfrm>
-          <a:off x="1828800" y="5547360"/>
+          <a:off x="2072640" y="7307580"/>
           <a:ext cx="7315200" cy="914400"/>
         </p:xfrm>
         <a:graphic>
@@ -24566,8 +26222,8 @@
         </p:nvSpPr>
         <p:spPr>
           <a:xfrm>
-            <a:off x="731520" y="1463040"/>
-            <a:ext cx="5120640" cy="4632960"/>
+            <a:off x="731520" y="1494458"/>
+            <a:ext cx="5120640" cy="3479378"/>
           </a:xfrm>
           <a:prstGeom prst="rect">
             <a:avLst/>
@@ -24636,7 +26292,7 @@
         </p:nvSpPr>
         <p:spPr>
           <a:xfrm>
-            <a:off x="1097280" y="2255520"/>
+            <a:off x="1097280" y="2428366"/>
             <a:ext cx="2194560" cy="426720"/>
           </a:xfrm>
           <a:prstGeom prst="rect">
@@ -24672,7 +26328,7 @@
         </p:nvSpPr>
         <p:spPr>
           <a:xfrm>
-            <a:off x="3291840" y="2255520"/>
+            <a:off x="3291840" y="2428366"/>
             <a:ext cx="2438400" cy="426720"/>
           </a:xfrm>
           <a:prstGeom prst="rect">
@@ -24694,7 +26350,7 @@
                 <a:ea typeface="Calibri" pitchFamily="34" charset="-122"/>
                 <a:cs typeface="Calibri" pitchFamily="34" charset="-120"/>
               </a:rPr>
-              <a:t>April 2024 – April 2025</a:t>
+              <a:t>April 2018 – April 2024</a:t>
             </a:r>
             <a:endParaRPr lang="en-US" sz="1467" dirty="0"/>
           </a:p>
@@ -24708,7 +26364,7 @@
         </p:nvSpPr>
         <p:spPr>
           <a:xfrm>
-            <a:off x="1097280" y="2926080"/>
+            <a:off x="1097280" y="3356677"/>
             <a:ext cx="2194560" cy="426720"/>
           </a:xfrm>
           <a:prstGeom prst="rect">
@@ -24744,7 +26400,7 @@
         </p:nvSpPr>
         <p:spPr>
           <a:xfrm>
-            <a:off x="3291840" y="2926080"/>
+            <a:off x="3291840" y="3356677"/>
             <a:ext cx="2438400" cy="426720"/>
           </a:xfrm>
           <a:prstGeom prst="rect">
@@ -24780,7 +26436,7 @@
         </p:nvSpPr>
         <p:spPr>
           <a:xfrm>
-            <a:off x="1097280" y="3596640"/>
+            <a:off x="1097280" y="3818535"/>
             <a:ext cx="2194560" cy="426720"/>
           </a:xfrm>
           <a:prstGeom prst="rect">
@@ -24816,7 +26472,7 @@
         </p:nvSpPr>
         <p:spPr>
           <a:xfrm>
-            <a:off x="3291840" y="3596640"/>
+            <a:off x="3291840" y="3818535"/>
             <a:ext cx="2438400" cy="426720"/>
           </a:xfrm>
           <a:prstGeom prst="rect">
@@ -24852,7 +26508,7 @@
         </p:nvSpPr>
         <p:spPr>
           <a:xfrm>
-            <a:off x="1097280" y="4267200"/>
+            <a:off x="1097280" y="4245255"/>
             <a:ext cx="2194560" cy="426720"/>
           </a:xfrm>
           <a:prstGeom prst="rect">
@@ -24888,7 +26544,7 @@
         </p:nvSpPr>
         <p:spPr>
           <a:xfrm>
-            <a:off x="3291840" y="4267200"/>
+            <a:off x="3291840" y="4245255"/>
             <a:ext cx="2438400" cy="426720"/>
           </a:xfrm>
           <a:prstGeom prst="rect">
@@ -24924,8 +26580,8 @@
         </p:nvSpPr>
         <p:spPr>
           <a:xfrm>
-            <a:off x="975360" y="4876800"/>
-            <a:ext cx="4632960" cy="975360"/>
+            <a:off x="731520" y="5164531"/>
+            <a:ext cx="10728960" cy="975360"/>
           </a:xfrm>
           <a:prstGeom prst="rect">
             <a:avLst/>
@@ -24939,7 +26595,7 @@
           <a:bodyPr/>
           <a:lstStyle/>
           <a:p>
-            <a:endParaRPr lang="zh-CN" altLang="en-US" sz="2400"/>
+            <a:endParaRPr lang="zh-CN" altLang="en-US" sz="2800"/>
           </a:p>
         </p:txBody>
       </p:sp>
@@ -24951,8 +26607,8 @@
         </p:nvSpPr>
         <p:spPr>
           <a:xfrm>
-            <a:off x="1097280" y="4876800"/>
-            <a:ext cx="4389120" cy="975360"/>
+            <a:off x="975360" y="5164531"/>
+            <a:ext cx="10241280" cy="975360"/>
           </a:xfrm>
           <a:prstGeom prst="rect">
             <a:avLst/>
@@ -24965,31 +26621,16 @@
           <a:lstStyle/>
           <a:p>
             <a:r>
-              <a:rPr lang="en-US" sz="1333" dirty="0">
+              <a:rPr lang="en-US" sz="2000" b="1" dirty="0">
                 <a:solidFill>
                   <a:srgbClr val="FF671F"/>
                 </a:solidFill>
-                <a:latin typeface="Calibri" pitchFamily="34" charset="0"/>
                 <a:ea typeface="Calibri" pitchFamily="34" charset="-122"/>
                 <a:cs typeface="Calibri" pitchFamily="34" charset="-120"/>
               </a:rPr>
-              <a:t>7.7% data removed | Severe class imbalance</a:t>
-            </a:r>
-            <a:endParaRPr lang="en-US" sz="1333" dirty="0"/>
-          </a:p>
-          <a:p>
-            <a:r>
-              <a:rPr lang="en-US" sz="1333" dirty="0">
-                <a:solidFill>
-                  <a:srgbClr val="FF671F"/>
-                </a:solidFill>
-                <a:latin typeface="Calibri" pitchFamily="34" charset="0"/>
-                <a:ea typeface="Calibri" pitchFamily="34" charset="-122"/>
-                <a:cs typeface="Calibri" pitchFamily="34" charset="-120"/>
-              </a:rPr>
-              <a:t>Balanced class weights required</a:t>
-            </a:r>
-            <a:endParaRPr lang="en-US" sz="1333" dirty="0"/>
+              <a:t>We removed 7.7% of the data due to missing values, invalid PM2.5 entries, and low-quality rows, while also addressing severe class imbalance with balanced class weights.</a:t>
+            </a:r>
+            <a:endParaRPr lang="en-US" sz="2000" b="1" dirty="0"/>
           </a:p>
         </p:txBody>
       </p:sp>
@@ -25001,7 +26642,7 @@
         </p:nvSpPr>
         <p:spPr>
           <a:xfrm>
-            <a:off x="6339840" y="1584960"/>
+            <a:off x="6339840" y="1450848"/>
             <a:ext cx="5120640" cy="487680"/>
           </a:xfrm>
           <a:prstGeom prst="rect">
@@ -25023,7 +26664,7 @@
                 <a:ea typeface="Calibri" pitchFamily="34" charset="-122"/>
                 <a:cs typeface="Calibri" pitchFamily="34" charset="-120"/>
               </a:rPr>
-              <a:t>Identified Issues</a:t>
+              <a:t>Identified Issues from the original one</a:t>
             </a:r>
             <a:endParaRPr lang="en-US" sz="2000" dirty="0"/>
           </a:p>
@@ -25035,11 +26676,17 @@
           <p:cNvGraphicFramePr>
             <a:graphicFrameLocks noGrp="1"/>
           </p:cNvGraphicFramePr>
-          <p:nvPr/>
+          <p:nvPr>
+            <p:extLst>
+              <p:ext uri="{D42A27DB-BD31-4B8C-83A1-F6EECF244321}">
+                <p14:modId xmlns:p14="http://schemas.microsoft.com/office/powerpoint/2010/main" val="4033728084"/>
+              </p:ext>
+            </p:extLst>
+          </p:nvPr>
         </p:nvGraphicFramePr>
         <p:xfrm>
-          <a:off x="6339840" y="2194560"/>
-          <a:ext cx="5120640" cy="1752600"/>
+          <a:off x="6339840" y="2060448"/>
+          <a:ext cx="5120640" cy="2881970"/>
         </p:xfrm>
         <a:graphic>
           <a:graphicData uri="http://schemas.openxmlformats.org/drawingml/2006/table">
@@ -25061,7 +26708,7 @@
                   </a:extLst>
                 </a:gridCol>
               </a:tblGrid>
-              <a:tr h="345440">
+              <a:tr h="576394">
                 <a:tc>
                   <a:txBody>
                     <a:bodyPr/>
@@ -25088,7 +26735,7 @@
                       </a:endParaRPr>
                     </a:p>
                   </a:txBody>
-                  <a:tcPr marL="121920" marR="121920" marT="60960" marB="60960">
+                  <a:tcPr marL="121920" marR="121920" marT="60960" marB="60960" anchor="ctr">
                     <a:lnL w="6350" cap="flat" cmpd="sng" algn="ctr">
                       <a:solidFill>
                         <a:srgbClr val="C3BFB6"/>
@@ -25156,7 +26803,7 @@
                       </a:endParaRPr>
                     </a:p>
                   </a:txBody>
-                  <a:tcPr marL="121920" marR="121920" marT="60960" marB="60960">
+                  <a:tcPr marL="121920" marR="121920" marT="60960" marB="60960" anchor="ctr">
                     <a:lnL w="6350" cap="flat" cmpd="sng" algn="ctr">
                       <a:solidFill>
                         <a:srgbClr val="C3BFB6"/>
@@ -25204,7 +26851,7 @@
                   </a:ext>
                 </a:extLst>
               </a:tr>
-              <a:tr h="345440">
+              <a:tr h="576394">
                 <a:tc>
                   <a:txBody>
                     <a:bodyPr/>
@@ -25231,7 +26878,7 @@
                       </a:endParaRPr>
                     </a:p>
                   </a:txBody>
-                  <a:tcPr marL="121920" marR="121920" marT="60960" marB="60960">
+                  <a:tcPr marL="121920" marR="121920" marT="60960" marB="60960" anchor="ctr">
                     <a:lnL w="6350" cap="flat" cmpd="sng" algn="ctr">
                       <a:solidFill>
                         <a:srgbClr val="C3BFB6"/>
@@ -25299,7 +26946,7 @@
                       </a:endParaRPr>
                     </a:p>
                   </a:txBody>
-                  <a:tcPr marL="121920" marR="121920" marT="60960" marB="60960">
+                  <a:tcPr marL="121920" marR="121920" marT="60960" marB="60960" anchor="ctr">
                     <a:lnL w="6350" cap="flat" cmpd="sng" algn="ctr">
                       <a:solidFill>
                         <a:srgbClr val="C3BFB6"/>
@@ -25347,7 +26994,7 @@
                   </a:ext>
                 </a:extLst>
               </a:tr>
-              <a:tr h="345440">
+              <a:tr h="576394">
                 <a:tc>
                   <a:txBody>
                     <a:bodyPr/>
@@ -25374,7 +27021,7 @@
                       </a:endParaRPr>
                     </a:p>
                   </a:txBody>
-                  <a:tcPr marL="121920" marR="121920" marT="60960" marB="60960">
+                  <a:tcPr marL="121920" marR="121920" marT="60960" marB="60960" anchor="ctr">
                     <a:lnL w="6350" cap="flat" cmpd="sng" algn="ctr">
                       <a:solidFill>
                         <a:srgbClr val="C3BFB6"/>
@@ -25442,7 +27089,7 @@
                       </a:endParaRPr>
                     </a:p>
                   </a:txBody>
-                  <a:tcPr marL="121920" marR="121920" marT="60960" marB="60960">
+                  <a:tcPr marL="121920" marR="121920" marT="60960" marB="60960" anchor="ctr">
                     <a:lnL w="6350" cap="flat" cmpd="sng" algn="ctr">
                       <a:solidFill>
                         <a:srgbClr val="C3BFB6"/>
@@ -25490,7 +27137,7 @@
                   </a:ext>
                 </a:extLst>
               </a:tr>
-              <a:tr h="345440">
+              <a:tr h="576394">
                 <a:tc>
                   <a:txBody>
                     <a:bodyPr/>
@@ -25517,7 +27164,7 @@
                       </a:endParaRPr>
                     </a:p>
                   </a:txBody>
-                  <a:tcPr marL="121920" marR="121920" marT="60960" marB="60960">
+                  <a:tcPr marL="121920" marR="121920" marT="60960" marB="60960" anchor="ctr">
                     <a:lnL w="6350" cap="flat" cmpd="sng" algn="ctr">
                       <a:solidFill>
                         <a:srgbClr val="C3BFB6"/>
@@ -25585,7 +27232,7 @@
                       </a:endParaRPr>
                     </a:p>
                   </a:txBody>
-                  <a:tcPr marL="121920" marR="121920" marT="60960" marB="60960">
+                  <a:tcPr marL="121920" marR="121920" marT="60960" marB="60960" anchor="ctr">
                     <a:lnL w="6350" cap="flat" cmpd="sng" algn="ctr">
                       <a:solidFill>
                         <a:srgbClr val="C3BFB6"/>
@@ -25633,7 +27280,7 @@
                   </a:ext>
                 </a:extLst>
               </a:tr>
-              <a:tr h="345440">
+              <a:tr h="576394">
                 <a:tc>
                   <a:txBody>
                     <a:bodyPr/>
@@ -25660,7 +27307,7 @@
                       </a:endParaRPr>
                     </a:p>
                   </a:txBody>
-                  <a:tcPr marL="121920" marR="121920" marT="60960" marB="60960">
+                  <a:tcPr marL="121920" marR="121920" marT="60960" marB="60960" anchor="ctr">
                     <a:lnL w="6350" cap="flat" cmpd="sng" algn="ctr">
                       <a:solidFill>
                         <a:srgbClr val="C3BFB6"/>
@@ -25728,7 +27375,7 @@
                       </a:endParaRPr>
                     </a:p>
                   </a:txBody>
-                  <a:tcPr marL="121920" marR="121920" marT="60960" marB="60960">
+                  <a:tcPr marL="121920" marR="121920" marT="60960" marB="60960" anchor="ctr">
                     <a:lnL w="6350" cap="flat" cmpd="sng" algn="ctr">
                       <a:solidFill>
                         <a:srgbClr val="C3BFB6"/>
@@ -25807,6 +27454,116 @@
               <a:t>5</a:t>
             </a:fld>
             <a:endParaRPr lang="en-US" dirty="0"/>
+          </a:p>
+        </p:txBody>
+      </p:sp>
+      <p:sp>
+        <p:nvSpPr>
+          <p:cNvPr id="2" name="Text 6">
+            <a:extLst>
+              <a:ext uri="{FF2B5EF4-FFF2-40B4-BE49-F238E27FC236}">
+                <a16:creationId xmlns:a16="http://schemas.microsoft.com/office/drawing/2014/main" id="{529D37C1-9CC2-1E84-B4F4-8D0FA4DA580F}"/>
+              </a:ext>
+            </a:extLst>
+          </p:cNvPr>
+          <p:cNvSpPr/>
+          <p:nvPr/>
+        </p:nvSpPr>
+        <p:spPr>
+          <a:xfrm>
+            <a:off x="1097280" y="2892662"/>
+            <a:ext cx="2194560" cy="426720"/>
+          </a:xfrm>
+          <a:prstGeom prst="rect">
+            <a:avLst/>
+          </a:prstGeom>
+          <a:noFill/>
+          <a:ln/>
+        </p:spPr>
+        <p:txBody>
+          <a:bodyPr wrap="square" lIns="0" tIns="0" rIns="0" bIns="0" rtlCol="0" anchor="ctr"/>
+          <a:lstStyle/>
+          <a:p>
+            <a:r>
+              <a:rPr lang="en-US" sz="1467" b="1" dirty="0">
+                <a:solidFill>
+                  <a:srgbClr val="2B2B2B"/>
+                </a:solidFill>
+                <a:latin typeface="Calibri" pitchFamily="34" charset="0"/>
+                <a:ea typeface="Calibri" pitchFamily="34" charset="-122"/>
+                <a:cs typeface="Calibri" pitchFamily="34" charset="-120"/>
+              </a:rPr>
+              <a:t>Model Ready</a:t>
+            </a:r>
+            <a:endParaRPr lang="en-US" sz="1467" dirty="0"/>
+          </a:p>
+        </p:txBody>
+      </p:sp>
+      <p:sp>
+        <p:nvSpPr>
+          <p:cNvPr id="4" name="Text 7">
+            <a:extLst>
+              <a:ext uri="{FF2B5EF4-FFF2-40B4-BE49-F238E27FC236}">
+                <a16:creationId xmlns:a16="http://schemas.microsoft.com/office/drawing/2014/main" id="{22B9EF45-C253-3409-1711-9735F88B371B}"/>
+              </a:ext>
+            </a:extLst>
+          </p:cNvPr>
+          <p:cNvSpPr/>
+          <p:nvPr/>
+        </p:nvSpPr>
+        <p:spPr>
+          <a:xfrm>
+            <a:off x="3291840" y="2892662"/>
+            <a:ext cx="2438400" cy="426720"/>
+          </a:xfrm>
+          <a:prstGeom prst="rect">
+            <a:avLst/>
+          </a:prstGeom>
+          <a:noFill/>
+          <a:ln/>
+        </p:spPr>
+        <p:txBody>
+          <a:bodyPr wrap="square" lIns="0" tIns="0" rIns="0" bIns="0" rtlCol="0" anchor="ctr"/>
+          <a:lstStyle/>
+          <a:p>
+            <a:r>
+              <a:rPr lang="en-US" sz="1467" b="1" dirty="0">
+                <a:solidFill>
+                  <a:srgbClr val="FF671F"/>
+                </a:solidFill>
+                <a:latin typeface="Calibri" pitchFamily="34" charset="0"/>
+                <a:ea typeface="Calibri" pitchFamily="34" charset="-122"/>
+                <a:cs typeface="Calibri" pitchFamily="34" charset="-120"/>
+              </a:rPr>
+              <a:t>2,361  records </a:t>
+            </a:r>
+            <a:r>
+              <a:rPr lang="zh-CN" altLang="en-US" sz="1467" b="1" dirty="0">
+                <a:solidFill>
+                  <a:srgbClr val="FF671F"/>
+                </a:solidFill>
+                <a:latin typeface="Calibri" pitchFamily="34" charset="0"/>
+                <a:ea typeface="Calibri" pitchFamily="34" charset="-122"/>
+                <a:cs typeface="Calibri" pitchFamily="34" charset="-120"/>
+              </a:rPr>
+              <a:t>→ </a:t>
+            </a:r>
+            <a:r>
+              <a:rPr lang="en-US" altLang="zh-CN" sz="1467" b="1" dirty="0">
+                <a:solidFill>
+                  <a:srgbClr val="FF671F"/>
+                </a:solidFill>
+                <a:latin typeface="Calibri" pitchFamily="34" charset="0"/>
+                <a:ea typeface="Calibri" pitchFamily="34" charset="-122"/>
+                <a:cs typeface="Calibri" pitchFamily="34" charset="-120"/>
+              </a:rPr>
+              <a:t>2,007 records</a:t>
+            </a:r>
+            <a:endParaRPr lang="en-US" sz="1467" b="1" dirty="0">
+              <a:solidFill>
+                <a:srgbClr val="FF671F"/>
+              </a:solidFill>
+            </a:endParaRPr>
           </a:p>
         </p:txBody>
       </p:sp>
@@ -26486,7 +28243,7 @@
           <a:lstStyle/>
           <a:p>
             <a:r>
-              <a:rPr lang="en-US" sz="1600" b="1" dirty="0">
+              <a:rPr lang="en-US" sz="2000" b="1" dirty="0">
                 <a:solidFill>
                   <a:srgbClr val="FF671F"/>
                 </a:solidFill>
@@ -26494,9 +28251,9 @@
                 <a:ea typeface="Calibri" pitchFamily="34" charset="-122"/>
                 <a:cs typeface="Calibri" pitchFamily="34" charset="-120"/>
               </a:rPr>
-              <a:t>Feature Engineering: Fire proximity, fire intensity score, wind-fire alignment</a:t>
-            </a:r>
-            <a:endParaRPr lang="en-US" sz="1600" dirty="0"/>
+              <a:t>After cleaning and feature engineering, we retained 2,007 records, built 34 predictors, and identified 74 high-pollution days, with a 3.7% event rate.</a:t>
+            </a:r>
+            <a:endParaRPr lang="en-US" sz="2000" dirty="0"/>
           </a:p>
         </p:txBody>
       </p:sp>
@@ -26857,6 +28614,44 @@
               <a:t>6</a:t>
             </a:fld>
             <a:endParaRPr lang="en-US" dirty="0"/>
+          </a:p>
+        </p:txBody>
+      </p:sp>
+      <p:sp>
+        <p:nvSpPr>
+          <p:cNvPr id="2" name="Shape 21">
+            <a:extLst>
+              <a:ext uri="{FF2B5EF4-FFF2-40B4-BE49-F238E27FC236}">
+                <a16:creationId xmlns:a16="http://schemas.microsoft.com/office/drawing/2014/main" id="{3A3E6EDD-B728-B095-E030-D878017CA54D}"/>
+              </a:ext>
+            </a:extLst>
+          </p:cNvPr>
+          <p:cNvSpPr/>
+          <p:nvPr/>
+        </p:nvSpPr>
+        <p:spPr>
+          <a:xfrm>
+            <a:off x="365760" y="3413760"/>
+            <a:ext cx="11582400" cy="64008"/>
+          </a:xfrm>
+          <a:prstGeom prst="rect">
+            <a:avLst/>
+          </a:prstGeom>
+          <a:solidFill>
+            <a:srgbClr val="E84855"/>
+          </a:solidFill>
+          <a:ln w="12700">
+            <a:solidFill>
+              <a:srgbClr val="E84855"/>
+            </a:solidFill>
+            <a:prstDash val="solid"/>
+          </a:ln>
+        </p:spPr>
+        <p:txBody>
+          <a:bodyPr/>
+          <a:lstStyle/>
+          <a:p>
+            <a:endParaRPr lang="zh-CN" altLang="en-US"/>
           </a:p>
         </p:txBody>
       </p:sp>
@@ -27272,7 +29067,7 @@
           <a:lstStyle/>
           <a:p>
             <a:r>
-              <a:rPr lang="en-US" sz="1467" dirty="0">
+              <a:rPr lang="en-US" sz="2000" b="1" dirty="0">
                 <a:solidFill>
                   <a:srgbClr val="EE2C2A"/>
                 </a:solidFill>
@@ -27280,9 +29075,22 @@
                 <a:ea typeface="Calibri" pitchFamily="34" charset="-122"/>
                 <a:cs typeface="Calibri" pitchFamily="34" charset="-120"/>
               </a:rPr>
-              <a:t>Problem: Model gets 97% accuracy by always predicting LOW  →  Solution: Balanced class weights in models</a:t>
-            </a:r>
-            <a:endParaRPr lang="en-US" sz="1467" dirty="0"/>
+              <a:t>The model achieved 97% accuracy by mostly predicting the LOW class.</a:t>
+            </a:r>
+          </a:p>
+          <a:p>
+            <a:r>
+              <a:rPr lang="en-US" sz="2000" b="1" dirty="0">
+                <a:solidFill>
+                  <a:srgbClr val="EE2C2A"/>
+                </a:solidFill>
+                <a:latin typeface="Calibri" pitchFamily="34" charset="0"/>
+                <a:ea typeface="Calibri" pitchFamily="34" charset="-122"/>
+                <a:cs typeface="Calibri" pitchFamily="34" charset="-120"/>
+              </a:rPr>
+              <a:t>We therefore used balanced class weights to address the class imbalance.</a:t>
+            </a:r>
+            <a:endParaRPr lang="en-US" sz="2000" b="1" dirty="0"/>
           </a:p>
         </p:txBody>
       </p:sp>
@@ -27913,7 +29721,7 @@
         </p:nvSpPr>
         <p:spPr>
           <a:xfrm>
-            <a:off x="4267200" y="3596640"/>
+            <a:off x="4206240" y="3429000"/>
             <a:ext cx="3657600" cy="548640"/>
           </a:xfrm>
           <a:prstGeom prst="rect">
@@ -27948,25 +29756,31 @@
           <p:cNvGraphicFramePr>
             <a:graphicFrameLocks noGrp="1"/>
           </p:cNvGraphicFramePr>
-          <p:nvPr/>
+          <p:nvPr>
+            <p:extLst>
+              <p:ext uri="{D42A27DB-BD31-4B8C-83A1-F6EECF244321}">
+                <p14:modId xmlns:p14="http://schemas.microsoft.com/office/powerpoint/2010/main" val="1071789679"/>
+              </p:ext>
+            </p:extLst>
+          </p:nvPr>
         </p:nvGraphicFramePr>
         <p:xfrm>
-          <a:off x="3048000" y="4389120"/>
-          <a:ext cx="6096000" cy="1097280"/>
+          <a:off x="6951133" y="4218093"/>
+          <a:ext cx="4814147" cy="1097280"/>
         </p:xfrm>
         <a:graphic>
           <a:graphicData uri="http://schemas.openxmlformats.org/drawingml/2006/table">
             <a:tbl>
               <a:tblPr/>
               <a:tblGrid>
-                <a:gridCol w="3657600">
+                <a:gridCol w="2322404">
                   <a:extLst>
                     <a:ext uri="{9D8B030D-6E8A-4147-A177-3AD203B41FA5}">
                       <a16:colId xmlns:a16="http://schemas.microsoft.com/office/drawing/2014/main" val="20000"/>
                     </a:ext>
                   </a:extLst>
                 </a:gridCol>
-                <a:gridCol w="2438400">
+                <a:gridCol w="2491743">
                   <a:extLst>
                     <a:ext uri="{9D8B030D-6E8A-4147-A177-3AD203B41FA5}">
                       <a16:colId xmlns:a16="http://schemas.microsoft.com/office/drawing/2014/main" val="20001"/>
@@ -28346,7 +30160,7 @@
                           <a:ea typeface="Calibri" pitchFamily="34" charset="-122"/>
                           <a:cs typeface="Calibri" pitchFamily="34" charset="-120"/>
                         </a:rPr>
-                        <a:t>Apr 2024 – Apr 2025</a:t>
+                        <a:t>2018/4-2025/4</a:t>
                       </a:r>
                       <a:endParaRPr lang="en-US" sz="1600" dirty="0">
                         <a:latin typeface="Calibri" charset="0"/>
@@ -28437,6 +30251,36 @@
           </a:p>
         </p:txBody>
       </p:sp>
+      <p:pic>
+        <p:nvPicPr>
+          <p:cNvPr id="24" name="Picture 23">
+            <a:extLst>
+              <a:ext uri="{FF2B5EF4-FFF2-40B4-BE49-F238E27FC236}">
+                <a16:creationId xmlns:a16="http://schemas.microsoft.com/office/drawing/2014/main" id="{0179D3C6-DE99-220A-6980-0138593CCECF}"/>
+              </a:ext>
+            </a:extLst>
+          </p:cNvPr>
+          <p:cNvPicPr>
+            <a:picLocks noChangeAspect="1"/>
+          </p:cNvPicPr>
+          <p:nvPr/>
+        </p:nvPicPr>
+        <p:blipFill>
+          <a:blip r:embed="rId7"/>
+          <a:stretch>
+            <a:fillRect/>
+          </a:stretch>
+        </p:blipFill>
+        <p:spPr>
+          <a:xfrm>
+            <a:off x="609600" y="4206240"/>
+            <a:ext cx="5985933" cy="2089050"/>
+          </a:xfrm>
+          <a:prstGeom prst="rect">
+            <a:avLst/>
+          </a:prstGeom>
+        </p:spPr>
+      </p:pic>
     </p:spTree>
   </p:cSld>
   <p:clrMapOvr>
@@ -28657,7 +30501,7 @@
           <a:lstStyle/>
           <a:p>
             <a:r>
-              <a:rPr lang="en-US" sz="1467" dirty="0">
+              <a:rPr lang="en-US" b="1" dirty="0">
                 <a:solidFill>
                   <a:srgbClr val="8C857B"/>
                 </a:solidFill>
@@ -28667,7 +30511,7 @@
               </a:rPr>
               <a:t>Linear baseline</a:t>
             </a:r>
-            <a:endParaRPr lang="en-US" sz="1467" dirty="0"/>
+            <a:endParaRPr lang="en-US" b="1" dirty="0"/>
           </a:p>
         </p:txBody>
       </p:sp>
@@ -28693,7 +30537,7 @@
           <a:lstStyle/>
           <a:p>
             <a:r>
-              <a:rPr lang="en-US" sz="1467" dirty="0">
+              <a:rPr lang="en-US" b="1" dirty="0">
                 <a:solidFill>
                   <a:srgbClr val="8C857B"/>
                 </a:solidFill>
@@ -28703,7 +30547,7 @@
               </a:rPr>
               <a:t>Interpretable coefficients</a:t>
             </a:r>
-            <a:endParaRPr lang="en-US" sz="1467" dirty="0"/>
+            <a:endParaRPr lang="en-US" b="1" dirty="0"/>
           </a:p>
         </p:txBody>
       </p:sp>
@@ -28729,7 +30573,7 @@
           <a:lstStyle/>
           <a:p>
             <a:r>
-              <a:rPr lang="en-US" sz="1467" dirty="0">
+              <a:rPr lang="en-US" b="1" dirty="0">
                 <a:solidFill>
                   <a:srgbClr val="8C857B"/>
                 </a:solidFill>
@@ -28739,7 +30583,7 @@
               </a:rPr>
               <a:t>Fast &amp; explainable</a:t>
             </a:r>
-            <a:endParaRPr lang="en-US" sz="1467" dirty="0"/>
+            <a:endParaRPr lang="en-US" b="1" dirty="0"/>
           </a:p>
         </p:txBody>
       </p:sp>
@@ -28902,7 +30746,7 @@
           <a:lstStyle/>
           <a:p>
             <a:r>
-              <a:rPr lang="en-US" sz="1467" dirty="0">
+              <a:rPr lang="en-US" b="1" dirty="0">
                 <a:solidFill>
                   <a:srgbClr val="8C857B"/>
                 </a:solidFill>
@@ -28912,7 +30756,7 @@
               </a:rPr>
               <a:t>Non-linear ensemble</a:t>
             </a:r>
-            <a:endParaRPr lang="en-US" sz="1467" dirty="0"/>
+            <a:endParaRPr lang="en-US" b="1" dirty="0"/>
           </a:p>
         </p:txBody>
       </p:sp>
@@ -28938,7 +30782,7 @@
           <a:lstStyle/>
           <a:p>
             <a:r>
-              <a:rPr lang="en-US" sz="1467" dirty="0">
+              <a:rPr lang="en-US" b="1" dirty="0">
                 <a:solidFill>
                   <a:srgbClr val="8C857B"/>
                 </a:solidFill>
@@ -28948,7 +30792,7 @@
               </a:rPr>
               <a:t>Feature importance</a:t>
             </a:r>
-            <a:endParaRPr lang="en-US" sz="1467" dirty="0"/>
+            <a:endParaRPr lang="en-US" b="1" dirty="0"/>
           </a:p>
         </p:txBody>
       </p:sp>
@@ -28974,7 +30818,7 @@
           <a:lstStyle/>
           <a:p>
             <a:r>
-              <a:rPr lang="en-US" sz="1467" dirty="0">
+              <a:rPr lang="en-US" b="1" dirty="0">
                 <a:solidFill>
                   <a:srgbClr val="8C857B"/>
                 </a:solidFill>
@@ -28984,7 +30828,7 @@
               </a:rPr>
               <a:t>Handles interactions</a:t>
             </a:r>
-            <a:endParaRPr lang="en-US" sz="1467" dirty="0"/>
+            <a:endParaRPr lang="en-US" b="1" dirty="0"/>
           </a:p>
         </p:txBody>
       </p:sp>
@@ -29147,7 +30991,7 @@
           <a:lstStyle/>
           <a:p>
             <a:r>
-              <a:rPr lang="en-US" sz="1467" dirty="0">
+              <a:rPr lang="en-US" b="1" dirty="0">
                 <a:solidFill>
                   <a:srgbClr val="8C857B"/>
                 </a:solidFill>
@@ -29157,7 +31001,7 @@
               </a:rPr>
               <a:t>Gradient boosting</a:t>
             </a:r>
-            <a:endParaRPr lang="en-US" sz="1467" dirty="0"/>
+            <a:endParaRPr lang="en-US" b="1" dirty="0"/>
           </a:p>
         </p:txBody>
       </p:sp>
@@ -29183,7 +31027,7 @@
           <a:lstStyle/>
           <a:p>
             <a:r>
-              <a:rPr lang="en-US" sz="1467" dirty="0">
+              <a:rPr lang="en-US" b="1" dirty="0">
                 <a:solidFill>
                   <a:srgbClr val="8C857B"/>
                 </a:solidFill>
@@ -29193,7 +31037,7 @@
               </a:rPr>
               <a:t>High predictive power</a:t>
             </a:r>
-            <a:endParaRPr lang="en-US" sz="1467" dirty="0"/>
+            <a:endParaRPr lang="en-US" b="1" dirty="0"/>
           </a:p>
         </p:txBody>
       </p:sp>
@@ -29219,7 +31063,7 @@
           <a:lstStyle/>
           <a:p>
             <a:r>
-              <a:rPr lang="en-US" sz="1467" dirty="0">
+              <a:rPr lang="en-US" b="1" dirty="0">
                 <a:solidFill>
                   <a:srgbClr val="8C857B"/>
                 </a:solidFill>
@@ -29229,7 +31073,7 @@
               </a:rPr>
               <a:t>Sequential tree boosting</a:t>
             </a:r>
-            <a:endParaRPr lang="en-US" sz="1467" dirty="0"/>
+            <a:endParaRPr lang="en-US" b="1" dirty="0"/>
           </a:p>
         </p:txBody>
       </p:sp>
@@ -29282,7 +31126,7 @@
           <a:lstStyle/>
           <a:p>
             <a:r>
-              <a:rPr lang="en-US" sz="1600" dirty="0">
+              <a:rPr lang="en-US" sz="2000" b="1" dirty="0">
                 <a:solidFill>
                   <a:srgbClr val="FF671F"/>
                 </a:solidFill>
@@ -29292,7 +31136,7 @@
               </a:rPr>
               <a:t>Testing diverse approaches ensures robustness and identifies which captures PM2.5 patterns best</a:t>
             </a:r>
-            <a:endParaRPr lang="en-US" sz="1600" dirty="0"/>
+            <a:endParaRPr lang="en-US" sz="2000" b="1" dirty="0"/>
           </a:p>
         </p:txBody>
       </p:sp>
@@ -29925,29 +31769,6 @@
 </file>
 
 <file path=customXml/item1.xml><?xml version="1.0" encoding="utf-8"?>
-<p:properties xmlns:p="http://schemas.microsoft.com/office/2006/metadata/properties" xmlns:xsi="http://www.w3.org/2001/XMLSchema-instance" xmlns:pc="http://schemas.microsoft.com/office/infopath/2007/PartnerControls">
-  <documentManagement>
-    <SharedWithUsers xmlns="7a4191d5-9b76-4ae3-8401-87ceee92a846">
-      <UserInfo>
-        <DisplayName>Office Of Advancement Visitors</DisplayName>
-        <AccountId>4</AccountId>
-        <AccountType/>
-      </UserInfo>
-      <UserInfo>
-        <DisplayName>UCalgary Brand</DisplayName>
-        <AccountId>15</AccountId>
-        <AccountType/>
-      </UserInfo>
-    </SharedWithUsers>
-    <TaxCatchAll xmlns="7a4191d5-9b76-4ae3-8401-87ceee92a846" xsi:nil="true"/>
-    <lcf76f155ced4ddcb4097134ff3c332f xmlns="b9b0194d-1e98-4efc-bad5-9450f4bf7a13">
-      <Terms xmlns="http://schemas.microsoft.com/office/infopath/2007/PartnerControls"/>
-    </lcf76f155ced4ddcb4097134ff3c332f>
-  </documentManagement>
-</p:properties>
-</file>
-
-<file path=customXml/item2.xml><?xml version="1.0" encoding="utf-8"?>
 <?mso-contentType ?>
 <FormTemplates xmlns="http://schemas.microsoft.com/sharepoint/v3/contenttype/forms">
   <Display>DocumentLibraryForm</Display>
@@ -29956,7 +31777,7 @@
 </FormTemplates>
 </file>
 
-<file path=customXml/item3.xml><?xml version="1.0" encoding="utf-8"?>
+<file path=customXml/item2.xml><?xml version="1.0" encoding="utf-8"?>
 <ct:contentTypeSchema xmlns:ct="http://schemas.microsoft.com/office/2006/metadata/contentType" xmlns:ma="http://schemas.microsoft.com/office/2006/metadata/properties/metaAttributes" ct:_="" ma:_="" ma:contentTypeName="文档" ma:contentTypeID="0x010100A14D9A0FA515564792FEACC70AB1043E" ma:contentTypeVersion="15" ma:contentTypeDescription="Create a new document." ma:contentTypeScope="" ma:versionID="268d53061a527a1a15b3a06f324de7ac">
   <xsd:schema xmlns:xsd="http://www.w3.org/2001/XMLSchema" xmlns:xs="http://www.w3.org/2001/XMLSchema" xmlns:p="http://schemas.microsoft.com/office/2006/metadata/properties" xmlns:ns2="7a4191d5-9b76-4ae3-8401-87ceee92a846" xmlns:ns3="b9b0194d-1e98-4efc-bad5-9450f4bf7a13" targetNamespace="http://schemas.microsoft.com/office/2006/metadata/properties" ma:root="true" ma:fieldsID="602eb0f4584b499882d83f15ecf09c65" ns2:_="" ns3:_="">
     <xsd:import namespace="7a4191d5-9b76-4ae3-8401-87ceee92a846"/>
@@ -30179,18 +32000,30 @@
 </ct:contentTypeSchema>
 </file>
 
-<file path=customXml/itemProps1.xml><?xml version="1.0" encoding="utf-8"?>
-<ds:datastoreItem xmlns:ds="http://schemas.openxmlformats.org/officeDocument/2006/customXml" ds:itemID="{F0B8F560-7E6C-44AE-AFE4-924D1118F0AA}">
-  <ds:schemaRefs>
-    <ds:schemaRef ds:uri="http://schemas.microsoft.com/office/2006/metadata/properties"/>
-    <ds:schemaRef ds:uri="http://schemas.microsoft.com/office/infopath/2007/PartnerControls"/>
-    <ds:schemaRef ds:uri="7a4191d5-9b76-4ae3-8401-87ceee92a846"/>
-    <ds:schemaRef ds:uri="b9b0194d-1e98-4efc-bad5-9450f4bf7a13"/>
-  </ds:schemaRefs>
-</ds:datastoreItem>
+<file path=customXml/item3.xml><?xml version="1.0" encoding="utf-8"?>
+<p:properties xmlns:p="http://schemas.microsoft.com/office/2006/metadata/properties" xmlns:xsi="http://www.w3.org/2001/XMLSchema-instance" xmlns:pc="http://schemas.microsoft.com/office/infopath/2007/PartnerControls">
+  <documentManagement>
+    <SharedWithUsers xmlns="7a4191d5-9b76-4ae3-8401-87ceee92a846">
+      <UserInfo>
+        <DisplayName>Office Of Advancement Visitors</DisplayName>
+        <AccountId>4</AccountId>
+        <AccountType/>
+      </UserInfo>
+      <UserInfo>
+        <DisplayName>UCalgary Brand</DisplayName>
+        <AccountId>15</AccountId>
+        <AccountType/>
+      </UserInfo>
+    </SharedWithUsers>
+    <TaxCatchAll xmlns="7a4191d5-9b76-4ae3-8401-87ceee92a846" xsi:nil="true"/>
+    <lcf76f155ced4ddcb4097134ff3c332f xmlns="b9b0194d-1e98-4efc-bad5-9450f4bf7a13">
+      <Terms xmlns="http://schemas.microsoft.com/office/infopath/2007/PartnerControls"/>
+    </lcf76f155ced4ddcb4097134ff3c332f>
+  </documentManagement>
+</p:properties>
 </file>
 
-<file path=customXml/itemProps2.xml><?xml version="1.0" encoding="utf-8"?>
+<file path=customXml/itemProps1.xml><?xml version="1.0" encoding="utf-8"?>
 <ds:datastoreItem xmlns:ds="http://schemas.openxmlformats.org/officeDocument/2006/customXml" ds:itemID="{67A4AE25-BBA1-49A6-B4F8-E97286BA017A}">
   <ds:schemaRefs>
     <ds:schemaRef ds:uri="http://schemas.microsoft.com/sharepoint/v3/contenttype/forms"/>
@@ -30198,7 +32031,7 @@
 </ds:datastoreItem>
 </file>
 
-<file path=customXml/itemProps3.xml><?xml version="1.0" encoding="utf-8"?>
+<file path=customXml/itemProps2.xml><?xml version="1.0" encoding="utf-8"?>
 <ds:datastoreItem xmlns:ds="http://schemas.openxmlformats.org/officeDocument/2006/customXml" ds:itemID="{E8C4D92C-5791-4EB8-90FF-890DA6933338}">
   <ds:schemaRefs>
     <ds:schemaRef ds:uri="http://schemas.microsoft.com/office/2006/metadata/contentType"/>
@@ -30215,4 +32048,15 @@
     <ds:schemaRef ds:uri="http://schemas.microsoft.com/internal/obd"/>
   </ds:schemaRefs>
 </ds:datastoreItem>
+</file>
+
+<file path=customXml/itemProps3.xml><?xml version="1.0" encoding="utf-8"?>
+<ds:datastoreItem xmlns:ds="http://schemas.openxmlformats.org/officeDocument/2006/customXml" ds:itemID="{F0B8F560-7E6C-44AE-AFE4-924D1118F0AA}">
+  <ds:schemaRefs>
+    <ds:schemaRef ds:uri="http://schemas.microsoft.com/office/2006/metadata/properties"/>
+    <ds:schemaRef ds:uri="http://schemas.microsoft.com/office/infopath/2007/PartnerControls"/>
+    <ds:schemaRef ds:uri="7a4191d5-9b76-4ae3-8401-87ceee92a846"/>
+    <ds:schemaRef ds:uri="b9b0194d-1e98-4efc-bad5-9450f4bf7a13"/>
+  </ds:schemaRefs>
+</ds:datastoreItem>
 </file>